--- a/decks/new-school-who-dis-lesson-v2.pptx
+++ b/decks/new-school-who-dis-lesson-v2.pptx
@@ -16,6 +16,7 @@
     <p:sldId id="264" r:id="rId16"/>
     <p:sldId id="265" r:id="rId17"/>
     <p:sldId id="266" r:id="rId18"/>
+    <p:sldId id="267" r:id="rId19"/>
   </p:sldIdLst>
   <p:sldSz cx="12192000" cy="6858000" type="screen4x3"/>
   <p:notesSz cx="6858000" cy="9144000"/>
@@ -512,7 +513,7 @@
           <a:lstStyle/>
           <a:p>
             <a:r>
-              <a:t>This page and the next three are hidden. They stay in the deck for you and are skipped when you present.</a:t>
+              <a:t>This page is hidden and skipped when you present. The full plan, care notes and research are on the hidden pages at the end of the deck, if you want them.</a:t>
             </a:r>
           </a:p>
         </p:txBody>
@@ -1003,6 +1004,76 @@
           <a:p>
             <a:r>
               <a:t>3 MINUTES. Private, on the card. Students who aren't new can write one way they'll add hours for someone who is. Nobody shares. Share the student page link (post it on your advisory page too). It has the hours math, the moves, a private check-in, and who to talk to. Close with: "No group yet is arithmetic. Keep logging the hours." Remind students that dreading school most mornings, or still feeling alone most of the time after a couple of months, is a good reason to see a counselor. They help new students all the time.</a:t>
+            </a:r>
+          </a:p>
+        </p:txBody>
+      </p:sp>
+      <p:sp>
+        <p:nvSpPr>
+          <p:cNvPr id="4" name="Slide Number Placeholder 3"/>
+          <p:cNvSpPr>
+            <a:spLocks noGrp="1"/>
+          </p:cNvSpPr>
+          <p:nvPr>
+            <p:ph type="sldNum" idx="5" sz="quarter"/>
+          </p:nvPr>
+        </p:nvSpPr>
+        <p:spPr/>
+      </p:sp>
+    </p:spTree>
+  </p:cSld>
+  <p:clrMapOvr>
+    <a:masterClrMapping/>
+  </p:clrMapOvr>
+</p:notes>
+</file>
+
+<file path=ppt/notesSlides/notesSlide9.xml><?xml version="1.0" encoding="utf-8"?>
+<p:notes xmlns:a="http://schemas.openxmlformats.org/drawingml/2006/main" xmlns:p="http://schemas.openxmlformats.org/presentationml/2006/main" xmlns:r="http://schemas.openxmlformats.org/officeDocument/2006/relationships">
+  <p:cSld>
+    <p:spTree>
+      <p:nvGrpSpPr>
+        <p:cNvPr id="1" name=""/>
+        <p:cNvGrpSpPr/>
+        <p:nvPr/>
+      </p:nvGrpSpPr>
+      <p:grpSpPr>
+        <a:xfrm>
+          <a:off x="0" y="0"/>
+          <a:ext cx="0" cy="0"/>
+          <a:chOff x="0" y="0"/>
+          <a:chExt cx="0" cy="0"/>
+        </a:xfrm>
+      </p:grpSpPr>
+      <p:sp>
+        <p:nvSpPr>
+          <p:cNvPr id="2" name="Slide Image Placeholder 1"/>
+          <p:cNvSpPr>
+            <a:spLocks noGrp="1"/>
+          </p:cNvSpPr>
+          <p:nvPr>
+            <p:ph type="sldImg" idx="2"/>
+          </p:nvPr>
+        </p:nvSpPr>
+        <p:spPr/>
+      </p:sp>
+      <p:sp>
+        <p:nvSpPr>
+          <p:cNvPr id="3" name="Notes Placeholder 2"/>
+          <p:cNvSpPr>
+            <a:spLocks noGrp="1"/>
+          </p:cNvSpPr>
+          <p:nvPr>
+            <p:ph type="body" idx="3" sz="quarter"/>
+          </p:nvPr>
+        </p:nvSpPr>
+        <p:spPr/>
+        <p:txBody>
+          <a:bodyPr/>
+          <a:lstStyle/>
+          <a:p>
+            <a:r>
+              <a:t>If you want more: this page and the next three are hidden and skipped when you present.</a:t>
             </a:r>
           </a:p>
         </p:txBody>
@@ -4094,7 +4165,7 @@
                 </a:solidFill>
                 <a:latin typeface="Inter Tight"/>
               </a:rPr>
-              <a:t>TEACHER PAGE  ·  skipped when you present  ·  Lesson plan</a:t>
+              <a:t>TEACHER PAGE  ·  skipped when you present  ·  Before you start</a:t>
             </a:r>
           </a:p>
         </p:txBody>
@@ -4185,8 +4256,8 @@
         </p:nvSpPr>
         <p:spPr>
           <a:xfrm>
-            <a:off x="548640" y="1828800"/>
-            <a:ext cx="5120640" cy="4389120"/>
+            <a:off x="548640" y="2011680"/>
+            <a:ext cx="11064240" cy="4206240"/>
           </a:xfrm>
           <a:prstGeom prst="rect">
             <a:avLst/>
@@ -4201,43 +4272,43 @@
           <a:p>
             <a:pPr algn="l">
               <a:spcAft>
-                <a:spcPts val="675"/>
-              </a:spcAft>
-            </a:pPr>
-            <a:r>
-              <a:rPr sz="1100" b="1" i="0">
+                <a:spcPts val="900"/>
+              </a:spcAft>
+            </a:pPr>
+            <a:r>
+              <a:rPr sz="1200" b="1" i="0">
                 <a:solidFill>
                   <a:srgbClr val="0B2D5B"/>
                 </a:solidFill>
                 <a:latin typeface="Inter Tight"/>
               </a:rPr>
-              <a:t>GOAL</a:t>
-            </a:r>
-          </a:p>
-          <a:p>
-            <a:pPr algn="l">
-              <a:spcAft>
-                <a:spcPts val="675"/>
-              </a:spcAft>
-            </a:pPr>
-            <a:r>
-              <a:rPr sz="1500" b="0" i="0">
+              <a:t>BEFORE YOU START</a:t>
+            </a:r>
+          </a:p>
+          <a:p>
+            <a:pPr algn="l">
+              <a:spcAft>
+                <a:spcPts val="900"/>
+              </a:spcAft>
+            </a:pPr>
+            <a:r>
+              <a:rPr sz="2000" b="0" i="0">
                 <a:solidFill>
                   <a:srgbClr val="1C1B19"/>
                 </a:solidFill>
                 <a:latin typeface="Source Serif 4"/>
               </a:rPr>
-              <a:t>Students can explain why friendships take time (they run on hours together), use the liking gap to act on the better guess after an awkward conversation, and pick one thing that repeats. Students who aren't new pick one way to add hours for someone who is.</a:t>
-            </a:r>
-          </a:p>
-          <a:p>
-            <a:pPr algn="l">
-              <a:spcAft>
-                <a:spcPts val="675"/>
-              </a:spcAft>
-            </a:pPr>
-            <a:r>
-              <a:rPr sz="1500" b="0" i="0">
+              <a:t>Students learn that friendships run on hours together and that people like us more than we guess, then pick one thing that repeats. Bring index cards, don't ask who's new or why anyone moved, and give students who aren't new a way to add hours for someone who is.</a:t>
+            </a:r>
+          </a:p>
+          <a:p>
+            <a:pPr algn="l">
+              <a:spcAft>
+                <a:spcPts val="900"/>
+              </a:spcAft>
+            </a:pPr>
+            <a:r>
+              <a:rPr sz="2000" b="0" i="0">
                 <a:solidFill>
                   <a:srgbClr val="1C1B19"/>
                 </a:solidFill>
@@ -4249,302 +4320,33 @@
           <a:p>
             <a:pPr algn="l">
               <a:spcAft>
-                <a:spcPts val="675"/>
-              </a:spcAft>
-            </a:pPr>
-            <a:r>
-              <a:rPr sz="1100" b="1" i="0">
+                <a:spcPts val="900"/>
+              </a:spcAft>
+            </a:pPr>
+            <a:r>
+              <a:rPr sz="1200" b="1" i="0">
                 <a:solidFill>
                   <a:srgbClr val="0B2D5B"/>
                 </a:solidFill>
                 <a:latin typeface="Inter Tight"/>
               </a:rPr>
-              <a:t>MATERIALS</a:t>
-            </a:r>
-          </a:p>
-          <a:p>
-            <a:pPr algn="l">
-              <a:spcAft>
-                <a:spcPts val="675"/>
-              </a:spcAft>
-            </a:pPr>
-            <a:r>
-              <a:rPr sz="1500" b="0" i="0">
+              <a:t>EVERY STUDENT IN THE ROOM</a:t>
+            </a:r>
+          </a:p>
+          <a:p>
+            <a:pPr algn="l">
+              <a:spcAft>
+                <a:spcPts val="900"/>
+              </a:spcAft>
+            </a:pPr>
+            <a:r>
+              <a:rPr sz="2000" b="0" i="0">
                 <a:solidFill>
                   <a:srgbClr val="1C1B19"/>
                 </a:solidFill>
                 <a:latin typeface="Source Serif 4"/>
               </a:rPr>
-              <a:t>Index cards: one per student, for the anonymous guess and the private plan</a:t>
-            </a:r>
-          </a:p>
-          <a:p>
-            <a:pPr algn="l">
-              <a:spcAft>
-                <a:spcPts val="675"/>
-              </a:spcAft>
-            </a:pPr>
-            <a:r>
-              <a:rPr sz="1500" b="0" i="0">
-                <a:solidFill>
-                  <a:srgbClr val="1C1B19"/>
-                </a:solidFill>
-                <a:latin typeface="Source Serif 4"/>
-              </a:rPr>
-              <a:t>A board or sheet of paper for the tally</a:t>
-            </a:r>
-          </a:p>
-          <a:p>
-            <a:pPr algn="l">
-              <a:spcAft>
-                <a:spcPts val="675"/>
-              </a:spcAft>
-            </a:pPr>
-            <a:r>
-              <a:rPr sz="1500" b="0" i="0">
-                <a:solidFill>
-                  <a:srgbClr val="1C1B19"/>
-                </a:solidFill>
-                <a:latin typeface="Source Serif 4"/>
-              </a:rPr>
-              <a:t>The student page link (last slide) to share after advisory</a:t>
-            </a:r>
-          </a:p>
-        </p:txBody>
-      </p:sp>
-      <p:sp>
-        <p:nvSpPr>
-          <p:cNvPr id="7" name="TextBox 6"/>
-          <p:cNvSpPr txBox="1"/>
-          <p:nvPr/>
-        </p:nvSpPr>
-        <p:spPr>
-          <a:xfrm>
-            <a:off x="6126480" y="1828800"/>
-            <a:ext cx="5486400" cy="4389120"/>
-          </a:xfrm>
-          <a:prstGeom prst="rect">
-            <a:avLst/>
-          </a:prstGeom>
-          <a:noFill/>
-        </p:spPr>
-        <p:txBody>
-          <a:bodyPr wrap="square" anchor="t" lIns="0" rIns="0" tIns="0" bIns="0">
-            <a:spAutoFit/>
-          </a:bodyPr>
-          <a:lstStyle/>
-          <a:p>
-            <a:pPr algn="l">
-              <a:spcAft>
-                <a:spcPts val="630"/>
-              </a:spcAft>
-            </a:pPr>
-            <a:r>
-              <a:rPr sz="1100" b="1" i="0">
-                <a:solidFill>
-                  <a:srgbClr val="0B2D5B"/>
-                </a:solidFill>
-                <a:latin typeface="Inter Tight"/>
-              </a:rPr>
-              <a:t>FLOW</a:t>
-            </a:r>
-          </a:p>
-          <a:p>
-            <a:pPr algn="l">
-              <a:spcAft>
-                <a:spcPts val="630"/>
-              </a:spcAft>
-            </a:pPr>
-            <a:r>
-              <a:rPr sz="1300" b="1" i="0">
-                <a:solidFill>
-                  <a:srgbClr val="F47B20"/>
-                </a:solidFill>
-                <a:latin typeface="Inter Tight"/>
-              </a:rPr>
-              <a:t>3 min   </a:t>
-            </a:r>
-            <a:r>
-              <a:rPr sz="1400" b="0" i="0">
-                <a:solidFill>
-                  <a:srgbClr val="1C1B19"/>
-                </a:solidFill>
-                <a:latin typeface="Source Serif 4"/>
-              </a:rPr>
-              <a:t>The guess (anonymous cards)</a:t>
-            </a:r>
-          </a:p>
-          <a:p>
-            <a:pPr algn="l">
-              <a:spcAft>
-                <a:spcPts val="630"/>
-              </a:spcAft>
-            </a:pPr>
-            <a:r>
-              <a:rPr sz="1300" b="1" i="0">
-                <a:solidFill>
-                  <a:srgbClr val="F47B20"/>
-                </a:solidFill>
-                <a:latin typeface="Inter Tight"/>
-              </a:rPr>
-              <a:t>4 min   </a:t>
-            </a:r>
-            <a:r>
-              <a:rPr sz="1400" b="0" i="0">
-                <a:solidFill>
-                  <a:srgbClr val="1C1B19"/>
-                </a:solidFill>
-                <a:latin typeface="Source Serif 4"/>
-              </a:rPr>
-              <a:t>Friendship runs on hours</a:t>
-            </a:r>
-          </a:p>
-          <a:p>
-            <a:pPr algn="l">
-              <a:spcAft>
-                <a:spcPts val="630"/>
-              </a:spcAft>
-            </a:pPr>
-            <a:r>
-              <a:rPr sz="1300" b="1" i="0">
-                <a:solidFill>
-                  <a:srgbClr val="F47B20"/>
-                </a:solidFill>
-                <a:latin typeface="Inter Tight"/>
-              </a:rPr>
-              <a:t>3 min   </a:t>
-            </a:r>
-            <a:r>
-              <a:rPr sz="1400" b="0" i="0">
-                <a:solidFill>
-                  <a:srgbClr val="1C1B19"/>
-                </a:solidFill>
-                <a:latin typeface="Source Serif 4"/>
-              </a:rPr>
-              <a:t>The liking gap (pair-share)</a:t>
-            </a:r>
-          </a:p>
-          <a:p>
-            <a:pPr algn="l">
-              <a:spcAft>
-                <a:spcPts val="630"/>
-              </a:spcAft>
-            </a:pPr>
-            <a:r>
-              <a:rPr sz="1300" b="1" i="0">
-                <a:solidFill>
-                  <a:srgbClr val="F47B20"/>
-                </a:solidFill>
-                <a:latin typeface="Inter Tight"/>
-              </a:rPr>
-              <a:t>3 min   </a:t>
-            </a:r>
-            <a:r>
-              <a:rPr sz="1400" b="0" i="0">
-                <a:solidFill>
-                  <a:srgbClr val="1C1B19"/>
-                </a:solidFill>
-                <a:latin typeface="Source Serif 4"/>
-              </a:rPr>
-              <a:t>More hours, better hours</a:t>
-            </a:r>
-          </a:p>
-          <a:p>
-            <a:pPr algn="l">
-              <a:spcAft>
-                <a:spcPts val="630"/>
-              </a:spcAft>
-            </a:pPr>
-            <a:r>
-              <a:rPr sz="1300" b="1" i="0">
-                <a:solidFill>
-                  <a:srgbClr val="F47B20"/>
-                </a:solidFill>
-                <a:latin typeface="Inter Tight"/>
-              </a:rPr>
-              <a:t>4 min   </a:t>
-            </a:r>
-            <a:r>
-              <a:rPr sz="1400" b="0" i="0">
-                <a:solidFill>
-                  <a:srgbClr val="1C1B19"/>
-                </a:solidFill>
-                <a:latin typeface="Source Serif 4"/>
-              </a:rPr>
-              <a:t>Three moments (scenario talk)</a:t>
-            </a:r>
-          </a:p>
-          <a:p>
-            <a:pPr algn="l">
-              <a:spcAft>
-                <a:spcPts val="630"/>
-              </a:spcAft>
-            </a:pPr>
-            <a:r>
-              <a:rPr sz="1300" b="1" i="0">
-                <a:solidFill>
-                  <a:srgbClr val="F47B20"/>
-                </a:solidFill>
-                <a:latin typeface="Inter Tight"/>
-              </a:rPr>
-              <a:t>3 min   </a:t>
-            </a:r>
-            <a:r>
-              <a:rPr sz="1400" b="0" i="0">
-                <a:solidFill>
-                  <a:srgbClr val="1C1B19"/>
-                </a:solidFill>
-                <a:latin typeface="Source Serif 4"/>
-              </a:rPr>
-              <a:t>One thing that repeats (private card) and the link</a:t>
-            </a:r>
-          </a:p>
-          <a:p>
-            <a:pPr algn="l">
-              <a:spcAft>
-                <a:spcPts val="630"/>
-              </a:spcAft>
-            </a:pPr>
-            <a:r>
-              <a:rPr sz="1400" b="0" i="0">
-                <a:solidFill>
-                  <a:srgbClr val="1C1B19"/>
-                </a:solidFill>
-                <a:latin typeface="Source Serif 4"/>
-              </a:rPr>
-              <a:t/>
-            </a:r>
-          </a:p>
-          <a:p>
-            <a:pPr algn="l">
-              <a:spcAft>
-                <a:spcPts val="630"/>
-              </a:spcAft>
-            </a:pPr>
-            <a:r>
-              <a:rPr sz="1100" b="1" i="0">
-                <a:solidFill>
-                  <a:srgbClr val="0B2D5B"/>
-                </a:solidFill>
-                <a:latin typeface="Inter Tight"/>
-              </a:rPr>
-              <a:t>SHORT ON TIME (10-MINUTE CHECK-IN)</a:t>
-            </a:r>
-          </a:p>
-          <a:p>
-            <a:pPr algn="l">
-              <a:spcAft>
-                <a:spcPts val="630"/>
-              </a:spcAft>
-            </a:pPr>
-            <a:r>
-              <a:rPr sz="1400" b="0" i="0">
-                <a:solidFill>
-                  <a:srgbClr val="1C1B19"/>
-                </a:solidFill>
-                <a:latin typeface="Source Serif 4"/>
-              </a:rPr>
-              <a:t>The guess and the tally (3), friendship runs on hours (3), the liking gap (2), one thing that repeats and the link (2).</a:t>
+              <a:t>For students who share their race, faith or home language with few others here, "do I belong?" can be louder; point to repeat places that cost nothing, like a job, a faith group or a free club.</a:t>
             </a:r>
           </a:p>
         </p:txBody>
@@ -4558,6 +4360,1660 @@
 </file>
 
 <file path=ppt/slides/slide10.xml><?xml version="1.0" encoding="utf-8"?>
+<p:sld xmlns:a="http://schemas.openxmlformats.org/drawingml/2006/main" xmlns:p="http://schemas.openxmlformats.org/presentationml/2006/main" xmlns:r="http://schemas.openxmlformats.org/officeDocument/2006/relationships" show="0">
+  <p:cSld>
+    <p:bg>
+      <p:bgPr>
+        <a:solidFill>
+          <a:srgbClr val="EEEBE4"/>
+        </a:solidFill>
+        <a:effectLst/>
+      </p:bgPr>
+    </p:bg>
+    <p:spTree>
+      <p:nvGrpSpPr>
+        <p:cNvPr id="1" name=""/>
+        <p:cNvGrpSpPr/>
+        <p:nvPr/>
+      </p:nvGrpSpPr>
+      <p:grpSpPr/>
+      <p:sp>
+        <p:nvSpPr>
+          <p:cNvPr id="2" name="Rectangle 1"/>
+          <p:cNvSpPr/>
+          <p:nvPr/>
+        </p:nvSpPr>
+        <p:spPr>
+          <a:xfrm>
+            <a:off x="0" y="0"/>
+            <a:ext cx="12191695" cy="384048"/>
+          </a:xfrm>
+          <a:prstGeom prst="rect">
+            <a:avLst/>
+          </a:prstGeom>
+          <a:solidFill>
+            <a:srgbClr val="0B2D5B"/>
+          </a:solidFill>
+          <a:ln>
+            <a:noFill/>
+          </a:ln>
+          <a:effectLst/>
+        </p:spPr>
+        <p:style>
+          <a:lnRef idx="1">
+            <a:schemeClr val="accent1"/>
+          </a:lnRef>
+          <a:fillRef idx="3">
+            <a:schemeClr val="accent1"/>
+          </a:fillRef>
+          <a:effectRef idx="2">
+            <a:schemeClr val="accent1"/>
+          </a:effectRef>
+          <a:fontRef idx="minor">
+            <a:schemeClr val="lt1"/>
+          </a:fontRef>
+        </p:style>
+        <p:txBody>
+          <a:bodyPr rtlCol="0" anchor="ctr"/>
+          <a:lstStyle/>
+          <a:p>
+            <a:pPr algn="ctr"/>
+          </a:p>
+        </p:txBody>
+      </p:sp>
+      <p:sp>
+        <p:nvSpPr>
+          <p:cNvPr id="3" name="TextBox 2"/>
+          <p:cNvSpPr txBox="1"/>
+          <p:nvPr/>
+        </p:nvSpPr>
+        <p:spPr>
+          <a:xfrm>
+            <a:off x="548640" y="100584"/>
+            <a:ext cx="10972800" cy="274320"/>
+          </a:xfrm>
+          <a:prstGeom prst="rect">
+            <a:avLst/>
+          </a:prstGeom>
+          <a:noFill/>
+        </p:spPr>
+        <p:txBody>
+          <a:bodyPr wrap="square" anchor="t" lIns="0" rIns="0" tIns="0" bIns="0">
+            <a:spAutoFit/>
+          </a:bodyPr>
+          <a:lstStyle/>
+          <a:p>
+            <a:pPr algn="l">
+              <a:spcAft>
+                <a:spcPts val="495"/>
+              </a:spcAft>
+            </a:pPr>
+            <a:r>
+              <a:rPr sz="1100" b="1" i="0">
+                <a:solidFill>
+                  <a:srgbClr val="FFFFFF"/>
+                </a:solidFill>
+                <a:latin typeface="Inter Tight"/>
+              </a:rPr>
+              <a:t>TEACHER PAGE  ·  skipped when you present  ·  Before you teach</a:t>
+            </a:r>
+          </a:p>
+        </p:txBody>
+      </p:sp>
+      <p:sp>
+        <p:nvSpPr>
+          <p:cNvPr id="4" name="TextBox 3"/>
+          <p:cNvSpPr txBox="1"/>
+          <p:nvPr/>
+        </p:nvSpPr>
+        <p:spPr>
+          <a:xfrm>
+            <a:off x="548640" y="685800"/>
+            <a:ext cx="10972800" cy="640080"/>
+          </a:xfrm>
+          <a:prstGeom prst="rect">
+            <a:avLst/>
+          </a:prstGeom>
+          <a:noFill/>
+        </p:spPr>
+        <p:txBody>
+          <a:bodyPr wrap="square" anchor="t" lIns="0" rIns="0" tIns="0" bIns="0">
+            <a:spAutoFit/>
+          </a:bodyPr>
+          <a:lstStyle/>
+          <a:p>
+            <a:pPr algn="l">
+              <a:spcAft>
+                <a:spcPts val="1350"/>
+              </a:spcAft>
+            </a:pPr>
+            <a:r>
+              <a:rPr sz="3000" b="1" i="0">
+                <a:solidFill>
+                  <a:srgbClr val="1C1B19"/>
+                </a:solidFill>
+                <a:latin typeface="Source Serif 4"/>
+              </a:rPr>
+              <a:t>Before you teach</a:t>
+            </a:r>
+          </a:p>
+        </p:txBody>
+      </p:sp>
+      <p:sp>
+        <p:nvSpPr>
+          <p:cNvPr id="5" name="TextBox 4"/>
+          <p:cNvSpPr txBox="1"/>
+          <p:nvPr/>
+        </p:nvSpPr>
+        <p:spPr>
+          <a:xfrm>
+            <a:off x="548640" y="1463040"/>
+            <a:ext cx="5394960" cy="4937760"/>
+          </a:xfrm>
+          <a:prstGeom prst="rect">
+            <a:avLst/>
+          </a:prstGeom>
+          <a:noFill/>
+        </p:spPr>
+        <p:txBody>
+          <a:bodyPr wrap="square" anchor="t" lIns="0" rIns="0" tIns="0" bIns="0">
+            <a:spAutoFit/>
+          </a:bodyPr>
+          <a:lstStyle/>
+          <a:p>
+            <a:pPr algn="l">
+              <a:spcAft>
+                <a:spcPts val="585"/>
+              </a:spcAft>
+            </a:pPr>
+            <a:r>
+              <a:rPr sz="1500" b="1" i="0">
+                <a:solidFill>
+                  <a:srgbClr val="1C1B19"/>
+                </a:solidFill>
+                <a:latin typeface="Source Serif 4"/>
+              </a:rPr>
+              <a:t>Don't ask who's new.</a:t>
+            </a:r>
+          </a:p>
+          <a:p>
+            <a:pPr algn="l">
+              <a:spcAft>
+                <a:spcPts val="585"/>
+              </a:spcAft>
+            </a:pPr>
+            <a:r>
+              <a:rPr sz="1300" b="0" i="0">
+                <a:solidFill>
+                  <a:srgbClr val="1C1B19"/>
+                </a:solidFill>
+                <a:latin typeface="Source Serif 4"/>
+              </a:rPr>
+              <a:t>Some students arrived this fall, and some have been at Beaver for years. Don't ask for a show of hands or put a new student on the spot to talk about it. The guess on slide 2 works for everyone, including seniors remembering their first month.</a:t>
+            </a:r>
+          </a:p>
+          <a:p>
+            <a:pPr algn="l">
+              <a:spcAft>
+                <a:spcPts val="585"/>
+              </a:spcAft>
+            </a:pPr>
+            <a:r>
+              <a:rPr sz="1300" b="0" i="0">
+                <a:solidFill>
+                  <a:srgbClr val="1C1B19"/>
+                </a:solidFill>
+                <a:latin typeface="Source Serif 4"/>
+              </a:rPr>
+              <a:t/>
+            </a:r>
+          </a:p>
+          <a:p>
+            <a:pPr algn="l">
+              <a:spcAft>
+                <a:spcPts val="585"/>
+              </a:spcAft>
+            </a:pPr>
+            <a:r>
+              <a:rPr sz="1500" b="1" i="0">
+                <a:solidFill>
+                  <a:srgbClr val="1C1B19"/>
+                </a:solidFill>
+                <a:latin typeface="Source Serif 4"/>
+              </a:rPr>
+              <a:t>Lonely is close to the surface.</a:t>
+            </a:r>
+          </a:p>
+          <a:p>
+            <a:pPr algn="l">
+              <a:spcAft>
+                <a:spcPts val="585"/>
+              </a:spcAft>
+            </a:pPr>
+            <a:r>
+              <a:rPr sz="1300" b="0" i="0">
+                <a:solidFill>
+                  <a:srgbClr val="1C1B19"/>
+                </a:solidFill>
+                <a:latin typeface="Source Serif 4"/>
+              </a:rPr>
+              <a:t>Someone in your circle may be eating lunch alone most days. Never ask who has a group or who they sit with. If a student seems isolated, check in privately afterward and loop in a counselor.</a:t>
+            </a:r>
+          </a:p>
+          <a:p>
+            <a:pPr algn="l">
+              <a:spcAft>
+                <a:spcPts val="585"/>
+              </a:spcAft>
+            </a:pPr>
+            <a:r>
+              <a:rPr sz="1300" b="0" i="0">
+                <a:solidFill>
+                  <a:srgbClr val="1C1B19"/>
+                </a:solidFill>
+                <a:latin typeface="Source Serif 4"/>
+              </a:rPr>
+              <a:t/>
+            </a:r>
+          </a:p>
+          <a:p>
+            <a:pPr algn="l">
+              <a:spcAft>
+                <a:spcPts val="585"/>
+              </a:spcAft>
+            </a:pPr>
+            <a:r>
+              <a:rPr sz="1500" b="1" i="0">
+                <a:solidFill>
+                  <a:srgbClr val="1C1B19"/>
+                </a:solidFill>
+                <a:latin typeface="Source Serif 4"/>
+              </a:rPr>
+              <a:t>Don't ask why anyone moved.</a:t>
+            </a:r>
+          </a:p>
+          <a:p>
+            <a:pPr algn="l">
+              <a:spcAft>
+                <a:spcPts val="585"/>
+              </a:spcAft>
+            </a:pPr>
+            <a:r>
+              <a:rPr sz="1300" b="0" i="0">
+                <a:solidFill>
+                  <a:srgbClr val="1C1B19"/>
+                </a:solidFill>
+                <a:latin typeface="Source Serif 4"/>
+              </a:rPr>
+              <a:t>Students change schools for all kinds of reasons: a job, a divorce, a death, a new home, immigration, a hard year somewhere else. The lesson is about what helps now.</a:t>
+            </a:r>
+          </a:p>
+          <a:p>
+            <a:pPr algn="l">
+              <a:spcAft>
+                <a:spcPts val="585"/>
+              </a:spcAft>
+            </a:pPr>
+            <a:r>
+              <a:rPr sz="1300" b="0" i="0">
+                <a:solidFill>
+                  <a:srgbClr val="1C1B19"/>
+                </a:solidFill>
+                <a:latin typeface="Source Serif 4"/>
+              </a:rPr>
+              <a:t/>
+            </a:r>
+          </a:p>
+        </p:txBody>
+      </p:sp>
+      <p:sp>
+        <p:nvSpPr>
+          <p:cNvPr id="6" name="TextBox 5"/>
+          <p:cNvSpPr txBox="1"/>
+          <p:nvPr/>
+        </p:nvSpPr>
+        <p:spPr>
+          <a:xfrm>
+            <a:off x="6217920" y="1463040"/>
+            <a:ext cx="5394960" cy="4937760"/>
+          </a:xfrm>
+          <a:prstGeom prst="rect">
+            <a:avLst/>
+          </a:prstGeom>
+          <a:noFill/>
+        </p:spPr>
+        <p:txBody>
+          <a:bodyPr wrap="square" anchor="t" lIns="0" rIns="0" tIns="0" bIns="0">
+            <a:spAutoFit/>
+          </a:bodyPr>
+          <a:lstStyle/>
+          <a:p>
+            <a:pPr algn="l">
+              <a:spcAft>
+                <a:spcPts val="585"/>
+              </a:spcAft>
+            </a:pPr>
+            <a:r>
+              <a:rPr sz="1500" b="1" i="0">
+                <a:solidFill>
+                  <a:srgbClr val="1C1B19"/>
+                </a:solidFill>
+                <a:latin typeface="Source Serif 4"/>
+              </a:rPr>
+              <a:t>Being left out on purpose is different.</a:t>
+            </a:r>
+          </a:p>
+          <a:p>
+            <a:pPr algn="l">
+              <a:spcAft>
+                <a:spcPts val="585"/>
+              </a:spcAft>
+            </a:pPr>
+            <a:r>
+              <a:rPr sz="1300" b="0" i="0">
+                <a:solidFill>
+                  <a:srgbClr val="1C1B19"/>
+                </a:solidFill>
+                <a:latin typeface="Source Serif 4"/>
+              </a:rPr>
+              <a:t>If a student is being targeted or excluded because of their race, religion, accent, or where they're from, that is a counselor or dean conversation that day, not a discussion topic.</a:t>
+            </a:r>
+          </a:p>
+          <a:p>
+            <a:pPr algn="l">
+              <a:spcAft>
+                <a:spcPts val="585"/>
+              </a:spcAft>
+            </a:pPr>
+            <a:r>
+              <a:rPr sz="1300" b="0" i="0">
+                <a:solidFill>
+                  <a:srgbClr val="1C1B19"/>
+                </a:solidFill>
+                <a:latin typeface="Source Serif 4"/>
+              </a:rPr>
+              <a:t/>
+            </a:r>
+          </a:p>
+          <a:p>
+            <a:pPr algn="l">
+              <a:spcAft>
+                <a:spcPts val="585"/>
+              </a:spcAft>
+            </a:pPr>
+            <a:r>
+              <a:rPr sz="1500" b="1" i="0">
+                <a:solidFill>
+                  <a:srgbClr val="1C1B19"/>
+                </a:solidFill>
+                <a:latin typeface="Source Serif 4"/>
+              </a:rPr>
+              <a:t>Know when it's more than new.</a:t>
+            </a:r>
+          </a:p>
+          <a:p>
+            <a:pPr algn="l">
+              <a:spcAft>
+                <a:spcPts val="585"/>
+              </a:spcAft>
+            </a:pPr>
+            <a:r>
+              <a:rPr sz="1300" b="0" i="0">
+                <a:solidFill>
+                  <a:srgbClr val="1C1B19"/>
+                </a:solidFill>
+                <a:latin typeface="Source Serif 4"/>
+              </a:rPr>
+              <a:t>Dreading school most mornings, feeling sick before coming, still feeling alone most of the time after a couple of months, or big changes in sleep, eating or mood are reasons to see a counselor. Don't ask about these in advisory. Any disclosure goes to a counselor the same day, and 988 is there any time.</a:t>
+            </a:r>
+          </a:p>
+          <a:p>
+            <a:pPr algn="l">
+              <a:spcAft>
+                <a:spcPts val="585"/>
+              </a:spcAft>
+            </a:pPr>
+            <a:r>
+              <a:rPr sz="1300" b="0" i="0">
+                <a:solidFill>
+                  <a:srgbClr val="1C1B19"/>
+                </a:solidFill>
+                <a:latin typeface="Source Serif 4"/>
+              </a:rPr>
+              <a:t/>
+            </a:r>
+          </a:p>
+          <a:p>
+            <a:pPr algn="l">
+              <a:spcAft>
+                <a:spcPts val="585"/>
+              </a:spcAft>
+            </a:pPr>
+            <a:r>
+              <a:rPr sz="1500" b="1" i="0">
+                <a:solidFill>
+                  <a:srgbClr val="1C1B19"/>
+                </a:solidFill>
+                <a:latin typeface="Source Serif 4"/>
+              </a:rPr>
+              <a:t>Old friends are a real support.</a:t>
+            </a:r>
+          </a:p>
+          <a:p>
+            <a:pPr algn="l">
+              <a:spcAft>
+                <a:spcPts val="585"/>
+              </a:spcAft>
+            </a:pPr>
+            <a:r>
+              <a:rPr sz="1300" b="0" i="0">
+                <a:solidFill>
+                  <a:srgbClr val="1C1B19"/>
+                </a:solidFill>
+                <a:latin typeface="Source Serif 4"/>
+              </a:rPr>
+              <a:t>Don't frame old friends as something to drop. The goal is keeping some time open for new hours to happen.</a:t>
+            </a:r>
+          </a:p>
+          <a:p>
+            <a:pPr algn="l">
+              <a:spcAft>
+                <a:spcPts val="585"/>
+              </a:spcAft>
+            </a:pPr>
+            <a:r>
+              <a:rPr sz="1300" b="0" i="0">
+                <a:solidFill>
+                  <a:srgbClr val="1C1B19"/>
+                </a:solidFill>
+                <a:latin typeface="Source Serif 4"/>
+              </a:rPr>
+              <a:t/>
+            </a:r>
+          </a:p>
+        </p:txBody>
+      </p:sp>
+    </p:spTree>
+  </p:cSld>
+  <p:clrMapOvr>
+    <a:masterClrMapping/>
+  </p:clrMapOvr>
+</p:sld>
+</file>
+
+<file path=ppt/slides/slide11.xml><?xml version="1.0" encoding="utf-8"?>
+<p:sld xmlns:a="http://schemas.openxmlformats.org/drawingml/2006/main" xmlns:p="http://schemas.openxmlformats.org/presentationml/2006/main" xmlns:r="http://schemas.openxmlformats.org/officeDocument/2006/relationships" show="0">
+  <p:cSld>
+    <p:bg>
+      <p:bgPr>
+        <a:solidFill>
+          <a:srgbClr val="EEEBE4"/>
+        </a:solidFill>
+        <a:effectLst/>
+      </p:bgPr>
+    </p:bg>
+    <p:spTree>
+      <p:nvGrpSpPr>
+        <p:cNvPr id="1" name=""/>
+        <p:cNvGrpSpPr/>
+        <p:nvPr/>
+      </p:nvGrpSpPr>
+      <p:grpSpPr/>
+      <p:sp>
+        <p:nvSpPr>
+          <p:cNvPr id="2" name="Rectangle 1"/>
+          <p:cNvSpPr/>
+          <p:nvPr/>
+        </p:nvSpPr>
+        <p:spPr>
+          <a:xfrm>
+            <a:off x="0" y="0"/>
+            <a:ext cx="12191695" cy="384048"/>
+          </a:xfrm>
+          <a:prstGeom prst="rect">
+            <a:avLst/>
+          </a:prstGeom>
+          <a:solidFill>
+            <a:srgbClr val="0B2D5B"/>
+          </a:solidFill>
+          <a:ln>
+            <a:noFill/>
+          </a:ln>
+          <a:effectLst/>
+        </p:spPr>
+        <p:style>
+          <a:lnRef idx="1">
+            <a:schemeClr val="accent1"/>
+          </a:lnRef>
+          <a:fillRef idx="3">
+            <a:schemeClr val="accent1"/>
+          </a:fillRef>
+          <a:effectRef idx="2">
+            <a:schemeClr val="accent1"/>
+          </a:effectRef>
+          <a:fontRef idx="minor">
+            <a:schemeClr val="lt1"/>
+          </a:fontRef>
+        </p:style>
+        <p:txBody>
+          <a:bodyPr rtlCol="0" anchor="ctr"/>
+          <a:lstStyle/>
+          <a:p>
+            <a:pPr algn="ctr"/>
+          </a:p>
+        </p:txBody>
+      </p:sp>
+      <p:sp>
+        <p:nvSpPr>
+          <p:cNvPr id="3" name="TextBox 2"/>
+          <p:cNvSpPr txBox="1"/>
+          <p:nvPr/>
+        </p:nvSpPr>
+        <p:spPr>
+          <a:xfrm>
+            <a:off x="548640" y="100584"/>
+            <a:ext cx="10972800" cy="274320"/>
+          </a:xfrm>
+          <a:prstGeom prst="rect">
+            <a:avLst/>
+          </a:prstGeom>
+          <a:noFill/>
+        </p:spPr>
+        <p:txBody>
+          <a:bodyPr wrap="square" anchor="t" lIns="0" rIns="0" tIns="0" bIns="0">
+            <a:spAutoFit/>
+          </a:bodyPr>
+          <a:lstStyle/>
+          <a:p>
+            <a:pPr algn="l">
+              <a:spcAft>
+                <a:spcPts val="495"/>
+              </a:spcAft>
+            </a:pPr>
+            <a:r>
+              <a:rPr sz="1100" b="1" i="0">
+                <a:solidFill>
+                  <a:srgbClr val="FFFFFF"/>
+                </a:solidFill>
+                <a:latin typeface="Inter Tight"/>
+              </a:rPr>
+              <a:t>TEACHER PAGE  ·  skipped when you present  ·  Every student in the room</a:t>
+            </a:r>
+          </a:p>
+        </p:txBody>
+      </p:sp>
+      <p:sp>
+        <p:nvSpPr>
+          <p:cNvPr id="4" name="TextBox 3"/>
+          <p:cNvSpPr txBox="1"/>
+          <p:nvPr/>
+        </p:nvSpPr>
+        <p:spPr>
+          <a:xfrm>
+            <a:off x="548640" y="685800"/>
+            <a:ext cx="10972800" cy="640080"/>
+          </a:xfrm>
+          <a:prstGeom prst="rect">
+            <a:avLst/>
+          </a:prstGeom>
+          <a:noFill/>
+        </p:spPr>
+        <p:txBody>
+          <a:bodyPr wrap="square" anchor="t" lIns="0" rIns="0" tIns="0" bIns="0">
+            <a:spAutoFit/>
+          </a:bodyPr>
+          <a:lstStyle/>
+          <a:p>
+            <a:pPr algn="l">
+              <a:spcAft>
+                <a:spcPts val="1350"/>
+              </a:spcAft>
+            </a:pPr>
+            <a:r>
+              <a:rPr sz="3000" b="1" i="0">
+                <a:solidFill>
+                  <a:srgbClr val="1C1B19"/>
+                </a:solidFill>
+                <a:latin typeface="Source Serif 4"/>
+              </a:rPr>
+              <a:t>Every student in the room</a:t>
+            </a:r>
+          </a:p>
+        </p:txBody>
+      </p:sp>
+      <p:sp>
+        <p:nvSpPr>
+          <p:cNvPr id="5" name="TextBox 4"/>
+          <p:cNvSpPr txBox="1"/>
+          <p:nvPr/>
+        </p:nvSpPr>
+        <p:spPr>
+          <a:xfrm>
+            <a:off x="548640" y="1325880"/>
+            <a:ext cx="10972800" cy="365760"/>
+          </a:xfrm>
+          <a:prstGeom prst="rect">
+            <a:avLst/>
+          </a:prstGeom>
+          <a:noFill/>
+        </p:spPr>
+        <p:txBody>
+          <a:bodyPr wrap="square" anchor="t" lIns="0" rIns="0" tIns="0" bIns="0">
+            <a:spAutoFit/>
+          </a:bodyPr>
+          <a:lstStyle/>
+          <a:p>
+            <a:pPr algn="l">
+              <a:spcAft>
+                <a:spcPts val="630"/>
+              </a:spcAft>
+            </a:pPr>
+            <a:r>
+              <a:rPr sz="1400" b="0" i="0">
+                <a:solidFill>
+                  <a:srgbClr val="5D5A54"/>
+                </a:solidFill>
+                <a:latin typeface="Inter Tight"/>
+              </a:rPr>
+              <a:t>Culture, family, identity, ability and money: what to keep in mind for this topic.</a:t>
+            </a:r>
+          </a:p>
+        </p:txBody>
+      </p:sp>
+      <p:sp>
+        <p:nvSpPr>
+          <p:cNvPr id="6" name="TextBox 5"/>
+          <p:cNvSpPr txBox="1"/>
+          <p:nvPr/>
+        </p:nvSpPr>
+        <p:spPr>
+          <a:xfrm>
+            <a:off x="548640" y="1828800"/>
+            <a:ext cx="5394960" cy="4572000"/>
+          </a:xfrm>
+          <a:prstGeom prst="rect">
+            <a:avLst/>
+          </a:prstGeom>
+          <a:noFill/>
+        </p:spPr>
+        <p:txBody>
+          <a:bodyPr wrap="square" anchor="t" lIns="0" rIns="0" tIns="0" bIns="0">
+            <a:spAutoFit/>
+          </a:bodyPr>
+          <a:lstStyle/>
+          <a:p>
+            <a:pPr algn="l">
+              <a:spcAft>
+                <a:spcPts val="585"/>
+              </a:spcAft>
+            </a:pPr>
+            <a:r>
+              <a:rPr sz="1500" b="1" i="0">
+                <a:solidFill>
+                  <a:srgbClr val="1C1B19"/>
+                </a:solidFill>
+                <a:latin typeface="Source Serif 4"/>
+              </a:rPr>
+              <a:t>Being one of few here from your background.</a:t>
+            </a:r>
+          </a:p>
+          <a:p>
+            <a:pPr algn="l">
+              <a:spcAft>
+                <a:spcPts val="585"/>
+              </a:spcAft>
+            </a:pPr>
+            <a:r>
+              <a:rPr sz="1300" b="0" i="0">
+                <a:solidFill>
+                  <a:srgbClr val="1C1B19"/>
+                </a:solidFill>
+                <a:latin typeface="Source Serif 4"/>
+              </a:rPr>
+              <a:t>For students who share their race, culture, faith or home language with few others at Beaver, "do I belong here?" can be louder. That isn't proof they're in the wrong place. Name affinity groups and clubs, and say it's fair to expect the school to make room. Don't ask anyone to speak for their group.</a:t>
+            </a:r>
+          </a:p>
+          <a:p>
+            <a:pPr algn="l">
+              <a:spcAft>
+                <a:spcPts val="585"/>
+              </a:spcAft>
+            </a:pPr>
+            <a:r>
+              <a:rPr sz="1300" b="0" i="0">
+                <a:solidFill>
+                  <a:srgbClr val="1C1B19"/>
+                </a:solidFill>
+                <a:latin typeface="Source Serif 4"/>
+              </a:rPr>
+              <a:t/>
+            </a:r>
+          </a:p>
+          <a:p>
+            <a:pPr algn="l">
+              <a:spcAft>
+                <a:spcPts val="585"/>
+              </a:spcAft>
+            </a:pPr>
+            <a:r>
+              <a:rPr sz="1500" b="1" i="0">
+                <a:solidFill>
+                  <a:srgbClr val="1C1B19"/>
+                </a:solidFill>
+                <a:latin typeface="Source Serif 4"/>
+              </a:rPr>
+              <a:t>Moving from another country.</a:t>
+            </a:r>
+          </a:p>
+          <a:p>
+            <a:pPr algn="l">
+              <a:spcAft>
+                <a:spcPts val="585"/>
+              </a:spcAft>
+            </a:pPr>
+            <a:r>
+              <a:rPr sz="1300" b="0" i="0">
+                <a:solidFill>
+                  <a:srgbClr val="1C1B19"/>
+                </a:solidFill>
+                <a:latin typeface="Source Serif 4"/>
+              </a:rPr>
+              <a:t>The unwritten rules at a new school can be different, and accents and home languages get noticed. The student page says plainly that erasing your background, accent or faith to fit in costs more than it buys. Keep the Mateo scenario on what classmates can do, never on Mateo's English.</a:t>
+            </a:r>
+          </a:p>
+          <a:p>
+            <a:pPr algn="l">
+              <a:spcAft>
+                <a:spcPts val="585"/>
+              </a:spcAft>
+            </a:pPr>
+            <a:r>
+              <a:rPr sz="1300" b="0" i="0">
+                <a:solidFill>
+                  <a:srgbClr val="1C1B19"/>
+                </a:solidFill>
+                <a:latin typeface="Source Serif 4"/>
+              </a:rPr>
+              <a:t/>
+            </a:r>
+          </a:p>
+          <a:p>
+            <a:pPr algn="l">
+              <a:spcAft>
+                <a:spcPts val="585"/>
+              </a:spcAft>
+            </a:pPr>
+            <a:r>
+              <a:rPr sz="1500" b="1" i="0">
+                <a:solidFill>
+                  <a:srgbClr val="1C1B19"/>
+                </a:solidFill>
+                <a:latin typeface="Source Serif 4"/>
+              </a:rPr>
+              <a:t>"Join something weekly" can cost money and rides.</a:t>
+            </a:r>
+          </a:p>
+          <a:p>
+            <a:pPr algn="l">
+              <a:spcAft>
+                <a:spcPts val="585"/>
+              </a:spcAft>
+            </a:pPr>
+            <a:r>
+              <a:rPr sz="1300" b="0" i="0">
+                <a:solidFill>
+                  <a:srgbClr val="1C1B19"/>
+                </a:solidFill>
+                <a:latin typeface="Source Serif 4"/>
+              </a:rPr>
+              <a:t>Some teams and activities need fees, gear, or a ride home late. Some students work or care for siblings after school. A job counts as weekly hours, and a library study plan or a lunch table is free.</a:t>
+            </a:r>
+          </a:p>
+          <a:p>
+            <a:pPr algn="l">
+              <a:spcAft>
+                <a:spcPts val="585"/>
+              </a:spcAft>
+            </a:pPr>
+            <a:r>
+              <a:rPr sz="1300" b="0" i="0">
+                <a:solidFill>
+                  <a:srgbClr val="1C1B19"/>
+                </a:solidFill>
+                <a:latin typeface="Source Serif 4"/>
+              </a:rPr>
+              <a:t/>
+            </a:r>
+          </a:p>
+        </p:txBody>
+      </p:sp>
+      <p:sp>
+        <p:nvSpPr>
+          <p:cNvPr id="7" name="TextBox 6"/>
+          <p:cNvSpPr txBox="1"/>
+          <p:nvPr/>
+        </p:nvSpPr>
+        <p:spPr>
+          <a:xfrm>
+            <a:off x="6217920" y="1828800"/>
+            <a:ext cx="5394960" cy="4572000"/>
+          </a:xfrm>
+          <a:prstGeom prst="rect">
+            <a:avLst/>
+          </a:prstGeom>
+          <a:noFill/>
+        </p:spPr>
+        <p:txBody>
+          <a:bodyPr wrap="square" anchor="t" lIns="0" rIns="0" tIns="0" bIns="0">
+            <a:spAutoFit/>
+          </a:bodyPr>
+          <a:lstStyle/>
+          <a:p>
+            <a:pPr algn="l">
+              <a:spcAft>
+                <a:spcPts val="585"/>
+              </a:spcAft>
+            </a:pPr>
+            <a:r>
+              <a:rPr sz="1500" b="1" i="0">
+                <a:solidFill>
+                  <a:srgbClr val="1C1B19"/>
+                </a:solidFill>
+                <a:latin typeface="Source Serif 4"/>
+              </a:rPr>
+              <a:t>Faith can be the weekly thing, or can shape the week.</a:t>
+            </a:r>
+          </a:p>
+          <a:p>
+            <a:pPr algn="l">
+              <a:spcAft>
+                <a:spcPts val="585"/>
+              </a:spcAft>
+            </a:pPr>
+            <a:r>
+              <a:rPr sz="1300" b="0" i="0">
+                <a:solidFill>
+                  <a:srgbClr val="1C1B19"/>
+                </a:solidFill>
+                <a:latin typeface="Source Serif 4"/>
+              </a:rPr>
+              <a:t>A youth group or faith community counts as repeated hours with the same people. Some students can't go out on certain nights for faith or family reasons. Lunch and school-day options work for them too.</a:t>
+            </a:r>
+          </a:p>
+          <a:p>
+            <a:pPr algn="l">
+              <a:spcAft>
+                <a:spcPts val="585"/>
+              </a:spcAft>
+            </a:pPr>
+            <a:r>
+              <a:rPr sz="1300" b="0" i="0">
+                <a:solidFill>
+                  <a:srgbClr val="1C1B19"/>
+                </a:solidFill>
+                <a:latin typeface="Source Serif 4"/>
+              </a:rPr>
+              <a:t/>
+            </a:r>
+          </a:p>
+          <a:p>
+            <a:pPr algn="l">
+              <a:spcAft>
+                <a:spcPts val="585"/>
+              </a:spcAft>
+            </a:pPr>
+            <a:r>
+              <a:rPr sz="1500" b="1" i="0">
+                <a:solidFill>
+                  <a:srgbClr val="1C1B19"/>
+                </a:solidFill>
+                <a:latin typeface="Source Serif 4"/>
+              </a:rPr>
+              <a:t>Small talk is harder for some students.</a:t>
+            </a:r>
+          </a:p>
+          <a:p>
+            <a:pPr algn="l">
+              <a:spcAft>
+                <a:spcPts val="585"/>
+              </a:spcAft>
+            </a:pPr>
+            <a:r>
+              <a:rPr sz="1300" b="0" i="0">
+                <a:solidFill>
+                  <a:srgbClr val="1C1B19"/>
+                </a:solidFill>
+                <a:latin typeface="Source Serif 4"/>
+              </a:rPr>
+              <a:t>For autistic students and students with social anxiety, "one question past small talk" can take real effort. Activities with a shared task, like a robotics build, a show crew or a team, give conversation something to hang on. Don't make outgoing the measure of fitting in.</a:t>
+            </a:r>
+          </a:p>
+          <a:p>
+            <a:pPr algn="l">
+              <a:spcAft>
+                <a:spcPts val="585"/>
+              </a:spcAft>
+            </a:pPr>
+            <a:r>
+              <a:rPr sz="1300" b="0" i="0">
+                <a:solidFill>
+                  <a:srgbClr val="1C1B19"/>
+                </a:solidFill>
+                <a:latin typeface="Source Serif 4"/>
+              </a:rPr>
+              <a:t/>
+            </a:r>
+          </a:p>
+          <a:p>
+            <a:pPr algn="l">
+              <a:spcAft>
+                <a:spcPts val="585"/>
+              </a:spcAft>
+            </a:pPr>
+            <a:r>
+              <a:rPr sz="1500" b="1" i="0">
+                <a:solidFill>
+                  <a:srgbClr val="1C1B19"/>
+                </a:solidFill>
+                <a:latin typeface="Source Serif 4"/>
+              </a:rPr>
+              <a:t>"Find one adult" may matter more for some.</a:t>
+            </a:r>
+          </a:p>
+          <a:p>
+            <a:pPr algn="l">
+              <a:spcAft>
+                <a:spcPts val="585"/>
+              </a:spcAft>
+            </a:pPr>
+            <a:r>
+              <a:rPr sz="1300" b="0" i="0">
+                <a:solidFill>
+                  <a:srgbClr val="1C1B19"/>
+                </a:solidFill>
+                <a:latin typeface="Source Serif 4"/>
+              </a:rPr>
+              <a:t>Students who moved for a family change, live in foster or kinship care, or don't have an adult at home who can drive them to things may lean on a school adult more. Make sure every student leaves knowing at least one adult at Beaver they could go to.</a:t>
+            </a:r>
+          </a:p>
+          <a:p>
+            <a:pPr algn="l">
+              <a:spcAft>
+                <a:spcPts val="585"/>
+              </a:spcAft>
+            </a:pPr>
+            <a:r>
+              <a:rPr sz="1300" b="0" i="0">
+                <a:solidFill>
+                  <a:srgbClr val="1C1B19"/>
+                </a:solidFill>
+                <a:latin typeface="Source Serif 4"/>
+              </a:rPr>
+              <a:t/>
+            </a:r>
+          </a:p>
+        </p:txBody>
+      </p:sp>
+    </p:spTree>
+  </p:cSld>
+  <p:clrMapOvr>
+    <a:masterClrMapping/>
+  </p:clrMapOvr>
+</p:sld>
+</file>
+
+<file path=ppt/slides/slide12.xml><?xml version="1.0" encoding="utf-8"?>
+<p:sld xmlns:a="http://schemas.openxmlformats.org/drawingml/2006/main" xmlns:p="http://schemas.openxmlformats.org/presentationml/2006/main" xmlns:r="http://schemas.openxmlformats.org/officeDocument/2006/relationships" show="0">
+  <p:cSld>
+    <p:bg>
+      <p:bgPr>
+        <a:solidFill>
+          <a:srgbClr val="EEEBE4"/>
+        </a:solidFill>
+        <a:effectLst/>
+      </p:bgPr>
+    </p:bg>
+    <p:spTree>
+      <p:nvGrpSpPr>
+        <p:cNvPr id="1" name=""/>
+        <p:cNvGrpSpPr/>
+        <p:nvPr/>
+      </p:nvGrpSpPr>
+      <p:grpSpPr/>
+      <p:sp>
+        <p:nvSpPr>
+          <p:cNvPr id="2" name="Rectangle 1"/>
+          <p:cNvSpPr/>
+          <p:nvPr/>
+        </p:nvSpPr>
+        <p:spPr>
+          <a:xfrm>
+            <a:off x="0" y="0"/>
+            <a:ext cx="12191695" cy="384048"/>
+          </a:xfrm>
+          <a:prstGeom prst="rect">
+            <a:avLst/>
+          </a:prstGeom>
+          <a:solidFill>
+            <a:srgbClr val="0B2D5B"/>
+          </a:solidFill>
+          <a:ln>
+            <a:noFill/>
+          </a:ln>
+          <a:effectLst/>
+        </p:spPr>
+        <p:style>
+          <a:lnRef idx="1">
+            <a:schemeClr val="accent1"/>
+          </a:lnRef>
+          <a:fillRef idx="3">
+            <a:schemeClr val="accent1"/>
+          </a:fillRef>
+          <a:effectRef idx="2">
+            <a:schemeClr val="accent1"/>
+          </a:effectRef>
+          <a:fontRef idx="minor">
+            <a:schemeClr val="lt1"/>
+          </a:fontRef>
+        </p:style>
+        <p:txBody>
+          <a:bodyPr rtlCol="0" anchor="ctr"/>
+          <a:lstStyle/>
+          <a:p>
+            <a:pPr algn="ctr"/>
+          </a:p>
+        </p:txBody>
+      </p:sp>
+      <p:sp>
+        <p:nvSpPr>
+          <p:cNvPr id="3" name="TextBox 2"/>
+          <p:cNvSpPr txBox="1"/>
+          <p:nvPr/>
+        </p:nvSpPr>
+        <p:spPr>
+          <a:xfrm>
+            <a:off x="548640" y="100584"/>
+            <a:ext cx="10972800" cy="274320"/>
+          </a:xfrm>
+          <a:prstGeom prst="rect">
+            <a:avLst/>
+          </a:prstGeom>
+          <a:noFill/>
+        </p:spPr>
+        <p:txBody>
+          <a:bodyPr wrap="square" anchor="t" lIns="0" rIns="0" tIns="0" bIns="0">
+            <a:spAutoFit/>
+          </a:bodyPr>
+          <a:lstStyle/>
+          <a:p>
+            <a:pPr algn="l">
+              <a:spcAft>
+                <a:spcPts val="495"/>
+              </a:spcAft>
+            </a:pPr>
+            <a:r>
+              <a:rPr sz="1100" b="1" i="0">
+                <a:solidFill>
+                  <a:srgbClr val="FFFFFF"/>
+                </a:solidFill>
+                <a:latin typeface="Inter Tight"/>
+              </a:rPr>
+              <a:t>TEACHER PAGE  ·  skipped when you present  ·  Background</a:t>
+            </a:r>
+          </a:p>
+        </p:txBody>
+      </p:sp>
+      <p:sp>
+        <p:nvSpPr>
+          <p:cNvPr id="4" name="TextBox 3"/>
+          <p:cNvSpPr txBox="1"/>
+          <p:nvPr/>
+        </p:nvSpPr>
+        <p:spPr>
+          <a:xfrm>
+            <a:off x="548640" y="685800"/>
+            <a:ext cx="10972800" cy="640080"/>
+          </a:xfrm>
+          <a:prstGeom prst="rect">
+            <a:avLst/>
+          </a:prstGeom>
+          <a:noFill/>
+        </p:spPr>
+        <p:txBody>
+          <a:bodyPr wrap="square" anchor="t" lIns="0" rIns="0" tIns="0" bIns="0">
+            <a:spAutoFit/>
+          </a:bodyPr>
+          <a:lstStyle/>
+          <a:p>
+            <a:pPr algn="l">
+              <a:spcAft>
+                <a:spcPts val="1350"/>
+              </a:spcAft>
+            </a:pPr>
+            <a:r>
+              <a:rPr sz="3000" b="1" i="0">
+                <a:solidFill>
+                  <a:srgbClr val="1C1B19"/>
+                </a:solidFill>
+                <a:latin typeface="Source Serif 4"/>
+              </a:rPr>
+              <a:t>What the research says</a:t>
+            </a:r>
+          </a:p>
+        </p:txBody>
+      </p:sp>
+      <p:sp>
+        <p:nvSpPr>
+          <p:cNvPr id="5" name="TextBox 4"/>
+          <p:cNvSpPr txBox="1"/>
+          <p:nvPr/>
+        </p:nvSpPr>
+        <p:spPr>
+          <a:xfrm>
+            <a:off x="548640" y="1463040"/>
+            <a:ext cx="5394960" cy="4937760"/>
+          </a:xfrm>
+          <a:prstGeom prst="rect">
+            <a:avLst/>
+          </a:prstGeom>
+          <a:noFill/>
+        </p:spPr>
+        <p:txBody>
+          <a:bodyPr wrap="square" anchor="t" lIns="0" rIns="0" tIns="0" bIns="0">
+            <a:spAutoFit/>
+          </a:bodyPr>
+          <a:lstStyle/>
+          <a:p>
+            <a:pPr algn="l">
+              <a:spcAft>
+                <a:spcPts val="585"/>
+              </a:spcAft>
+            </a:pPr>
+            <a:r>
+              <a:rPr sz="1300" b="0" i="0">
+                <a:solidFill>
+                  <a:srgbClr val="1C1B19"/>
+                </a:solidFill>
+                <a:latin typeface="Source Serif 4"/>
+              </a:rPr>
+              <a:t>Adults who had just moved and first-year college students estimated it took about 50 hours together to go from acquaintance to casual friend, about 90 to become friends, and more than 200 for a close friend. Students got there faster than adults. These are rough averages from people's own estimates.</a:t>
+            </a:r>
+          </a:p>
+          <a:p>
+            <a:pPr algn="l">
+              <a:spcAft>
+                <a:spcPts val="585"/>
+              </a:spcAft>
+            </a:pPr>
+            <a:r>
+              <a:rPr sz="1050" b="0" i="0">
+                <a:solidFill>
+                  <a:srgbClr val="5D5A54"/>
+                </a:solidFill>
+                <a:latin typeface="Inter Tight"/>
+              </a:rPr>
+              <a:t>Hall, Journal of Social and Personal Relationships, 2019</a:t>
+            </a:r>
+          </a:p>
+          <a:p>
+            <a:pPr algn="l">
+              <a:spcAft>
+                <a:spcPts val="585"/>
+              </a:spcAft>
+            </a:pPr>
+            <a:r>
+              <a:rPr sz="1300" b="0" i="0">
+                <a:solidFill>
+                  <a:srgbClr val="1C1B19"/>
+                </a:solidFill>
+                <a:latin typeface="Source Serif 4"/>
+              </a:rPr>
+              <a:t>Hanging out, joking around and real conversations counted most toward closeness. Sitting near each other in class or working side by side counted less, and small talk alone was linked to drifting apart.</a:t>
+            </a:r>
+          </a:p>
+          <a:p>
+            <a:pPr algn="l">
+              <a:spcAft>
+                <a:spcPts val="585"/>
+              </a:spcAft>
+            </a:pPr>
+            <a:r>
+              <a:rPr sz="1050" b="0" i="0">
+                <a:solidFill>
+                  <a:srgbClr val="5D5A54"/>
+                </a:solidFill>
+                <a:latin typeface="Inter Tight"/>
+              </a:rPr>
+              <a:t>Hall, 2019</a:t>
+            </a:r>
+          </a:p>
+          <a:p>
+            <a:pPr algn="l">
+              <a:spcAft>
+                <a:spcPts val="585"/>
+              </a:spcAft>
+            </a:pPr>
+            <a:r>
+              <a:rPr sz="1300" b="0" i="0">
+                <a:solidFill>
+                  <a:srgbClr val="1C1B19"/>
+                </a:solidFill>
+                <a:latin typeface="Source Serif 4"/>
+              </a:rPr>
+              <a:t>People who had just talked with someone new consistently underestimated how much the other person liked them. It showed up in first-year college roommates and lasted for months.</a:t>
+            </a:r>
+          </a:p>
+          <a:p>
+            <a:pPr algn="l">
+              <a:spcAft>
+                <a:spcPts val="585"/>
+              </a:spcAft>
+            </a:pPr>
+            <a:r>
+              <a:rPr sz="1050" b="0" i="0">
+                <a:solidFill>
+                  <a:srgbClr val="5D5A54"/>
+                </a:solidFill>
+                <a:latin typeface="Inter Tight"/>
+              </a:rPr>
+              <a:t>Boothby, Cooney, Sandstrom and Clark, Psychological Science, 2018</a:t>
+            </a:r>
+          </a:p>
+        </p:txBody>
+      </p:sp>
+      <p:sp>
+        <p:nvSpPr>
+          <p:cNvPr id="6" name="TextBox 5"/>
+          <p:cNvSpPr txBox="1"/>
+          <p:nvPr/>
+        </p:nvSpPr>
+        <p:spPr>
+          <a:xfrm>
+            <a:off x="6217920" y="1463040"/>
+            <a:ext cx="5394960" cy="4937760"/>
+          </a:xfrm>
+          <a:prstGeom prst="rect">
+            <a:avLst/>
+          </a:prstGeom>
+          <a:noFill/>
+        </p:spPr>
+        <p:txBody>
+          <a:bodyPr wrap="square" anchor="t" lIns="0" rIns="0" tIns="0" bIns="0">
+            <a:spAutoFit/>
+          </a:bodyPr>
+          <a:lstStyle/>
+          <a:p>
+            <a:pPr algn="l">
+              <a:spcAft>
+                <a:spcPts val="585"/>
+              </a:spcAft>
+            </a:pPr>
+            <a:r>
+              <a:rPr sz="1300" b="0" i="0">
+                <a:solidFill>
+                  <a:srgbClr val="1C1B19"/>
+                </a:solidFill>
+                <a:latin typeface="Source Serif 4"/>
+              </a:rPr>
+              <a:t>Commuters asked to talk to a stranger on a train or bus reported a more pleasant ride than those who sat alone, though people predicted the opposite. The mistake came from underestimating how interested others are in connecting.</a:t>
+            </a:r>
+          </a:p>
+          <a:p>
+            <a:pPr algn="l">
+              <a:spcAft>
+                <a:spcPts val="585"/>
+              </a:spcAft>
+            </a:pPr>
+            <a:r>
+              <a:rPr sz="1050" b="0" i="0">
+                <a:solidFill>
+                  <a:srgbClr val="5D5A54"/>
+                </a:solidFill>
+                <a:latin typeface="Inter Tight"/>
+              </a:rPr>
+              <a:t>Epley and Schroeder, Journal of Experimental Psychology: General, 2014</a:t>
+            </a:r>
+          </a:p>
+          <a:p>
+            <a:pPr algn="l">
+              <a:spcAft>
+                <a:spcPts val="585"/>
+              </a:spcAft>
+            </a:pPr>
+            <a:r>
+              <a:rPr sz="1300" b="0" i="0">
+                <a:solidFill>
+                  <a:srgbClr val="1C1B19"/>
+                </a:solidFill>
+                <a:latin typeface="Source Serif 4"/>
+              </a:rPr>
+              <a:t>First-year college students who read that belonging worries are common and fade went on to earn higher grades over three years if they were Black, cutting the racial achievement gap in half. It was a small study.</a:t>
+            </a:r>
+          </a:p>
+          <a:p>
+            <a:pPr algn="l">
+              <a:spcAft>
+                <a:spcPts val="585"/>
+              </a:spcAft>
+            </a:pPr>
+            <a:r>
+              <a:rPr sz="1050" b="0" i="0">
+                <a:solidFill>
+                  <a:srgbClr val="5D5A54"/>
+                </a:solidFill>
+                <a:latin typeface="Inter Tight"/>
+              </a:rPr>
+              <a:t>Walton and Cohen, Science, 2011</a:t>
+            </a:r>
+          </a:p>
+          <a:p>
+            <a:pPr algn="l">
+              <a:spcAft>
+                <a:spcPts val="585"/>
+              </a:spcAft>
+            </a:pPr>
+            <a:r>
+              <a:rPr sz="1300" b="0" i="0">
+                <a:solidFill>
+                  <a:srgbClr val="1C1B19"/>
+                </a:solidFill>
+                <a:latin typeface="Source Serif 4"/>
+              </a:rPr>
+              <a:t>Repeated with almost 27,000 students at 22 colleges, a version under 30 minutes helped more students finish their first year full time, especially in groups that had historically struggled more, but only at schools that offered real ways to belong.</a:t>
+            </a:r>
+          </a:p>
+          <a:p>
+            <a:pPr algn="l">
+              <a:spcAft>
+                <a:spcPts val="585"/>
+              </a:spcAft>
+            </a:pPr>
+            <a:r>
+              <a:rPr sz="1050" b="0" i="0">
+                <a:solidFill>
+                  <a:srgbClr val="5D5A54"/>
+                </a:solidFill>
+                <a:latin typeface="Inter Tight"/>
+              </a:rPr>
+              <a:t>Walton et al., Science, 2023</a:t>
+            </a:r>
+          </a:p>
+        </p:txBody>
+      </p:sp>
+    </p:spTree>
+  </p:cSld>
+  <p:clrMapOvr>
+    <a:masterClrMapping/>
+  </p:clrMapOvr>
+</p:sld>
+</file>
+
+<file path=ppt/slides/slide2.xml><?xml version="1.0" encoding="utf-8"?>
+<p:sld xmlns:a="http://schemas.openxmlformats.org/drawingml/2006/main" xmlns:p="http://schemas.openxmlformats.org/presentationml/2006/main" xmlns:r="http://schemas.openxmlformats.org/officeDocument/2006/relationships">
+  <p:cSld>
+    <p:bg>
+      <p:bgPr>
+        <a:solidFill>
+          <a:srgbClr val="0B2D5B"/>
+        </a:solidFill>
+        <a:effectLst/>
+      </p:bgPr>
+    </p:bg>
+    <p:spTree>
+      <p:nvGrpSpPr>
+        <p:cNvPr id="1" name=""/>
+        <p:cNvGrpSpPr/>
+        <p:nvPr/>
+      </p:nvGrpSpPr>
+      <p:grpSpPr/>
+      <p:sp>
+        <p:nvSpPr>
+          <p:cNvPr id="2" name="Rectangle 1"/>
+          <p:cNvSpPr/>
+          <p:nvPr/>
+        </p:nvSpPr>
+        <p:spPr>
+          <a:xfrm>
+            <a:off x="548640" y="502920"/>
+            <a:ext cx="457200" cy="54864"/>
+          </a:xfrm>
+          <a:prstGeom prst="rect">
+            <a:avLst/>
+          </a:prstGeom>
+          <a:solidFill>
+            <a:srgbClr val="F47B20"/>
+          </a:solidFill>
+          <a:ln>
+            <a:noFill/>
+          </a:ln>
+          <a:effectLst/>
+        </p:spPr>
+        <p:style>
+          <a:lnRef idx="1">
+            <a:schemeClr val="accent1"/>
+          </a:lnRef>
+          <a:fillRef idx="3">
+            <a:schemeClr val="accent1"/>
+          </a:fillRef>
+          <a:effectRef idx="2">
+            <a:schemeClr val="accent1"/>
+          </a:effectRef>
+          <a:fontRef idx="minor">
+            <a:schemeClr val="lt1"/>
+          </a:fontRef>
+        </p:style>
+        <p:txBody>
+          <a:bodyPr rtlCol="0" anchor="ctr"/>
+          <a:lstStyle/>
+          <a:p>
+            <a:pPr algn="ctr"/>
+          </a:p>
+        </p:txBody>
+      </p:sp>
+      <p:sp>
+        <p:nvSpPr>
+          <p:cNvPr id="3" name="TextBox 2"/>
+          <p:cNvSpPr txBox="1"/>
+          <p:nvPr/>
+        </p:nvSpPr>
+        <p:spPr>
+          <a:xfrm>
+            <a:off x="1143000" y="393192"/>
+            <a:ext cx="8229600" cy="274320"/>
+          </a:xfrm>
+          <a:prstGeom prst="rect">
+            <a:avLst/>
+          </a:prstGeom>
+          <a:noFill/>
+        </p:spPr>
+        <p:txBody>
+          <a:bodyPr wrap="square" anchor="t" lIns="0" rIns="0" tIns="0" bIns="0">
+            <a:spAutoFit/>
+          </a:bodyPr>
+          <a:lstStyle/>
+          <a:p>
+            <a:pPr algn="l">
+              <a:spcAft>
+                <a:spcPts val="540"/>
+              </a:spcAft>
+            </a:pPr>
+            <a:r>
+              <a:rPr sz="1200" b="1" i="0">
+                <a:solidFill>
+                  <a:srgbClr val="5D5A54"/>
+                </a:solidFill>
+                <a:latin typeface="Inter Tight"/>
+              </a:rPr>
+              <a:t>NEW SCHOOL, WHO DIS</a:t>
+            </a:r>
+          </a:p>
+        </p:txBody>
+      </p:sp>
+      <p:sp>
+        <p:nvSpPr>
+          <p:cNvPr id="4" name="TextBox 3"/>
+          <p:cNvSpPr txBox="1"/>
+          <p:nvPr/>
+        </p:nvSpPr>
+        <p:spPr>
+          <a:xfrm>
+            <a:off x="8229600" y="6400800"/>
+            <a:ext cx="3410712" cy="274320"/>
+          </a:xfrm>
+          <a:prstGeom prst="rect">
+            <a:avLst/>
+          </a:prstGeom>
+          <a:noFill/>
+        </p:spPr>
+        <p:txBody>
+          <a:bodyPr wrap="square" anchor="t" lIns="0" rIns="0" tIns="0" bIns="0">
+            <a:spAutoFit/>
+          </a:bodyPr>
+          <a:lstStyle/>
+          <a:p>
+            <a:pPr algn="r">
+              <a:spcAft>
+                <a:spcPts val="450"/>
+              </a:spcAft>
+            </a:pPr>
+            <a:r>
+              <a:rPr sz="1000" b="0" i="0">
+                <a:solidFill>
+                  <a:srgbClr val="5D5A54"/>
+                </a:solidFill>
+                <a:latin typeface="Inter Tight"/>
+              </a:rPr>
+              <a:t>Beaver Counseling</a:t>
+            </a:r>
+          </a:p>
+        </p:txBody>
+      </p:sp>
+      <p:sp>
+        <p:nvSpPr>
+          <p:cNvPr id="5" name="TextBox 4"/>
+          <p:cNvSpPr txBox="1"/>
+          <p:nvPr/>
+        </p:nvSpPr>
+        <p:spPr>
+          <a:xfrm>
+            <a:off x="822960" y="2011680"/>
+            <a:ext cx="10515600" cy="1463040"/>
+          </a:xfrm>
+          <a:prstGeom prst="rect">
+            <a:avLst/>
+          </a:prstGeom>
+          <a:noFill/>
+        </p:spPr>
+        <p:txBody>
+          <a:bodyPr wrap="square" anchor="b" lIns="0" rIns="0" tIns="0" bIns="0">
+            <a:spAutoFit/>
+          </a:bodyPr>
+          <a:lstStyle/>
+          <a:p>
+            <a:pPr algn="l">
+              <a:spcAft>
+                <a:spcPts val="2700"/>
+              </a:spcAft>
+            </a:pPr>
+            <a:r>
+              <a:rPr sz="6000" b="1" i="0">
+                <a:solidFill>
+                  <a:srgbClr val="FFFFFF"/>
+                </a:solidFill>
+                <a:latin typeface="Source Serif 4"/>
+              </a:rPr>
+              <a:t>New School, Who Dis</a:t>
+            </a:r>
+          </a:p>
+        </p:txBody>
+      </p:sp>
+      <p:sp>
+        <p:nvSpPr>
+          <p:cNvPr id="6" name="TextBox 5"/>
+          <p:cNvSpPr txBox="1"/>
+          <p:nvPr/>
+        </p:nvSpPr>
+        <p:spPr>
+          <a:xfrm>
+            <a:off x="822960" y="3611880"/>
+            <a:ext cx="10515600" cy="914400"/>
+          </a:xfrm>
+          <a:prstGeom prst="rect">
+            <a:avLst/>
+          </a:prstGeom>
+          <a:noFill/>
+        </p:spPr>
+        <p:txBody>
+          <a:bodyPr wrap="square" anchor="t" lIns="0" rIns="0" tIns="0" bIns="0">
+            <a:spAutoFit/>
+          </a:bodyPr>
+          <a:lstStyle/>
+          <a:p>
+            <a:pPr algn="l">
+              <a:spcAft>
+                <a:spcPts val="1080"/>
+              </a:spcAft>
+            </a:pPr>
+            <a:r>
+              <a:rPr sz="2400" b="0" i="1">
+                <a:solidFill>
+                  <a:srgbClr val="E8E4DA"/>
+                </a:solidFill>
+                <a:latin typeface="Source Serif 4"/>
+              </a:rPr>
+              <a:t>You know where to go now. You don't know who to sit with.</a:t>
+            </a:r>
+          </a:p>
+        </p:txBody>
+      </p:sp>
+      <p:sp>
+        <p:nvSpPr>
+          <p:cNvPr id="7" name="TextBox 6"/>
+          <p:cNvSpPr txBox="1"/>
+          <p:nvPr/>
+        </p:nvSpPr>
+        <p:spPr>
+          <a:xfrm>
+            <a:off x="822960" y="6035040"/>
+            <a:ext cx="7315200" cy="365760"/>
+          </a:xfrm>
+          <a:prstGeom prst="rect">
+            <a:avLst/>
+          </a:prstGeom>
+          <a:noFill/>
+        </p:spPr>
+        <p:txBody>
+          <a:bodyPr wrap="square" anchor="t" lIns="0" rIns="0" tIns="0" bIns="0">
+            <a:spAutoFit/>
+          </a:bodyPr>
+          <a:lstStyle/>
+          <a:p>
+            <a:pPr algn="l">
+              <a:spcAft>
+                <a:spcPts val="585"/>
+              </a:spcAft>
+            </a:pPr>
+            <a:r>
+              <a:rPr sz="1300" b="0" i="0">
+                <a:solidFill>
+                  <a:srgbClr val="E8E4DA"/>
+                </a:solidFill>
+                <a:latin typeface="Inter Tight"/>
+              </a:rPr>
+              <a:t>Beaver Upper School · Counseling</a:t>
+            </a:r>
+          </a:p>
+        </p:txBody>
+      </p:sp>
+    </p:spTree>
+  </p:cSld>
+  <p:clrMapOvr>
+    <a:masterClrMapping/>
+  </p:clrMapOvr>
+</p:sld>
+</file>
+
+<file path=ppt/slides/slide3.xml><?xml version="1.0" encoding="utf-8"?>
 <p:sld xmlns:a="http://schemas.openxmlformats.org/drawingml/2006/main" xmlns:p="http://schemas.openxmlformats.org/presentationml/2006/main" xmlns:r="http://schemas.openxmlformats.org/officeDocument/2006/relationships">
   <p:cSld>
     <p:bg>
@@ -4653,7 +6109,7 @@
                 </a:solidFill>
                 <a:latin typeface="Inter Tight"/>
               </a:rPr>
-              <a:t>THREE MOMENTS</a:t>
+              <a:t>THE GUESS</a:t>
             </a:r>
           </a:p>
         </p:txBody>
@@ -4699,64 +6155,23 @@
       </p:sp>
       <p:sp>
         <p:nvSpPr>
-          <p:cNvPr id="5" name="TextBox 4"/>
-          <p:cNvSpPr txBox="1"/>
-          <p:nvPr/>
-        </p:nvSpPr>
-        <p:spPr>
-          <a:xfrm>
-            <a:off x="822960" y="1005840"/>
-            <a:ext cx="10515600" cy="914400"/>
-          </a:xfrm>
-          <a:prstGeom prst="rect">
-            <a:avLst/>
-          </a:prstGeom>
-          <a:noFill/>
-        </p:spPr>
-        <p:txBody>
-          <a:bodyPr wrap="square" anchor="t" lIns="0" rIns="0" tIns="0" bIns="0">
-            <a:spAutoFit/>
-          </a:bodyPr>
-          <a:lstStyle/>
-          <a:p>
-            <a:pPr algn="l">
-              <a:spcAft>
-                <a:spcPts val="1530"/>
-              </a:spcAft>
-            </a:pPr>
-            <a:r>
-              <a:rPr sz="3400" b="1" i="0">
-                <a:solidFill>
-                  <a:srgbClr val="1C1B19"/>
-                </a:solidFill>
-                <a:latin typeface="Source Serif 4"/>
-              </a:rPr>
-              <a:t>What would you try?</a:t>
-            </a:r>
-          </a:p>
-        </p:txBody>
-      </p:sp>
-      <p:sp>
-        <p:nvSpPr>
-          <p:cNvPr id="6" name="Rectangle 5"/>
+          <p:cNvPr id="5" name="Rectangle 4"/>
           <p:cNvSpPr/>
           <p:nvPr/>
         </p:nvSpPr>
         <p:spPr>
           <a:xfrm>
-            <a:off x="822960" y="2103120"/>
-            <a:ext cx="3322320" cy="3840480"/>
+            <a:off x="822960" y="1371600"/>
+            <a:ext cx="73152" cy="3566160"/>
           </a:xfrm>
           <a:prstGeom prst="rect">
             <a:avLst/>
           </a:prstGeom>
           <a:solidFill>
-            <a:srgbClr val="FFFFFF"/>
+            <a:srgbClr val="F47B20"/>
           </a:solidFill>
-          <a:ln w="15875">
-            <a:solidFill>
-              <a:srgbClr val="D8D2C6"/>
-            </a:solidFill>
+          <a:ln>
+            <a:noFill/>
           </a:ln>
           <a:effectLst/>
         </p:spPr>
@@ -4784,14 +6199,14 @@
       </p:sp>
       <p:sp>
         <p:nvSpPr>
-          <p:cNvPr id="7" name="TextBox 6"/>
+          <p:cNvPr id="6" name="TextBox 5"/>
           <p:cNvSpPr txBox="1"/>
           <p:nvPr/>
         </p:nvSpPr>
         <p:spPr>
           <a:xfrm>
-            <a:off x="1051560" y="2286000"/>
-            <a:ext cx="2865120" cy="365760"/>
+            <a:off x="1188720" y="1371600"/>
+            <a:ext cx="10058400" cy="3566160"/>
           </a:xfrm>
           <a:prstGeom prst="rect">
             <a:avLst/>
@@ -4799,38 +6214,38 @@
           <a:noFill/>
         </p:spPr>
         <p:txBody>
-          <a:bodyPr wrap="square" anchor="t" lIns="0" rIns="0" tIns="0" bIns="0">
+          <a:bodyPr wrap="square" anchor="ctr" lIns="0" rIns="0" tIns="0" bIns="0">
             <a:spAutoFit/>
           </a:bodyPr>
           <a:lstStyle/>
           <a:p>
             <a:pPr algn="l">
               <a:spcAft>
-                <a:spcPts val="585"/>
-              </a:spcAft>
-            </a:pPr>
-            <a:r>
-              <a:rPr sz="1300" b="1" i="0">
-                <a:solidFill>
-                  <a:srgbClr val="0B2D5B"/>
-                </a:solidFill>
-                <a:latin typeface="Inter Tight"/>
-              </a:rPr>
-              <a:t>THREE WEEKS IN</a:t>
-            </a:r>
-          </a:p>
-        </p:txBody>
-      </p:sp>
-      <p:sp>
-        <p:nvSpPr>
-          <p:cNvPr id="8" name="TextBox 7"/>
+                <a:spcPts val="1800"/>
+              </a:spcAft>
+            </a:pPr>
+            <a:r>
+              <a:rPr sz="4000" b="0" i="1">
+                <a:solidFill>
+                  <a:srgbClr val="1C1B19"/>
+                </a:solidFill>
+                <a:latin typeface="Source Serif 4"/>
+              </a:rPr>
+              <a:t>How many people in this room have felt like everyone else already had a group?</a:t>
+            </a:r>
+          </a:p>
+        </p:txBody>
+      </p:sp>
+      <p:sp>
+        <p:nvSpPr>
+          <p:cNvPr id="7" name="TextBox 6"/>
           <p:cNvSpPr txBox="1"/>
           <p:nvPr/>
         </p:nvSpPr>
         <p:spPr>
           <a:xfrm>
-            <a:off x="1051560" y="2743200"/>
-            <a:ext cx="2865120" cy="3017520"/>
+            <a:off x="1188720" y="5120640"/>
+            <a:ext cx="10058400" cy="914400"/>
           </a:xfrm>
           <a:prstGeom prst="rect">
             <a:avLst/>
@@ -4851,259 +6266,11 @@
             <a:r>
               <a:rPr sz="1800" b="0" i="0">
                 <a:solidFill>
-                  <a:srgbClr val="1C1B19"/>
-                </a:solidFill>
-                <a:latin typeface="Source Serif 4"/>
-              </a:rPr>
-              <a:t>Jordan transferred in as a junior. Lab partner Priya is great to talk to in class. They've never hung out outside it.</a:t>
-            </a:r>
-          </a:p>
-        </p:txBody>
-      </p:sp>
-      <p:sp>
-        <p:nvSpPr>
-          <p:cNvPr id="9" name="Rectangle 8"/>
-          <p:cNvSpPr/>
-          <p:nvPr/>
-        </p:nvSpPr>
-        <p:spPr>
-          <a:xfrm>
-            <a:off x="4419600" y="2103120"/>
-            <a:ext cx="3322320" cy="3840480"/>
-          </a:xfrm>
-          <a:prstGeom prst="rect">
-            <a:avLst/>
-          </a:prstGeom>
-          <a:solidFill>
-            <a:srgbClr val="FFFFFF"/>
-          </a:solidFill>
-          <a:ln w="15875">
-            <a:solidFill>
-              <a:srgbClr val="D8D2C6"/>
-            </a:solidFill>
-          </a:ln>
-          <a:effectLst/>
-        </p:spPr>
-        <p:style>
-          <a:lnRef idx="1">
-            <a:schemeClr val="accent1"/>
-          </a:lnRef>
-          <a:fillRef idx="3">
-            <a:schemeClr val="accent1"/>
-          </a:fillRef>
-          <a:effectRef idx="2">
-            <a:schemeClr val="accent1"/>
-          </a:effectRef>
-          <a:fontRef idx="minor">
-            <a:schemeClr val="lt1"/>
-          </a:fontRef>
-        </p:style>
-        <p:txBody>
-          <a:bodyPr rtlCol="0" anchor="ctr"/>
-          <a:lstStyle/>
-          <a:p>
-            <a:pPr algn="ctr"/>
-          </a:p>
-        </p:txBody>
-      </p:sp>
-      <p:sp>
-        <p:nvSpPr>
-          <p:cNvPr id="10" name="TextBox 9"/>
-          <p:cNvSpPr txBox="1"/>
-          <p:nvPr/>
-        </p:nvSpPr>
-        <p:spPr>
-          <a:xfrm>
-            <a:off x="4648200" y="2286000"/>
-            <a:ext cx="2865120" cy="365760"/>
-          </a:xfrm>
-          <a:prstGeom prst="rect">
-            <a:avLst/>
-          </a:prstGeom>
-          <a:noFill/>
-        </p:spPr>
-        <p:txBody>
-          <a:bodyPr wrap="square" anchor="t" lIns="0" rIns="0" tIns="0" bIns="0">
-            <a:spAutoFit/>
-          </a:bodyPr>
-          <a:lstStyle/>
-          <a:p>
-            <a:pPr algn="l">
-              <a:spcAft>
-                <a:spcPts val="585"/>
-              </a:spcAft>
-            </a:pPr>
-            <a:r>
-              <a:rPr sz="1300" b="1" i="0">
-                <a:solidFill>
-                  <a:srgbClr val="0B2D5B"/>
+                  <a:srgbClr val="5D5A54"/>
                 </a:solidFill>
                 <a:latin typeface="Inter Tight"/>
               </a:rPr>
-              <a:t>FRIDAY NIGHT</a:t>
-            </a:r>
-          </a:p>
-        </p:txBody>
-      </p:sp>
-      <p:sp>
-        <p:nvSpPr>
-          <p:cNvPr id="11" name="TextBox 10"/>
-          <p:cNvSpPr txBox="1"/>
-          <p:nvPr/>
-        </p:nvSpPr>
-        <p:spPr>
-          <a:xfrm>
-            <a:off x="4648200" y="2743200"/>
-            <a:ext cx="2865120" cy="3017520"/>
-          </a:xfrm>
-          <a:prstGeom prst="rect">
-            <a:avLst/>
-          </a:prstGeom>
-          <a:noFill/>
-        </p:spPr>
-        <p:txBody>
-          <a:bodyPr wrap="square" anchor="t" lIns="0" rIns="0" tIns="0" bIns="0">
-            <a:spAutoFit/>
-          </a:bodyPr>
-          <a:lstStyle/>
-          <a:p>
-            <a:pPr algn="l">
-              <a:spcAft>
-                <a:spcPts val="810"/>
-              </a:spcAft>
-            </a:pPr>
-            <a:r>
-              <a:rPr sz="1800" b="0" i="0">
-                <a:solidFill>
-                  <a:srgbClr val="1C1B19"/>
-                </a:solidFill>
-                <a:latin typeface="Source Serif 4"/>
-              </a:rPr>
-              <a:t>Old friends invite Keisha out. The robotics club she just joined has a team dinner the same night.</a:t>
-            </a:r>
-          </a:p>
-        </p:txBody>
-      </p:sp>
-      <p:sp>
-        <p:nvSpPr>
-          <p:cNvPr id="12" name="Rectangle 11"/>
-          <p:cNvSpPr/>
-          <p:nvPr/>
-        </p:nvSpPr>
-        <p:spPr>
-          <a:xfrm>
-            <a:off x="8016239" y="2103120"/>
-            <a:ext cx="3322320" cy="3840480"/>
-          </a:xfrm>
-          <a:prstGeom prst="rect">
-            <a:avLst/>
-          </a:prstGeom>
-          <a:solidFill>
-            <a:srgbClr val="FFFFFF"/>
-          </a:solidFill>
-          <a:ln w="15875">
-            <a:solidFill>
-              <a:srgbClr val="D8D2C6"/>
-            </a:solidFill>
-          </a:ln>
-          <a:effectLst/>
-        </p:spPr>
-        <p:style>
-          <a:lnRef idx="1">
-            <a:schemeClr val="accent1"/>
-          </a:lnRef>
-          <a:fillRef idx="3">
-            <a:schemeClr val="accent1"/>
-          </a:fillRef>
-          <a:effectRef idx="2">
-            <a:schemeClr val="accent1"/>
-          </a:effectRef>
-          <a:fontRef idx="minor">
-            <a:schemeClr val="lt1"/>
-          </a:fontRef>
-        </p:style>
-        <p:txBody>
-          <a:bodyPr rtlCol="0" anchor="ctr"/>
-          <a:lstStyle/>
-          <a:p>
-            <a:pPr algn="ctr"/>
-          </a:p>
-        </p:txBody>
-      </p:sp>
-      <p:sp>
-        <p:nvSpPr>
-          <p:cNvPr id="13" name="TextBox 12"/>
-          <p:cNvSpPr txBox="1"/>
-          <p:nvPr/>
-        </p:nvSpPr>
-        <p:spPr>
-          <a:xfrm>
-            <a:off x="8244839" y="2286000"/>
-            <a:ext cx="2865120" cy="365760"/>
-          </a:xfrm>
-          <a:prstGeom prst="rect">
-            <a:avLst/>
-          </a:prstGeom>
-          <a:noFill/>
-        </p:spPr>
-        <p:txBody>
-          <a:bodyPr wrap="square" anchor="t" lIns="0" rIns="0" tIns="0" bIns="0">
-            <a:spAutoFit/>
-          </a:bodyPr>
-          <a:lstStyle/>
-          <a:p>
-            <a:pPr algn="l">
-              <a:spcAft>
-                <a:spcPts val="585"/>
-              </a:spcAft>
-            </a:pPr>
-            <a:r>
-              <a:rPr sz="1300" b="1" i="0">
-                <a:solidFill>
-                  <a:srgbClr val="0B2D5B"/>
-                </a:solidFill>
-                <a:latin typeface="Inter Tight"/>
-              </a:rPr>
-              <a:t>NOT NEW YOURSELF</a:t>
-            </a:r>
-          </a:p>
-        </p:txBody>
-      </p:sp>
-      <p:sp>
-        <p:nvSpPr>
-          <p:cNvPr id="14" name="TextBox 13"/>
-          <p:cNvSpPr txBox="1"/>
-          <p:nvPr/>
-        </p:nvSpPr>
-        <p:spPr>
-          <a:xfrm>
-            <a:off x="8244839" y="2743200"/>
-            <a:ext cx="2865120" cy="3017520"/>
-          </a:xfrm>
-          <a:prstGeom prst="rect">
-            <a:avLst/>
-          </a:prstGeom>
-          <a:noFill/>
-        </p:spPr>
-        <p:txBody>
-          <a:bodyPr wrap="square" anchor="t" lIns="0" rIns="0" tIns="0" bIns="0">
-            <a:spAutoFit/>
-          </a:bodyPr>
-          <a:lstStyle/>
-          <a:p>
-            <a:pPr algn="l">
-              <a:spcAft>
-                <a:spcPts val="810"/>
-              </a:spcAft>
-            </a:pPr>
-            <a:r>
-              <a:rPr sz="1800" b="0" i="0">
-                <a:solidFill>
-                  <a:srgbClr val="1C1B19"/>
-                </a:solidFill>
-                <a:latin typeface="Source Serif 4"/>
-              </a:rPr>
-              <a:t>Mateo moved here from Colombia this fall. He's in your advisory and usually eats lunch in the library.</a:t>
+              <a:t>Write a guess. Then on the same card, yes or no for you. Fold it. No names.</a:t>
             </a:r>
           </a:p>
         </p:txBody>
@@ -5116,7 +6283,7 @@
 </p:sld>
 </file>
 
-<file path=ppt/slides/slide11.xml><?xml version="1.0" encoding="utf-8"?>
+<file path=ppt/slides/slide4.xml><?xml version="1.0" encoding="utf-8"?>
 <p:sld xmlns:a="http://schemas.openxmlformats.org/drawingml/2006/main" xmlns:p="http://schemas.openxmlformats.org/presentationml/2006/main" xmlns:r="http://schemas.openxmlformats.org/officeDocument/2006/relationships">
   <p:cSld>
     <p:bg>
@@ -5212,7 +6379,7 @@
                 </a:solidFill>
                 <a:latin typeface="Inter Tight"/>
               </a:rPr>
-              <a:t>BEFORE YOU GO</a:t>
+              <a:t>FRIENDSHIP RUNS ON HOURS</a:t>
             </a:r>
           </a:p>
         </p:txBody>
@@ -5264,8 +6431,8 @@
         </p:nvSpPr>
         <p:spPr>
           <a:xfrm>
-            <a:off x="822960" y="1188720"/>
-            <a:ext cx="10515600" cy="914400"/>
+            <a:off x="822960" y="1463040"/>
+            <a:ext cx="10515600" cy="3291840"/>
           </a:xfrm>
           <a:prstGeom prst="rect">
             <a:avLst/>
@@ -5273,24 +6440,24 @@
           <a:noFill/>
         </p:spPr>
         <p:txBody>
-          <a:bodyPr wrap="square" anchor="t" lIns="0" rIns="0" tIns="0" bIns="0">
+          <a:bodyPr wrap="square" anchor="ctr" lIns="0" rIns="0" tIns="0" bIns="0">
             <a:spAutoFit/>
           </a:bodyPr>
           <a:lstStyle/>
           <a:p>
             <a:pPr algn="l">
               <a:spcAft>
-                <a:spcPts val="1620"/>
-              </a:spcAft>
-            </a:pPr>
-            <a:r>
-              <a:rPr sz="3600" b="1" i="0">
+                <a:spcPts val="2070"/>
+              </a:spcAft>
+            </a:pPr>
+            <a:r>
+              <a:rPr sz="4600" b="1" i="0">
                 <a:solidFill>
                   <a:srgbClr val="1C1B19"/>
                 </a:solidFill>
                 <a:latin typeface="Source Serif 4"/>
               </a:rPr>
-              <a:t>Pick one thing that repeats.</a:t>
+              <a:t>50 hours to a casual friend. 200+ to a close one.</a:t>
             </a:r>
           </a:p>
         </p:txBody>
@@ -5303,8 +6470,8 @@
         </p:nvSpPr>
         <p:spPr>
           <a:xfrm>
-            <a:off x="822960" y="2286000"/>
-            <a:ext cx="10515600" cy="1463040"/>
+            <a:off x="822960" y="4846320"/>
+            <a:ext cx="10515600" cy="1097280"/>
           </a:xfrm>
           <a:prstGeom prst="rect">
             <a:avLst/>
@@ -5319,42 +6486,66 @@
           <a:p>
             <a:pPr algn="l">
               <a:spcAft>
-                <a:spcPts val="1080"/>
-              </a:spcAft>
-            </a:pPr>
-            <a:r>
-              <a:rPr sz="2400" b="0" i="0">
-                <a:solidFill>
-                  <a:srgbClr val="1C1B19"/>
+                <a:spcPts val="990"/>
+              </a:spcAft>
+            </a:pPr>
+            <a:r>
+              <a:rPr sz="2200" b="0" i="1">
+                <a:solidFill>
+                  <a:srgbClr val="5D5A54"/>
                 </a:solidFill>
                 <a:latin typeface="Source Serif 4"/>
               </a:rPr>
-              <a:t>A club, a lunch table, a weekly plan. Write which one, and when you'll start.</a:t>
-            </a:r>
-          </a:p>
-        </p:txBody>
-      </p:sp>
-      <p:sp>
-        <p:nvSpPr>
-          <p:cNvPr id="7" name="Rectangle 6"/>
+              <a:t>Hanging out and real conversation count a lot. Sitting near someone in class counts less.</a:t>
+            </a:r>
+          </a:p>
+        </p:txBody>
+      </p:sp>
+    </p:spTree>
+  </p:cSld>
+  <p:clrMapOvr>
+    <a:masterClrMapping/>
+  </p:clrMapOvr>
+</p:sld>
+</file>
+
+<file path=ppt/slides/slide5.xml><?xml version="1.0" encoding="utf-8"?>
+<p:sld xmlns:a="http://schemas.openxmlformats.org/drawingml/2006/main" xmlns:p="http://schemas.openxmlformats.org/presentationml/2006/main" xmlns:r="http://schemas.openxmlformats.org/officeDocument/2006/relationships">
+  <p:cSld>
+    <p:bg>
+      <p:bgPr>
+        <a:solidFill>
+          <a:srgbClr val="F7F4EE"/>
+        </a:solidFill>
+        <a:effectLst/>
+      </p:bgPr>
+    </p:bg>
+    <p:spTree>
+      <p:nvGrpSpPr>
+        <p:cNvPr id="1" name=""/>
+        <p:cNvGrpSpPr/>
+        <p:nvPr/>
+      </p:nvGrpSpPr>
+      <p:grpSpPr/>
+      <p:sp>
+        <p:nvSpPr>
+          <p:cNvPr id="2" name="Rectangle 1"/>
           <p:cNvSpPr/>
           <p:nvPr/>
         </p:nvSpPr>
         <p:spPr>
           <a:xfrm>
-            <a:off x="822960" y="4023360"/>
-            <a:ext cx="10515600" cy="1371600"/>
+            <a:off x="548640" y="502920"/>
+            <a:ext cx="457200" cy="54864"/>
           </a:xfrm>
           <a:prstGeom prst="rect">
             <a:avLst/>
           </a:prstGeom>
           <a:solidFill>
-            <a:srgbClr val="FFFFFF"/>
+            <a:srgbClr val="F47B20"/>
           </a:solidFill>
-          <a:ln w="15875">
-            <a:solidFill>
-              <a:srgbClr val="1C1B19"/>
-            </a:solidFill>
+          <a:ln>
+            <a:noFill/>
           </a:ln>
           <a:effectLst/>
         </p:spPr>
@@ -5382,14 +6573,14 @@
       </p:sp>
       <p:sp>
         <p:nvSpPr>
-          <p:cNvPr id="8" name="TextBox 7"/>
+          <p:cNvPr id="3" name="TextBox 2"/>
           <p:cNvSpPr txBox="1"/>
           <p:nvPr/>
         </p:nvSpPr>
         <p:spPr>
           <a:xfrm>
-            <a:off x="1097280" y="4206240"/>
-            <a:ext cx="10058400" cy="365760"/>
+            <a:off x="1143000" y="393192"/>
+            <a:ext cx="8229600" cy="274320"/>
           </a:xfrm>
           <a:prstGeom prst="rect">
             <a:avLst/>
@@ -5410,25 +6601,25 @@
             <a:r>
               <a:rPr sz="1200" b="1" i="0">
                 <a:solidFill>
-                  <a:srgbClr val="0B2D5B"/>
+                  <a:srgbClr val="5D5A54"/>
                 </a:solidFill>
                 <a:latin typeface="Inter Tight"/>
               </a:rPr>
-              <a:t>STUDENT PAGE</a:t>
-            </a:r>
-          </a:p>
-        </p:txBody>
-      </p:sp>
-      <p:sp>
-        <p:nvSpPr>
-          <p:cNvPr id="9" name="TextBox 8"/>
+              <a:t>THE LIKING GAP</a:t>
+            </a:r>
+          </a:p>
+        </p:txBody>
+      </p:sp>
+      <p:sp>
+        <p:nvSpPr>
+          <p:cNvPr id="4" name="TextBox 3"/>
           <p:cNvSpPr txBox="1"/>
           <p:nvPr/>
         </p:nvSpPr>
         <p:spPr>
           <a:xfrm>
-            <a:off x="1097280" y="4617720"/>
-            <a:ext cx="10058400" cy="640080"/>
+            <a:off x="8229600" y="6400800"/>
+            <a:ext cx="3410712" cy="274320"/>
           </a:xfrm>
           <a:prstGeom prst="rect">
             <a:avLst/>
@@ -5441,65 +6632,39 @@
           </a:bodyPr>
           <a:lstStyle/>
           <a:p>
-            <a:pPr algn="l">
-              <a:spcAft>
-                <a:spcPts val="900"/>
-              </a:spcAft>
-            </a:pPr>
-            <a:r>
-              <a:rPr sz="2000" b="0" i="0">
-                <a:solidFill>
-                  <a:srgbClr val="1C1B19"/>
+            <a:pPr algn="r">
+              <a:spcAft>
+                <a:spcPts val="450"/>
+              </a:spcAft>
+            </a:pPr>
+            <a:r>
+              <a:rPr sz="1000" b="0" i="0">
+                <a:solidFill>
+                  <a:srgbClr val="5D5A54"/>
                 </a:solidFill>
                 <a:latin typeface="Inter Tight"/>
               </a:rPr>
-              <a:t>https://rmwtoolkit.github.io/bcds-toolkit/new-school-who-dis-high-school.html</a:t>
-            </a:r>
-          </a:p>
-        </p:txBody>
-      </p:sp>
-    </p:spTree>
-  </p:cSld>
-  <p:clrMapOvr>
-    <a:masterClrMapping/>
-  </p:clrMapOvr>
-</p:sld>
-</file>
-
-<file path=ppt/slides/slide2.xml><?xml version="1.0" encoding="utf-8"?>
-<p:sld xmlns:a="http://schemas.openxmlformats.org/drawingml/2006/main" xmlns:p="http://schemas.openxmlformats.org/presentationml/2006/main" xmlns:r="http://schemas.openxmlformats.org/officeDocument/2006/relationships" show="0">
-  <p:cSld>
-    <p:bg>
-      <p:bgPr>
-        <a:solidFill>
-          <a:srgbClr val="EEEBE4"/>
-        </a:solidFill>
-        <a:effectLst/>
-      </p:bgPr>
-    </p:bg>
-    <p:spTree>
-      <p:nvGrpSpPr>
-        <p:cNvPr id="1" name=""/>
-        <p:cNvGrpSpPr/>
-        <p:nvPr/>
-      </p:nvGrpSpPr>
-      <p:grpSpPr/>
-      <p:sp>
-        <p:nvSpPr>
-          <p:cNvPr id="2" name="Rectangle 1"/>
+              <a:t>Beaver Counseling</a:t>
+            </a:r>
+          </a:p>
+        </p:txBody>
+      </p:sp>
+      <p:sp>
+        <p:nvSpPr>
+          <p:cNvPr id="5" name="Rectangle 4"/>
           <p:cNvSpPr/>
           <p:nvPr/>
         </p:nvSpPr>
         <p:spPr>
           <a:xfrm>
-            <a:off x="0" y="0"/>
-            <a:ext cx="12191695" cy="384048"/>
+            <a:off x="822960" y="1371600"/>
+            <a:ext cx="73152" cy="3566160"/>
           </a:xfrm>
           <a:prstGeom prst="rect">
             <a:avLst/>
           </a:prstGeom>
           <a:solidFill>
-            <a:srgbClr val="0B2D5B"/>
+            <a:srgbClr val="F47B20"/>
           </a:solidFill>
           <a:ln>
             <a:noFill/>
@@ -5530,14 +6695,14 @@
       </p:sp>
       <p:sp>
         <p:nvSpPr>
-          <p:cNvPr id="3" name="TextBox 2"/>
+          <p:cNvPr id="6" name="TextBox 5"/>
           <p:cNvSpPr txBox="1"/>
           <p:nvPr/>
         </p:nvSpPr>
         <p:spPr>
           <a:xfrm>
-            <a:off x="548640" y="100584"/>
-            <a:ext cx="10972800" cy="274320"/>
+            <a:off x="1188720" y="1371600"/>
+            <a:ext cx="10058400" cy="3566160"/>
           </a:xfrm>
           <a:prstGeom prst="rect">
             <a:avLst/>
@@ -5545,38 +6710,38 @@
           <a:noFill/>
         </p:spPr>
         <p:txBody>
-          <a:bodyPr wrap="square" anchor="t" lIns="0" rIns="0" tIns="0" bIns="0">
+          <a:bodyPr wrap="square" anchor="ctr" lIns="0" rIns="0" tIns="0" bIns="0">
             <a:spAutoFit/>
           </a:bodyPr>
           <a:lstStyle/>
           <a:p>
             <a:pPr algn="l">
               <a:spcAft>
-                <a:spcPts val="495"/>
-              </a:spcAft>
-            </a:pPr>
-            <a:r>
-              <a:rPr sz="1100" b="1" i="0">
-                <a:solidFill>
-                  <a:srgbClr val="FFFFFF"/>
-                </a:solidFill>
-                <a:latin typeface="Inter Tight"/>
-              </a:rPr>
-              <a:t>TEACHER PAGE  ·  skipped when you present  ·  Before you teach</a:t>
-            </a:r>
-          </a:p>
-        </p:txBody>
-      </p:sp>
-      <p:sp>
-        <p:nvSpPr>
-          <p:cNvPr id="4" name="TextBox 3"/>
+                <a:spcPts val="1800"/>
+              </a:spcAft>
+            </a:pPr>
+            <a:r>
+              <a:rPr sz="4000" b="0" i="1">
+                <a:solidFill>
+                  <a:srgbClr val="1C1B19"/>
+                </a:solidFill>
+                <a:latin typeface="Source Serif 4"/>
+              </a:rPr>
+              <a:t>After a first conversation, people like you more than you think.</a:t>
+            </a:r>
+          </a:p>
+        </p:txBody>
+      </p:sp>
+      <p:sp>
+        <p:nvSpPr>
+          <p:cNvPr id="7" name="TextBox 6"/>
           <p:cNvSpPr txBox="1"/>
           <p:nvPr/>
         </p:nvSpPr>
         <p:spPr>
           <a:xfrm>
-            <a:off x="548640" y="685800"/>
-            <a:ext cx="10972800" cy="640080"/>
+            <a:off x="1188720" y="5120640"/>
+            <a:ext cx="10058400" cy="914400"/>
           </a:xfrm>
           <a:prstGeom prst="rect">
             <a:avLst/>
@@ -5591,1523 +6756,17 @@
           <a:p>
             <a:pPr algn="l">
               <a:spcAft>
-                <a:spcPts val="1350"/>
-              </a:spcAft>
-            </a:pPr>
-            <a:r>
-              <a:rPr sz="3000" b="1" i="0">
-                <a:solidFill>
-                  <a:srgbClr val="1C1B19"/>
-                </a:solidFill>
-                <a:latin typeface="Source Serif 4"/>
-              </a:rPr>
-              <a:t>Before you teach</a:t>
-            </a:r>
-          </a:p>
-        </p:txBody>
-      </p:sp>
-      <p:sp>
-        <p:nvSpPr>
-          <p:cNvPr id="5" name="TextBox 4"/>
-          <p:cNvSpPr txBox="1"/>
-          <p:nvPr/>
-        </p:nvSpPr>
-        <p:spPr>
-          <a:xfrm>
-            <a:off x="548640" y="1463040"/>
-            <a:ext cx="5394960" cy="4937760"/>
-          </a:xfrm>
-          <a:prstGeom prst="rect">
-            <a:avLst/>
-          </a:prstGeom>
-          <a:noFill/>
-        </p:spPr>
-        <p:txBody>
-          <a:bodyPr wrap="square" anchor="t" lIns="0" rIns="0" tIns="0" bIns="0">
-            <a:spAutoFit/>
-          </a:bodyPr>
-          <a:lstStyle/>
-          <a:p>
-            <a:pPr algn="l">
-              <a:spcAft>
-                <a:spcPts val="585"/>
-              </a:spcAft>
-            </a:pPr>
-            <a:r>
-              <a:rPr sz="1500" b="1" i="0">
-                <a:solidFill>
-                  <a:srgbClr val="1C1B19"/>
-                </a:solidFill>
-                <a:latin typeface="Source Serif 4"/>
-              </a:rPr>
-              <a:t>Don't ask who's new.</a:t>
-            </a:r>
-          </a:p>
-          <a:p>
-            <a:pPr algn="l">
-              <a:spcAft>
-                <a:spcPts val="585"/>
-              </a:spcAft>
-            </a:pPr>
-            <a:r>
-              <a:rPr sz="1300" b="0" i="0">
-                <a:solidFill>
-                  <a:srgbClr val="1C1B19"/>
-                </a:solidFill>
-                <a:latin typeface="Source Serif 4"/>
-              </a:rPr>
-              <a:t>Some students arrived this fall, and some have been at Beaver for years. Don't ask for a show of hands or put a new student on the spot to talk about it. The guess on slide 2 works for everyone, including seniors remembering their first month.</a:t>
-            </a:r>
-          </a:p>
-          <a:p>
-            <a:pPr algn="l">
-              <a:spcAft>
-                <a:spcPts val="585"/>
-              </a:spcAft>
-            </a:pPr>
-            <a:r>
-              <a:rPr sz="1300" b="0" i="0">
-                <a:solidFill>
-                  <a:srgbClr val="1C1B19"/>
-                </a:solidFill>
-                <a:latin typeface="Source Serif 4"/>
-              </a:rPr>
-              <a:t/>
-            </a:r>
-          </a:p>
-          <a:p>
-            <a:pPr algn="l">
-              <a:spcAft>
-                <a:spcPts val="585"/>
-              </a:spcAft>
-            </a:pPr>
-            <a:r>
-              <a:rPr sz="1500" b="1" i="0">
-                <a:solidFill>
-                  <a:srgbClr val="1C1B19"/>
-                </a:solidFill>
-                <a:latin typeface="Source Serif 4"/>
-              </a:rPr>
-              <a:t>Lonely is close to the surface.</a:t>
-            </a:r>
-          </a:p>
-          <a:p>
-            <a:pPr algn="l">
-              <a:spcAft>
-                <a:spcPts val="585"/>
-              </a:spcAft>
-            </a:pPr>
-            <a:r>
-              <a:rPr sz="1300" b="0" i="0">
-                <a:solidFill>
-                  <a:srgbClr val="1C1B19"/>
-                </a:solidFill>
-                <a:latin typeface="Source Serif 4"/>
-              </a:rPr>
-              <a:t>Someone in your circle may be eating lunch alone most days. Never ask who has a group or who they sit with. If a student seems isolated, check in privately afterward and loop in a counselor.</a:t>
-            </a:r>
-          </a:p>
-          <a:p>
-            <a:pPr algn="l">
-              <a:spcAft>
-                <a:spcPts val="585"/>
-              </a:spcAft>
-            </a:pPr>
-            <a:r>
-              <a:rPr sz="1300" b="0" i="0">
-                <a:solidFill>
-                  <a:srgbClr val="1C1B19"/>
-                </a:solidFill>
-                <a:latin typeface="Source Serif 4"/>
-              </a:rPr>
-              <a:t/>
-            </a:r>
-          </a:p>
-          <a:p>
-            <a:pPr algn="l">
-              <a:spcAft>
-                <a:spcPts val="585"/>
-              </a:spcAft>
-            </a:pPr>
-            <a:r>
-              <a:rPr sz="1500" b="1" i="0">
-                <a:solidFill>
-                  <a:srgbClr val="1C1B19"/>
-                </a:solidFill>
-                <a:latin typeface="Source Serif 4"/>
-              </a:rPr>
-              <a:t>Don't ask why anyone moved.</a:t>
-            </a:r>
-          </a:p>
-          <a:p>
-            <a:pPr algn="l">
-              <a:spcAft>
-                <a:spcPts val="585"/>
-              </a:spcAft>
-            </a:pPr>
-            <a:r>
-              <a:rPr sz="1300" b="0" i="0">
-                <a:solidFill>
-                  <a:srgbClr val="1C1B19"/>
-                </a:solidFill>
-                <a:latin typeface="Source Serif 4"/>
-              </a:rPr>
-              <a:t>Students change schools for all kinds of reasons: a job, a divorce, a death, a new home, immigration, a hard year somewhere else. The lesson is about what helps now.</a:t>
-            </a:r>
-          </a:p>
-          <a:p>
-            <a:pPr algn="l">
-              <a:spcAft>
-                <a:spcPts val="585"/>
-              </a:spcAft>
-            </a:pPr>
-            <a:r>
-              <a:rPr sz="1300" b="0" i="0">
-                <a:solidFill>
-                  <a:srgbClr val="1C1B19"/>
-                </a:solidFill>
-                <a:latin typeface="Source Serif 4"/>
-              </a:rPr>
-              <a:t/>
-            </a:r>
-          </a:p>
-        </p:txBody>
-      </p:sp>
-      <p:sp>
-        <p:nvSpPr>
-          <p:cNvPr id="6" name="TextBox 5"/>
-          <p:cNvSpPr txBox="1"/>
-          <p:nvPr/>
-        </p:nvSpPr>
-        <p:spPr>
-          <a:xfrm>
-            <a:off x="6217920" y="1463040"/>
-            <a:ext cx="5394960" cy="4937760"/>
-          </a:xfrm>
-          <a:prstGeom prst="rect">
-            <a:avLst/>
-          </a:prstGeom>
-          <a:noFill/>
-        </p:spPr>
-        <p:txBody>
-          <a:bodyPr wrap="square" anchor="t" lIns="0" rIns="0" tIns="0" bIns="0">
-            <a:spAutoFit/>
-          </a:bodyPr>
-          <a:lstStyle/>
-          <a:p>
-            <a:pPr algn="l">
-              <a:spcAft>
-                <a:spcPts val="585"/>
-              </a:spcAft>
-            </a:pPr>
-            <a:r>
-              <a:rPr sz="1500" b="1" i="0">
-                <a:solidFill>
-                  <a:srgbClr val="1C1B19"/>
-                </a:solidFill>
-                <a:latin typeface="Source Serif 4"/>
-              </a:rPr>
-              <a:t>Being left out on purpose is different.</a:t>
-            </a:r>
-          </a:p>
-          <a:p>
-            <a:pPr algn="l">
-              <a:spcAft>
-                <a:spcPts val="585"/>
-              </a:spcAft>
-            </a:pPr>
-            <a:r>
-              <a:rPr sz="1300" b="0" i="0">
-                <a:solidFill>
-                  <a:srgbClr val="1C1B19"/>
-                </a:solidFill>
-                <a:latin typeface="Source Serif 4"/>
-              </a:rPr>
-              <a:t>If a student is being targeted or excluded because of their race, religion, accent, or where they're from, that is a counselor or dean conversation that day, not a discussion topic.</a:t>
-            </a:r>
-          </a:p>
-          <a:p>
-            <a:pPr algn="l">
-              <a:spcAft>
-                <a:spcPts val="585"/>
-              </a:spcAft>
-            </a:pPr>
-            <a:r>
-              <a:rPr sz="1300" b="0" i="0">
-                <a:solidFill>
-                  <a:srgbClr val="1C1B19"/>
-                </a:solidFill>
-                <a:latin typeface="Source Serif 4"/>
-              </a:rPr>
-              <a:t/>
-            </a:r>
-          </a:p>
-          <a:p>
-            <a:pPr algn="l">
-              <a:spcAft>
-                <a:spcPts val="585"/>
-              </a:spcAft>
-            </a:pPr>
-            <a:r>
-              <a:rPr sz="1500" b="1" i="0">
-                <a:solidFill>
-                  <a:srgbClr val="1C1B19"/>
-                </a:solidFill>
-                <a:latin typeface="Source Serif 4"/>
-              </a:rPr>
-              <a:t>Know when it's more than new.</a:t>
-            </a:r>
-          </a:p>
-          <a:p>
-            <a:pPr algn="l">
-              <a:spcAft>
-                <a:spcPts val="585"/>
-              </a:spcAft>
-            </a:pPr>
-            <a:r>
-              <a:rPr sz="1300" b="0" i="0">
-                <a:solidFill>
-                  <a:srgbClr val="1C1B19"/>
-                </a:solidFill>
-                <a:latin typeface="Source Serif 4"/>
-              </a:rPr>
-              <a:t>Dreading school most mornings, feeling sick before coming, still feeling alone most of the time after a couple of months, or big changes in sleep, eating or mood are reasons to see a counselor. Don't ask about these in advisory. Any disclosure goes to a counselor the same day, and 988 is there any time.</a:t>
-            </a:r>
-          </a:p>
-          <a:p>
-            <a:pPr algn="l">
-              <a:spcAft>
-                <a:spcPts val="585"/>
-              </a:spcAft>
-            </a:pPr>
-            <a:r>
-              <a:rPr sz="1300" b="0" i="0">
-                <a:solidFill>
-                  <a:srgbClr val="1C1B19"/>
-                </a:solidFill>
-                <a:latin typeface="Source Serif 4"/>
-              </a:rPr>
-              <a:t/>
-            </a:r>
-          </a:p>
-          <a:p>
-            <a:pPr algn="l">
-              <a:spcAft>
-                <a:spcPts val="585"/>
-              </a:spcAft>
-            </a:pPr>
-            <a:r>
-              <a:rPr sz="1500" b="1" i="0">
-                <a:solidFill>
-                  <a:srgbClr val="1C1B19"/>
-                </a:solidFill>
-                <a:latin typeface="Source Serif 4"/>
-              </a:rPr>
-              <a:t>Old friends are a real support.</a:t>
-            </a:r>
-          </a:p>
-          <a:p>
-            <a:pPr algn="l">
-              <a:spcAft>
-                <a:spcPts val="585"/>
-              </a:spcAft>
-            </a:pPr>
-            <a:r>
-              <a:rPr sz="1300" b="0" i="0">
-                <a:solidFill>
-                  <a:srgbClr val="1C1B19"/>
-                </a:solidFill>
-                <a:latin typeface="Source Serif 4"/>
-              </a:rPr>
-              <a:t>Don't frame old friends as something to drop. The goal is keeping some time open for new hours to happen.</a:t>
-            </a:r>
-          </a:p>
-          <a:p>
-            <a:pPr algn="l">
-              <a:spcAft>
-                <a:spcPts val="585"/>
-              </a:spcAft>
-            </a:pPr>
-            <a:r>
-              <a:rPr sz="1300" b="0" i="0">
-                <a:solidFill>
-                  <a:srgbClr val="1C1B19"/>
-                </a:solidFill>
-                <a:latin typeface="Source Serif 4"/>
-              </a:rPr>
-              <a:t/>
-            </a:r>
-          </a:p>
-        </p:txBody>
-      </p:sp>
-    </p:spTree>
-  </p:cSld>
-  <p:clrMapOvr>
-    <a:masterClrMapping/>
-  </p:clrMapOvr>
-</p:sld>
-</file>
-
-<file path=ppt/slides/slide3.xml><?xml version="1.0" encoding="utf-8"?>
-<p:sld xmlns:a="http://schemas.openxmlformats.org/drawingml/2006/main" xmlns:p="http://schemas.openxmlformats.org/presentationml/2006/main" xmlns:r="http://schemas.openxmlformats.org/officeDocument/2006/relationships" show="0">
-  <p:cSld>
-    <p:bg>
-      <p:bgPr>
-        <a:solidFill>
-          <a:srgbClr val="EEEBE4"/>
-        </a:solidFill>
-        <a:effectLst/>
-      </p:bgPr>
-    </p:bg>
-    <p:spTree>
-      <p:nvGrpSpPr>
-        <p:cNvPr id="1" name=""/>
-        <p:cNvGrpSpPr/>
-        <p:nvPr/>
-      </p:nvGrpSpPr>
-      <p:grpSpPr/>
-      <p:sp>
-        <p:nvSpPr>
-          <p:cNvPr id="2" name="Rectangle 1"/>
-          <p:cNvSpPr/>
-          <p:nvPr/>
-        </p:nvSpPr>
-        <p:spPr>
-          <a:xfrm>
-            <a:off x="0" y="0"/>
-            <a:ext cx="12191695" cy="384048"/>
-          </a:xfrm>
-          <a:prstGeom prst="rect">
-            <a:avLst/>
-          </a:prstGeom>
-          <a:solidFill>
-            <a:srgbClr val="0B2D5B"/>
-          </a:solidFill>
-          <a:ln>
-            <a:noFill/>
-          </a:ln>
-          <a:effectLst/>
-        </p:spPr>
-        <p:style>
-          <a:lnRef idx="1">
-            <a:schemeClr val="accent1"/>
-          </a:lnRef>
-          <a:fillRef idx="3">
-            <a:schemeClr val="accent1"/>
-          </a:fillRef>
-          <a:effectRef idx="2">
-            <a:schemeClr val="accent1"/>
-          </a:effectRef>
-          <a:fontRef idx="minor">
-            <a:schemeClr val="lt1"/>
-          </a:fontRef>
-        </p:style>
-        <p:txBody>
-          <a:bodyPr rtlCol="0" anchor="ctr"/>
-          <a:lstStyle/>
-          <a:p>
-            <a:pPr algn="ctr"/>
-          </a:p>
-        </p:txBody>
-      </p:sp>
-      <p:sp>
-        <p:nvSpPr>
-          <p:cNvPr id="3" name="TextBox 2"/>
-          <p:cNvSpPr txBox="1"/>
-          <p:nvPr/>
-        </p:nvSpPr>
-        <p:spPr>
-          <a:xfrm>
-            <a:off x="548640" y="100584"/>
-            <a:ext cx="10972800" cy="274320"/>
-          </a:xfrm>
-          <a:prstGeom prst="rect">
-            <a:avLst/>
-          </a:prstGeom>
-          <a:noFill/>
-        </p:spPr>
-        <p:txBody>
-          <a:bodyPr wrap="square" anchor="t" lIns="0" rIns="0" tIns="0" bIns="0">
-            <a:spAutoFit/>
-          </a:bodyPr>
-          <a:lstStyle/>
-          <a:p>
-            <a:pPr algn="l">
-              <a:spcAft>
-                <a:spcPts val="495"/>
-              </a:spcAft>
-            </a:pPr>
-            <a:r>
-              <a:rPr sz="1100" b="1" i="0">
-                <a:solidFill>
-                  <a:srgbClr val="FFFFFF"/>
+                <a:spcPts val="810"/>
+              </a:spcAft>
+            </a:pPr>
+            <a:r>
+              <a:rPr sz="1800" b="0" i="0">
+                <a:solidFill>
+                  <a:srgbClr val="5D5A54"/>
                 </a:solidFill>
                 <a:latin typeface="Inter Tight"/>
               </a:rPr>
-              <a:t>TEACHER PAGE  ·  skipped when you present  ·  Every student in the room</a:t>
-            </a:r>
-          </a:p>
-        </p:txBody>
-      </p:sp>
-      <p:sp>
-        <p:nvSpPr>
-          <p:cNvPr id="4" name="TextBox 3"/>
-          <p:cNvSpPr txBox="1"/>
-          <p:nvPr/>
-        </p:nvSpPr>
-        <p:spPr>
-          <a:xfrm>
-            <a:off x="548640" y="685800"/>
-            <a:ext cx="10972800" cy="640080"/>
-          </a:xfrm>
-          <a:prstGeom prst="rect">
-            <a:avLst/>
-          </a:prstGeom>
-          <a:noFill/>
-        </p:spPr>
-        <p:txBody>
-          <a:bodyPr wrap="square" anchor="t" lIns="0" rIns="0" tIns="0" bIns="0">
-            <a:spAutoFit/>
-          </a:bodyPr>
-          <a:lstStyle/>
-          <a:p>
-            <a:pPr algn="l">
-              <a:spcAft>
-                <a:spcPts val="1350"/>
-              </a:spcAft>
-            </a:pPr>
-            <a:r>
-              <a:rPr sz="3000" b="1" i="0">
-                <a:solidFill>
-                  <a:srgbClr val="1C1B19"/>
-                </a:solidFill>
-                <a:latin typeface="Source Serif 4"/>
-              </a:rPr>
-              <a:t>Every student in the room</a:t>
-            </a:r>
-          </a:p>
-        </p:txBody>
-      </p:sp>
-      <p:sp>
-        <p:nvSpPr>
-          <p:cNvPr id="5" name="TextBox 4"/>
-          <p:cNvSpPr txBox="1"/>
-          <p:nvPr/>
-        </p:nvSpPr>
-        <p:spPr>
-          <a:xfrm>
-            <a:off x="548640" y="1325880"/>
-            <a:ext cx="10972800" cy="365760"/>
-          </a:xfrm>
-          <a:prstGeom prst="rect">
-            <a:avLst/>
-          </a:prstGeom>
-          <a:noFill/>
-        </p:spPr>
-        <p:txBody>
-          <a:bodyPr wrap="square" anchor="t" lIns="0" rIns="0" tIns="0" bIns="0">
-            <a:spAutoFit/>
-          </a:bodyPr>
-          <a:lstStyle/>
-          <a:p>
-            <a:pPr algn="l">
-              <a:spcAft>
-                <a:spcPts val="630"/>
-              </a:spcAft>
-            </a:pPr>
-            <a:r>
-              <a:rPr sz="1400" b="0" i="0">
-                <a:solidFill>
-                  <a:srgbClr val="5D5A54"/>
-                </a:solidFill>
-                <a:latin typeface="Inter Tight"/>
-              </a:rPr>
-              <a:t>Culture, family, identity, ability and money: what to keep in mind for this topic.</a:t>
-            </a:r>
-          </a:p>
-        </p:txBody>
-      </p:sp>
-      <p:sp>
-        <p:nvSpPr>
-          <p:cNvPr id="6" name="TextBox 5"/>
-          <p:cNvSpPr txBox="1"/>
-          <p:nvPr/>
-        </p:nvSpPr>
-        <p:spPr>
-          <a:xfrm>
-            <a:off x="548640" y="1828800"/>
-            <a:ext cx="5394960" cy="4572000"/>
-          </a:xfrm>
-          <a:prstGeom prst="rect">
-            <a:avLst/>
-          </a:prstGeom>
-          <a:noFill/>
-        </p:spPr>
-        <p:txBody>
-          <a:bodyPr wrap="square" anchor="t" lIns="0" rIns="0" tIns="0" bIns="0">
-            <a:spAutoFit/>
-          </a:bodyPr>
-          <a:lstStyle/>
-          <a:p>
-            <a:pPr algn="l">
-              <a:spcAft>
-                <a:spcPts val="585"/>
-              </a:spcAft>
-            </a:pPr>
-            <a:r>
-              <a:rPr sz="1500" b="1" i="0">
-                <a:solidFill>
-                  <a:srgbClr val="1C1B19"/>
-                </a:solidFill>
-                <a:latin typeface="Source Serif 4"/>
-              </a:rPr>
-              <a:t>Being one of few here from your background.</a:t>
-            </a:r>
-          </a:p>
-          <a:p>
-            <a:pPr algn="l">
-              <a:spcAft>
-                <a:spcPts val="585"/>
-              </a:spcAft>
-            </a:pPr>
-            <a:r>
-              <a:rPr sz="1300" b="0" i="0">
-                <a:solidFill>
-                  <a:srgbClr val="1C1B19"/>
-                </a:solidFill>
-                <a:latin typeface="Source Serif 4"/>
-              </a:rPr>
-              <a:t>For students who share their race, culture, faith or home language with few others at Beaver, "do I belong here?" can be louder. That isn't proof they're in the wrong place. Name affinity groups and clubs, and say it's fair to expect the school to make room. Don't ask anyone to speak for their group.</a:t>
-            </a:r>
-          </a:p>
-          <a:p>
-            <a:pPr algn="l">
-              <a:spcAft>
-                <a:spcPts val="585"/>
-              </a:spcAft>
-            </a:pPr>
-            <a:r>
-              <a:rPr sz="1300" b="0" i="0">
-                <a:solidFill>
-                  <a:srgbClr val="1C1B19"/>
-                </a:solidFill>
-                <a:latin typeface="Source Serif 4"/>
-              </a:rPr>
-              <a:t/>
-            </a:r>
-          </a:p>
-          <a:p>
-            <a:pPr algn="l">
-              <a:spcAft>
-                <a:spcPts val="585"/>
-              </a:spcAft>
-            </a:pPr>
-            <a:r>
-              <a:rPr sz="1500" b="1" i="0">
-                <a:solidFill>
-                  <a:srgbClr val="1C1B19"/>
-                </a:solidFill>
-                <a:latin typeface="Source Serif 4"/>
-              </a:rPr>
-              <a:t>Moving from another country.</a:t>
-            </a:r>
-          </a:p>
-          <a:p>
-            <a:pPr algn="l">
-              <a:spcAft>
-                <a:spcPts val="585"/>
-              </a:spcAft>
-            </a:pPr>
-            <a:r>
-              <a:rPr sz="1300" b="0" i="0">
-                <a:solidFill>
-                  <a:srgbClr val="1C1B19"/>
-                </a:solidFill>
-                <a:latin typeface="Source Serif 4"/>
-              </a:rPr>
-              <a:t>The unwritten rules at a new school can be different, and accents and home languages get noticed. The student page says plainly that erasing your background, accent or faith to fit in costs more than it buys. Keep the Mateo scenario on what classmates can do, never on Mateo's English.</a:t>
-            </a:r>
-          </a:p>
-          <a:p>
-            <a:pPr algn="l">
-              <a:spcAft>
-                <a:spcPts val="585"/>
-              </a:spcAft>
-            </a:pPr>
-            <a:r>
-              <a:rPr sz="1300" b="0" i="0">
-                <a:solidFill>
-                  <a:srgbClr val="1C1B19"/>
-                </a:solidFill>
-                <a:latin typeface="Source Serif 4"/>
-              </a:rPr>
-              <a:t/>
-            </a:r>
-          </a:p>
-          <a:p>
-            <a:pPr algn="l">
-              <a:spcAft>
-                <a:spcPts val="585"/>
-              </a:spcAft>
-            </a:pPr>
-            <a:r>
-              <a:rPr sz="1500" b="1" i="0">
-                <a:solidFill>
-                  <a:srgbClr val="1C1B19"/>
-                </a:solidFill>
-                <a:latin typeface="Source Serif 4"/>
-              </a:rPr>
-              <a:t>"Join something weekly" can cost money and rides.</a:t>
-            </a:r>
-          </a:p>
-          <a:p>
-            <a:pPr algn="l">
-              <a:spcAft>
-                <a:spcPts val="585"/>
-              </a:spcAft>
-            </a:pPr>
-            <a:r>
-              <a:rPr sz="1300" b="0" i="0">
-                <a:solidFill>
-                  <a:srgbClr val="1C1B19"/>
-                </a:solidFill>
-                <a:latin typeface="Source Serif 4"/>
-              </a:rPr>
-              <a:t>Some teams and activities need fees, gear, or a ride home late. Some students work or care for siblings after school. A job counts as weekly hours, and a library study plan or a lunch table is free.</a:t>
-            </a:r>
-          </a:p>
-          <a:p>
-            <a:pPr algn="l">
-              <a:spcAft>
-                <a:spcPts val="585"/>
-              </a:spcAft>
-            </a:pPr>
-            <a:r>
-              <a:rPr sz="1300" b="0" i="0">
-                <a:solidFill>
-                  <a:srgbClr val="1C1B19"/>
-                </a:solidFill>
-                <a:latin typeface="Source Serif 4"/>
-              </a:rPr>
-              <a:t/>
-            </a:r>
-          </a:p>
-        </p:txBody>
-      </p:sp>
-      <p:sp>
-        <p:nvSpPr>
-          <p:cNvPr id="7" name="TextBox 6"/>
-          <p:cNvSpPr txBox="1"/>
-          <p:nvPr/>
-        </p:nvSpPr>
-        <p:spPr>
-          <a:xfrm>
-            <a:off x="6217920" y="1828800"/>
-            <a:ext cx="5394960" cy="4572000"/>
-          </a:xfrm>
-          <a:prstGeom prst="rect">
-            <a:avLst/>
-          </a:prstGeom>
-          <a:noFill/>
-        </p:spPr>
-        <p:txBody>
-          <a:bodyPr wrap="square" anchor="t" lIns="0" rIns="0" tIns="0" bIns="0">
-            <a:spAutoFit/>
-          </a:bodyPr>
-          <a:lstStyle/>
-          <a:p>
-            <a:pPr algn="l">
-              <a:spcAft>
-                <a:spcPts val="585"/>
-              </a:spcAft>
-            </a:pPr>
-            <a:r>
-              <a:rPr sz="1500" b="1" i="0">
-                <a:solidFill>
-                  <a:srgbClr val="1C1B19"/>
-                </a:solidFill>
-                <a:latin typeface="Source Serif 4"/>
-              </a:rPr>
-              <a:t>Faith can be the weekly thing, or can shape the week.</a:t>
-            </a:r>
-          </a:p>
-          <a:p>
-            <a:pPr algn="l">
-              <a:spcAft>
-                <a:spcPts val="585"/>
-              </a:spcAft>
-            </a:pPr>
-            <a:r>
-              <a:rPr sz="1300" b="0" i="0">
-                <a:solidFill>
-                  <a:srgbClr val="1C1B19"/>
-                </a:solidFill>
-                <a:latin typeface="Source Serif 4"/>
-              </a:rPr>
-              <a:t>A youth group or faith community counts as repeated hours with the same people. Some students can't go out on certain nights for faith or family reasons. Lunch and school-day options work for them too.</a:t>
-            </a:r>
-          </a:p>
-          <a:p>
-            <a:pPr algn="l">
-              <a:spcAft>
-                <a:spcPts val="585"/>
-              </a:spcAft>
-            </a:pPr>
-            <a:r>
-              <a:rPr sz="1300" b="0" i="0">
-                <a:solidFill>
-                  <a:srgbClr val="1C1B19"/>
-                </a:solidFill>
-                <a:latin typeface="Source Serif 4"/>
-              </a:rPr>
-              <a:t/>
-            </a:r>
-          </a:p>
-          <a:p>
-            <a:pPr algn="l">
-              <a:spcAft>
-                <a:spcPts val="585"/>
-              </a:spcAft>
-            </a:pPr>
-            <a:r>
-              <a:rPr sz="1500" b="1" i="0">
-                <a:solidFill>
-                  <a:srgbClr val="1C1B19"/>
-                </a:solidFill>
-                <a:latin typeface="Source Serif 4"/>
-              </a:rPr>
-              <a:t>Small talk is harder for some students.</a:t>
-            </a:r>
-          </a:p>
-          <a:p>
-            <a:pPr algn="l">
-              <a:spcAft>
-                <a:spcPts val="585"/>
-              </a:spcAft>
-            </a:pPr>
-            <a:r>
-              <a:rPr sz="1300" b="0" i="0">
-                <a:solidFill>
-                  <a:srgbClr val="1C1B19"/>
-                </a:solidFill>
-                <a:latin typeface="Source Serif 4"/>
-              </a:rPr>
-              <a:t>For autistic students and students with social anxiety, "one question past small talk" can take real effort. Activities with a shared task, like a robotics build, a show crew or a team, give conversation something to hang on. Don't make outgoing the measure of fitting in.</a:t>
-            </a:r>
-          </a:p>
-          <a:p>
-            <a:pPr algn="l">
-              <a:spcAft>
-                <a:spcPts val="585"/>
-              </a:spcAft>
-            </a:pPr>
-            <a:r>
-              <a:rPr sz="1300" b="0" i="0">
-                <a:solidFill>
-                  <a:srgbClr val="1C1B19"/>
-                </a:solidFill>
-                <a:latin typeface="Source Serif 4"/>
-              </a:rPr>
-              <a:t/>
-            </a:r>
-          </a:p>
-          <a:p>
-            <a:pPr algn="l">
-              <a:spcAft>
-                <a:spcPts val="585"/>
-              </a:spcAft>
-            </a:pPr>
-            <a:r>
-              <a:rPr sz="1500" b="1" i="0">
-                <a:solidFill>
-                  <a:srgbClr val="1C1B19"/>
-                </a:solidFill>
-                <a:latin typeface="Source Serif 4"/>
-              </a:rPr>
-              <a:t>"Find one adult" may matter more for some.</a:t>
-            </a:r>
-          </a:p>
-          <a:p>
-            <a:pPr algn="l">
-              <a:spcAft>
-                <a:spcPts val="585"/>
-              </a:spcAft>
-            </a:pPr>
-            <a:r>
-              <a:rPr sz="1300" b="0" i="0">
-                <a:solidFill>
-                  <a:srgbClr val="1C1B19"/>
-                </a:solidFill>
-                <a:latin typeface="Source Serif 4"/>
-              </a:rPr>
-              <a:t>Students who moved for a family change, live in foster or kinship care, or don't have an adult at home who can drive them to things may lean on a school adult more. Make sure every student leaves knowing at least one adult at Beaver they could go to.</a:t>
-            </a:r>
-          </a:p>
-          <a:p>
-            <a:pPr algn="l">
-              <a:spcAft>
-                <a:spcPts val="585"/>
-              </a:spcAft>
-            </a:pPr>
-            <a:r>
-              <a:rPr sz="1300" b="0" i="0">
-                <a:solidFill>
-                  <a:srgbClr val="1C1B19"/>
-                </a:solidFill>
-                <a:latin typeface="Source Serif 4"/>
-              </a:rPr>
-              <a:t/>
-            </a:r>
-          </a:p>
-        </p:txBody>
-      </p:sp>
-    </p:spTree>
-  </p:cSld>
-  <p:clrMapOvr>
-    <a:masterClrMapping/>
-  </p:clrMapOvr>
-</p:sld>
-</file>
-
-<file path=ppt/slides/slide4.xml><?xml version="1.0" encoding="utf-8"?>
-<p:sld xmlns:a="http://schemas.openxmlformats.org/drawingml/2006/main" xmlns:p="http://schemas.openxmlformats.org/presentationml/2006/main" xmlns:r="http://schemas.openxmlformats.org/officeDocument/2006/relationships" show="0">
-  <p:cSld>
-    <p:bg>
-      <p:bgPr>
-        <a:solidFill>
-          <a:srgbClr val="EEEBE4"/>
-        </a:solidFill>
-        <a:effectLst/>
-      </p:bgPr>
-    </p:bg>
-    <p:spTree>
-      <p:nvGrpSpPr>
-        <p:cNvPr id="1" name=""/>
-        <p:cNvGrpSpPr/>
-        <p:nvPr/>
-      </p:nvGrpSpPr>
-      <p:grpSpPr/>
-      <p:sp>
-        <p:nvSpPr>
-          <p:cNvPr id="2" name="Rectangle 1"/>
-          <p:cNvSpPr/>
-          <p:nvPr/>
-        </p:nvSpPr>
-        <p:spPr>
-          <a:xfrm>
-            <a:off x="0" y="0"/>
-            <a:ext cx="12191695" cy="384048"/>
-          </a:xfrm>
-          <a:prstGeom prst="rect">
-            <a:avLst/>
-          </a:prstGeom>
-          <a:solidFill>
-            <a:srgbClr val="0B2D5B"/>
-          </a:solidFill>
-          <a:ln>
-            <a:noFill/>
-          </a:ln>
-          <a:effectLst/>
-        </p:spPr>
-        <p:style>
-          <a:lnRef idx="1">
-            <a:schemeClr val="accent1"/>
-          </a:lnRef>
-          <a:fillRef idx="3">
-            <a:schemeClr val="accent1"/>
-          </a:fillRef>
-          <a:effectRef idx="2">
-            <a:schemeClr val="accent1"/>
-          </a:effectRef>
-          <a:fontRef idx="minor">
-            <a:schemeClr val="lt1"/>
-          </a:fontRef>
-        </p:style>
-        <p:txBody>
-          <a:bodyPr rtlCol="0" anchor="ctr"/>
-          <a:lstStyle/>
-          <a:p>
-            <a:pPr algn="ctr"/>
-          </a:p>
-        </p:txBody>
-      </p:sp>
-      <p:sp>
-        <p:nvSpPr>
-          <p:cNvPr id="3" name="TextBox 2"/>
-          <p:cNvSpPr txBox="1"/>
-          <p:nvPr/>
-        </p:nvSpPr>
-        <p:spPr>
-          <a:xfrm>
-            <a:off x="548640" y="100584"/>
-            <a:ext cx="10972800" cy="274320"/>
-          </a:xfrm>
-          <a:prstGeom prst="rect">
-            <a:avLst/>
-          </a:prstGeom>
-          <a:noFill/>
-        </p:spPr>
-        <p:txBody>
-          <a:bodyPr wrap="square" anchor="t" lIns="0" rIns="0" tIns="0" bIns="0">
-            <a:spAutoFit/>
-          </a:bodyPr>
-          <a:lstStyle/>
-          <a:p>
-            <a:pPr algn="l">
-              <a:spcAft>
-                <a:spcPts val="495"/>
-              </a:spcAft>
-            </a:pPr>
-            <a:r>
-              <a:rPr sz="1100" b="1" i="0">
-                <a:solidFill>
-                  <a:srgbClr val="FFFFFF"/>
-                </a:solidFill>
-                <a:latin typeface="Inter Tight"/>
-              </a:rPr>
-              <a:t>TEACHER PAGE  ·  skipped when you present  ·  Background</a:t>
-            </a:r>
-          </a:p>
-        </p:txBody>
-      </p:sp>
-      <p:sp>
-        <p:nvSpPr>
-          <p:cNvPr id="4" name="TextBox 3"/>
-          <p:cNvSpPr txBox="1"/>
-          <p:nvPr/>
-        </p:nvSpPr>
-        <p:spPr>
-          <a:xfrm>
-            <a:off x="548640" y="685800"/>
-            <a:ext cx="10972800" cy="640080"/>
-          </a:xfrm>
-          <a:prstGeom prst="rect">
-            <a:avLst/>
-          </a:prstGeom>
-          <a:noFill/>
-        </p:spPr>
-        <p:txBody>
-          <a:bodyPr wrap="square" anchor="t" lIns="0" rIns="0" tIns="0" bIns="0">
-            <a:spAutoFit/>
-          </a:bodyPr>
-          <a:lstStyle/>
-          <a:p>
-            <a:pPr algn="l">
-              <a:spcAft>
-                <a:spcPts val="1350"/>
-              </a:spcAft>
-            </a:pPr>
-            <a:r>
-              <a:rPr sz="3000" b="1" i="0">
-                <a:solidFill>
-                  <a:srgbClr val="1C1B19"/>
-                </a:solidFill>
-                <a:latin typeface="Source Serif 4"/>
-              </a:rPr>
-              <a:t>What the research says</a:t>
-            </a:r>
-          </a:p>
-        </p:txBody>
-      </p:sp>
-      <p:sp>
-        <p:nvSpPr>
-          <p:cNvPr id="5" name="TextBox 4"/>
-          <p:cNvSpPr txBox="1"/>
-          <p:nvPr/>
-        </p:nvSpPr>
-        <p:spPr>
-          <a:xfrm>
-            <a:off x="548640" y="1463040"/>
-            <a:ext cx="5394960" cy="4937760"/>
-          </a:xfrm>
-          <a:prstGeom prst="rect">
-            <a:avLst/>
-          </a:prstGeom>
-          <a:noFill/>
-        </p:spPr>
-        <p:txBody>
-          <a:bodyPr wrap="square" anchor="t" lIns="0" rIns="0" tIns="0" bIns="0">
-            <a:spAutoFit/>
-          </a:bodyPr>
-          <a:lstStyle/>
-          <a:p>
-            <a:pPr algn="l">
-              <a:spcAft>
-                <a:spcPts val="585"/>
-              </a:spcAft>
-            </a:pPr>
-            <a:r>
-              <a:rPr sz="1300" b="0" i="0">
-                <a:solidFill>
-                  <a:srgbClr val="1C1B19"/>
-                </a:solidFill>
-                <a:latin typeface="Source Serif 4"/>
-              </a:rPr>
-              <a:t>Adults who had just moved and first-year college students estimated it took about 50 hours together to go from acquaintance to casual friend, about 90 to become friends, and more than 200 for a close friend. Students got there faster than adults. These are rough averages from people's own estimates.</a:t>
-            </a:r>
-          </a:p>
-          <a:p>
-            <a:pPr algn="l">
-              <a:spcAft>
-                <a:spcPts val="585"/>
-              </a:spcAft>
-            </a:pPr>
-            <a:r>
-              <a:rPr sz="1050" b="0" i="0">
-                <a:solidFill>
-                  <a:srgbClr val="5D5A54"/>
-                </a:solidFill>
-                <a:latin typeface="Inter Tight"/>
-              </a:rPr>
-              <a:t>Hall, Journal of Social and Personal Relationships, 2019</a:t>
-            </a:r>
-          </a:p>
-          <a:p>
-            <a:pPr algn="l">
-              <a:spcAft>
-                <a:spcPts val="585"/>
-              </a:spcAft>
-            </a:pPr>
-            <a:r>
-              <a:rPr sz="1300" b="0" i="0">
-                <a:solidFill>
-                  <a:srgbClr val="1C1B19"/>
-                </a:solidFill>
-                <a:latin typeface="Source Serif 4"/>
-              </a:rPr>
-              <a:t>Hanging out, joking around and real conversations counted most toward closeness. Sitting near each other in class or working side by side counted less, and small talk alone was linked to drifting apart.</a:t>
-            </a:r>
-          </a:p>
-          <a:p>
-            <a:pPr algn="l">
-              <a:spcAft>
-                <a:spcPts val="585"/>
-              </a:spcAft>
-            </a:pPr>
-            <a:r>
-              <a:rPr sz="1050" b="0" i="0">
-                <a:solidFill>
-                  <a:srgbClr val="5D5A54"/>
-                </a:solidFill>
-                <a:latin typeface="Inter Tight"/>
-              </a:rPr>
-              <a:t>Hall, 2019</a:t>
-            </a:r>
-          </a:p>
-          <a:p>
-            <a:pPr algn="l">
-              <a:spcAft>
-                <a:spcPts val="585"/>
-              </a:spcAft>
-            </a:pPr>
-            <a:r>
-              <a:rPr sz="1300" b="0" i="0">
-                <a:solidFill>
-                  <a:srgbClr val="1C1B19"/>
-                </a:solidFill>
-                <a:latin typeface="Source Serif 4"/>
-              </a:rPr>
-              <a:t>People who had just talked with someone new consistently underestimated how much the other person liked them. It showed up in first-year college roommates and lasted for months.</a:t>
-            </a:r>
-          </a:p>
-          <a:p>
-            <a:pPr algn="l">
-              <a:spcAft>
-                <a:spcPts val="585"/>
-              </a:spcAft>
-            </a:pPr>
-            <a:r>
-              <a:rPr sz="1050" b="0" i="0">
-                <a:solidFill>
-                  <a:srgbClr val="5D5A54"/>
-                </a:solidFill>
-                <a:latin typeface="Inter Tight"/>
-              </a:rPr>
-              <a:t>Boothby, Cooney, Sandstrom and Clark, Psychological Science, 2018</a:t>
-            </a:r>
-          </a:p>
-        </p:txBody>
-      </p:sp>
-      <p:sp>
-        <p:nvSpPr>
-          <p:cNvPr id="6" name="TextBox 5"/>
-          <p:cNvSpPr txBox="1"/>
-          <p:nvPr/>
-        </p:nvSpPr>
-        <p:spPr>
-          <a:xfrm>
-            <a:off x="6217920" y="1463040"/>
-            <a:ext cx="5394960" cy="4937760"/>
-          </a:xfrm>
-          <a:prstGeom prst="rect">
-            <a:avLst/>
-          </a:prstGeom>
-          <a:noFill/>
-        </p:spPr>
-        <p:txBody>
-          <a:bodyPr wrap="square" anchor="t" lIns="0" rIns="0" tIns="0" bIns="0">
-            <a:spAutoFit/>
-          </a:bodyPr>
-          <a:lstStyle/>
-          <a:p>
-            <a:pPr algn="l">
-              <a:spcAft>
-                <a:spcPts val="585"/>
-              </a:spcAft>
-            </a:pPr>
-            <a:r>
-              <a:rPr sz="1300" b="0" i="0">
-                <a:solidFill>
-                  <a:srgbClr val="1C1B19"/>
-                </a:solidFill>
-                <a:latin typeface="Source Serif 4"/>
-              </a:rPr>
-              <a:t>Commuters asked to talk to a stranger on a train or bus reported a more pleasant ride than those who sat alone, though people predicted the opposite. The mistake came from underestimating how interested others are in connecting.</a:t>
-            </a:r>
-          </a:p>
-          <a:p>
-            <a:pPr algn="l">
-              <a:spcAft>
-                <a:spcPts val="585"/>
-              </a:spcAft>
-            </a:pPr>
-            <a:r>
-              <a:rPr sz="1050" b="0" i="0">
-                <a:solidFill>
-                  <a:srgbClr val="5D5A54"/>
-                </a:solidFill>
-                <a:latin typeface="Inter Tight"/>
-              </a:rPr>
-              <a:t>Epley and Schroeder, Journal of Experimental Psychology: General, 2014</a:t>
-            </a:r>
-          </a:p>
-          <a:p>
-            <a:pPr algn="l">
-              <a:spcAft>
-                <a:spcPts val="585"/>
-              </a:spcAft>
-            </a:pPr>
-            <a:r>
-              <a:rPr sz="1300" b="0" i="0">
-                <a:solidFill>
-                  <a:srgbClr val="1C1B19"/>
-                </a:solidFill>
-                <a:latin typeface="Source Serif 4"/>
-              </a:rPr>
-              <a:t>First-year college students who read that belonging worries are common and fade went on to earn higher grades over three years if they were Black, cutting the racial achievement gap in half. It was a small study.</a:t>
-            </a:r>
-          </a:p>
-          <a:p>
-            <a:pPr algn="l">
-              <a:spcAft>
-                <a:spcPts val="585"/>
-              </a:spcAft>
-            </a:pPr>
-            <a:r>
-              <a:rPr sz="1050" b="0" i="0">
-                <a:solidFill>
-                  <a:srgbClr val="5D5A54"/>
-                </a:solidFill>
-                <a:latin typeface="Inter Tight"/>
-              </a:rPr>
-              <a:t>Walton and Cohen, Science, 2011</a:t>
-            </a:r>
-          </a:p>
-          <a:p>
-            <a:pPr algn="l">
-              <a:spcAft>
-                <a:spcPts val="585"/>
-              </a:spcAft>
-            </a:pPr>
-            <a:r>
-              <a:rPr sz="1300" b="0" i="0">
-                <a:solidFill>
-                  <a:srgbClr val="1C1B19"/>
-                </a:solidFill>
-                <a:latin typeface="Source Serif 4"/>
-              </a:rPr>
-              <a:t>Repeated with almost 27,000 students at 22 colleges, a version under 30 minutes helped more students finish their first year full time, especially in groups that had historically struggled more, but only at schools that offered real ways to belong.</a:t>
-            </a:r>
-          </a:p>
-          <a:p>
-            <a:pPr algn="l">
-              <a:spcAft>
-                <a:spcPts val="585"/>
-              </a:spcAft>
-            </a:pPr>
-            <a:r>
-              <a:rPr sz="1050" b="0" i="0">
-                <a:solidFill>
-                  <a:srgbClr val="5D5A54"/>
-                </a:solidFill>
-                <a:latin typeface="Inter Tight"/>
-              </a:rPr>
-              <a:t>Walton et al., Science, 2023</a:t>
-            </a:r>
-          </a:p>
-        </p:txBody>
-      </p:sp>
-    </p:spTree>
-  </p:cSld>
-  <p:clrMapOvr>
-    <a:masterClrMapping/>
-  </p:clrMapOvr>
-</p:sld>
-</file>
-
-<file path=ppt/slides/slide5.xml><?xml version="1.0" encoding="utf-8"?>
-<p:sld xmlns:a="http://schemas.openxmlformats.org/drawingml/2006/main" xmlns:p="http://schemas.openxmlformats.org/presentationml/2006/main" xmlns:r="http://schemas.openxmlformats.org/officeDocument/2006/relationships">
-  <p:cSld>
-    <p:bg>
-      <p:bgPr>
-        <a:solidFill>
-          <a:srgbClr val="0B2D5B"/>
-        </a:solidFill>
-        <a:effectLst/>
-      </p:bgPr>
-    </p:bg>
-    <p:spTree>
-      <p:nvGrpSpPr>
-        <p:cNvPr id="1" name=""/>
-        <p:cNvGrpSpPr/>
-        <p:nvPr/>
-      </p:nvGrpSpPr>
-      <p:grpSpPr/>
-      <p:sp>
-        <p:nvSpPr>
-          <p:cNvPr id="2" name="Rectangle 1"/>
-          <p:cNvSpPr/>
-          <p:nvPr/>
-        </p:nvSpPr>
-        <p:spPr>
-          <a:xfrm>
-            <a:off x="548640" y="502920"/>
-            <a:ext cx="457200" cy="54864"/>
-          </a:xfrm>
-          <a:prstGeom prst="rect">
-            <a:avLst/>
-          </a:prstGeom>
-          <a:solidFill>
-            <a:srgbClr val="F47B20"/>
-          </a:solidFill>
-          <a:ln>
-            <a:noFill/>
-          </a:ln>
-          <a:effectLst/>
-        </p:spPr>
-        <p:style>
-          <a:lnRef idx="1">
-            <a:schemeClr val="accent1"/>
-          </a:lnRef>
-          <a:fillRef idx="3">
-            <a:schemeClr val="accent1"/>
-          </a:fillRef>
-          <a:effectRef idx="2">
-            <a:schemeClr val="accent1"/>
-          </a:effectRef>
-          <a:fontRef idx="minor">
-            <a:schemeClr val="lt1"/>
-          </a:fontRef>
-        </p:style>
-        <p:txBody>
-          <a:bodyPr rtlCol="0" anchor="ctr"/>
-          <a:lstStyle/>
-          <a:p>
-            <a:pPr algn="ctr"/>
-          </a:p>
-        </p:txBody>
-      </p:sp>
-      <p:sp>
-        <p:nvSpPr>
-          <p:cNvPr id="3" name="TextBox 2"/>
-          <p:cNvSpPr txBox="1"/>
-          <p:nvPr/>
-        </p:nvSpPr>
-        <p:spPr>
-          <a:xfrm>
-            <a:off x="1143000" y="393192"/>
-            <a:ext cx="8229600" cy="274320"/>
-          </a:xfrm>
-          <a:prstGeom prst="rect">
-            <a:avLst/>
-          </a:prstGeom>
-          <a:noFill/>
-        </p:spPr>
-        <p:txBody>
-          <a:bodyPr wrap="square" anchor="t" lIns="0" rIns="0" tIns="0" bIns="0">
-            <a:spAutoFit/>
-          </a:bodyPr>
-          <a:lstStyle/>
-          <a:p>
-            <a:pPr algn="l">
-              <a:spcAft>
-                <a:spcPts val="540"/>
-              </a:spcAft>
-            </a:pPr>
-            <a:r>
-              <a:rPr sz="1200" b="1" i="0">
-                <a:solidFill>
-                  <a:srgbClr val="5D5A54"/>
-                </a:solidFill>
-                <a:latin typeface="Inter Tight"/>
-              </a:rPr>
-              <a:t>NEW SCHOOL, WHO DIS</a:t>
-            </a:r>
-          </a:p>
-        </p:txBody>
-      </p:sp>
-      <p:sp>
-        <p:nvSpPr>
-          <p:cNvPr id="4" name="TextBox 3"/>
-          <p:cNvSpPr txBox="1"/>
-          <p:nvPr/>
-        </p:nvSpPr>
-        <p:spPr>
-          <a:xfrm>
-            <a:off x="8229600" y="6400800"/>
-            <a:ext cx="3410712" cy="274320"/>
-          </a:xfrm>
-          <a:prstGeom prst="rect">
-            <a:avLst/>
-          </a:prstGeom>
-          <a:noFill/>
-        </p:spPr>
-        <p:txBody>
-          <a:bodyPr wrap="square" anchor="t" lIns="0" rIns="0" tIns="0" bIns="0">
-            <a:spAutoFit/>
-          </a:bodyPr>
-          <a:lstStyle/>
-          <a:p>
-            <a:pPr algn="r">
-              <a:spcAft>
-                <a:spcPts val="450"/>
-              </a:spcAft>
-            </a:pPr>
-            <a:r>
-              <a:rPr sz="1000" b="0" i="0">
-                <a:solidFill>
-                  <a:srgbClr val="5D5A54"/>
-                </a:solidFill>
-                <a:latin typeface="Inter Tight"/>
-              </a:rPr>
-              <a:t>Beaver Counseling</a:t>
-            </a:r>
-          </a:p>
-        </p:txBody>
-      </p:sp>
-      <p:sp>
-        <p:nvSpPr>
-          <p:cNvPr id="5" name="TextBox 4"/>
-          <p:cNvSpPr txBox="1"/>
-          <p:nvPr/>
-        </p:nvSpPr>
-        <p:spPr>
-          <a:xfrm>
-            <a:off x="822960" y="2011680"/>
-            <a:ext cx="10515600" cy="1463040"/>
-          </a:xfrm>
-          <a:prstGeom prst="rect">
-            <a:avLst/>
-          </a:prstGeom>
-          <a:noFill/>
-        </p:spPr>
-        <p:txBody>
-          <a:bodyPr wrap="square" anchor="b" lIns="0" rIns="0" tIns="0" bIns="0">
-            <a:spAutoFit/>
-          </a:bodyPr>
-          <a:lstStyle/>
-          <a:p>
-            <a:pPr algn="l">
-              <a:spcAft>
-                <a:spcPts val="2700"/>
-              </a:spcAft>
-            </a:pPr>
-            <a:r>
-              <a:rPr sz="6000" b="1" i="0">
-                <a:solidFill>
-                  <a:srgbClr val="FFFFFF"/>
-                </a:solidFill>
-                <a:latin typeface="Source Serif 4"/>
-              </a:rPr>
-              <a:t>New School, Who Dis</a:t>
-            </a:r>
-          </a:p>
-        </p:txBody>
-      </p:sp>
-      <p:sp>
-        <p:nvSpPr>
-          <p:cNvPr id="6" name="TextBox 5"/>
-          <p:cNvSpPr txBox="1"/>
-          <p:nvPr/>
-        </p:nvSpPr>
-        <p:spPr>
-          <a:xfrm>
-            <a:off x="822960" y="3611880"/>
-            <a:ext cx="10515600" cy="914400"/>
-          </a:xfrm>
-          <a:prstGeom prst="rect">
-            <a:avLst/>
-          </a:prstGeom>
-          <a:noFill/>
-        </p:spPr>
-        <p:txBody>
-          <a:bodyPr wrap="square" anchor="t" lIns="0" rIns="0" tIns="0" bIns="0">
-            <a:spAutoFit/>
-          </a:bodyPr>
-          <a:lstStyle/>
-          <a:p>
-            <a:pPr algn="l">
-              <a:spcAft>
-                <a:spcPts val="1080"/>
-              </a:spcAft>
-            </a:pPr>
-            <a:r>
-              <a:rPr sz="2400" b="0" i="1">
-                <a:solidFill>
-                  <a:srgbClr val="E8E4DA"/>
-                </a:solidFill>
-                <a:latin typeface="Source Serif 4"/>
-              </a:rPr>
-              <a:t>You know where to go now. You don't know who to sit with.</a:t>
-            </a:r>
-          </a:p>
-        </p:txBody>
-      </p:sp>
-      <p:sp>
-        <p:nvSpPr>
-          <p:cNvPr id="7" name="TextBox 6"/>
-          <p:cNvSpPr txBox="1"/>
-          <p:nvPr/>
-        </p:nvSpPr>
-        <p:spPr>
-          <a:xfrm>
-            <a:off x="822960" y="6035040"/>
-            <a:ext cx="7315200" cy="365760"/>
-          </a:xfrm>
-          <a:prstGeom prst="rect">
-            <a:avLst/>
-          </a:prstGeom>
-          <a:noFill/>
-        </p:spPr>
-        <p:txBody>
-          <a:bodyPr wrap="square" anchor="t" lIns="0" rIns="0" tIns="0" bIns="0">
-            <a:spAutoFit/>
-          </a:bodyPr>
-          <a:lstStyle/>
-          <a:p>
-            <a:pPr algn="l">
-              <a:spcAft>
-                <a:spcPts val="585"/>
-              </a:spcAft>
-            </a:pPr>
-            <a:r>
-              <a:rPr sz="1300" b="0" i="0">
-                <a:solidFill>
-                  <a:srgbClr val="E8E4DA"/>
-                </a:solidFill>
-                <a:latin typeface="Inter Tight"/>
-              </a:rPr>
-              <a:t>Beaver Upper School · Counseling</a:t>
+              <a:t>With a partner: what's an easy way to say hi again tomorrow?</a:t>
             </a:r>
           </a:p>
         </p:txBody>
@@ -7216,7 +6875,7 @@
                 </a:solidFill>
                 <a:latin typeface="Inter Tight"/>
               </a:rPr>
-              <a:t>THE GUESS</a:t>
+              <a:t>SPEED UP THE MATH</a:t>
             </a:r>
           </a:p>
         </p:txBody>
@@ -7262,58 +6921,14 @@
       </p:sp>
       <p:sp>
         <p:nvSpPr>
-          <p:cNvPr id="5" name="Rectangle 4"/>
-          <p:cNvSpPr/>
-          <p:nvPr/>
-        </p:nvSpPr>
-        <p:spPr>
-          <a:xfrm>
-            <a:off x="822960" y="1371600"/>
-            <a:ext cx="73152" cy="3566160"/>
-          </a:xfrm>
-          <a:prstGeom prst="rect">
-            <a:avLst/>
-          </a:prstGeom>
-          <a:solidFill>
-            <a:srgbClr val="F47B20"/>
-          </a:solidFill>
-          <a:ln>
-            <a:noFill/>
-          </a:ln>
-          <a:effectLst/>
-        </p:spPr>
-        <p:style>
-          <a:lnRef idx="1">
-            <a:schemeClr val="accent1"/>
-          </a:lnRef>
-          <a:fillRef idx="3">
-            <a:schemeClr val="accent1"/>
-          </a:fillRef>
-          <a:effectRef idx="2">
-            <a:schemeClr val="accent1"/>
-          </a:effectRef>
-          <a:fontRef idx="minor">
-            <a:schemeClr val="lt1"/>
-          </a:fontRef>
-        </p:style>
-        <p:txBody>
-          <a:bodyPr rtlCol="0" anchor="ctr"/>
-          <a:lstStyle/>
-          <a:p>
-            <a:pPr algn="ctr"/>
-          </a:p>
-        </p:txBody>
-      </p:sp>
-      <p:sp>
-        <p:nvSpPr>
-          <p:cNvPr id="6" name="TextBox 5"/>
+          <p:cNvPr id="5" name="TextBox 4"/>
           <p:cNvSpPr txBox="1"/>
           <p:nvPr/>
         </p:nvSpPr>
         <p:spPr>
           <a:xfrm>
-            <a:off x="1188720" y="1371600"/>
-            <a:ext cx="10058400" cy="3566160"/>
+            <a:off x="822960" y="1005840"/>
+            <a:ext cx="10515600" cy="1097280"/>
           </a:xfrm>
           <a:prstGeom prst="rect">
             <a:avLst/>
@@ -7321,38 +6936,38 @@
           <a:noFill/>
         </p:spPr>
         <p:txBody>
-          <a:bodyPr wrap="square" anchor="ctr" lIns="0" rIns="0" tIns="0" bIns="0">
+          <a:bodyPr wrap="square" anchor="t" lIns="0" rIns="0" tIns="0" bIns="0">
             <a:spAutoFit/>
           </a:bodyPr>
           <a:lstStyle/>
           <a:p>
             <a:pPr algn="l">
               <a:spcAft>
-                <a:spcPts val="1800"/>
-              </a:spcAft>
-            </a:pPr>
-            <a:r>
-              <a:rPr sz="4000" b="0" i="1">
+                <a:spcPts val="1620"/>
+              </a:spcAft>
+            </a:pPr>
+            <a:r>
+              <a:rPr sz="3600" b="1" i="0">
                 <a:solidFill>
                   <a:srgbClr val="1C1B19"/>
                 </a:solidFill>
                 <a:latin typeface="Source Serif 4"/>
               </a:rPr>
-              <a:t>How many people in this room have felt like everyone else already had a group?</a:t>
-            </a:r>
-          </a:p>
-        </p:txBody>
-      </p:sp>
-      <p:sp>
-        <p:nvSpPr>
-          <p:cNvPr id="7" name="TextBox 6"/>
+              <a:t>More hours, better hours</a:t>
+            </a:r>
+          </a:p>
+        </p:txBody>
+      </p:sp>
+      <p:sp>
+        <p:nvSpPr>
+          <p:cNvPr id="6" name="TextBox 5"/>
           <p:cNvSpPr txBox="1"/>
           <p:nvPr/>
         </p:nvSpPr>
         <p:spPr>
           <a:xfrm>
-            <a:off x="1188720" y="5120640"/>
-            <a:ext cx="10058400" cy="914400"/>
+            <a:off x="822960" y="2057400"/>
+            <a:ext cx="548640" cy="804672"/>
           </a:xfrm>
           <a:prstGeom prst="rect">
             <a:avLst/>
@@ -7367,17 +6982,448 @@
           <a:p>
             <a:pPr algn="l">
               <a:spcAft>
-                <a:spcPts val="810"/>
-              </a:spcAft>
-            </a:pPr>
-            <a:r>
-              <a:rPr sz="1800" b="0" i="0">
+                <a:spcPts val="1170"/>
+              </a:spcAft>
+            </a:pPr>
+            <a:r>
+              <a:rPr sz="2600" b="1" i="0">
+                <a:solidFill>
+                  <a:srgbClr val="F47B20"/>
+                </a:solidFill>
+                <a:latin typeface="Source Serif 4"/>
+              </a:rPr>
+              <a:t>1</a:t>
+            </a:r>
+          </a:p>
+        </p:txBody>
+      </p:sp>
+      <p:sp>
+        <p:nvSpPr>
+          <p:cNvPr id="7" name="TextBox 6"/>
+          <p:cNvSpPr txBox="1"/>
+          <p:nvPr/>
+        </p:nvSpPr>
+        <p:spPr>
+          <a:xfrm>
+            <a:off x="1463040" y="2093976"/>
+            <a:ext cx="9875520" cy="804672"/>
+          </a:xfrm>
+          <a:prstGeom prst="rect">
+            <a:avLst/>
+          </a:prstGeom>
+          <a:noFill/>
+        </p:spPr>
+        <p:txBody>
+          <a:bodyPr wrap="square" anchor="t" lIns="0" rIns="0" tIns="0" bIns="0">
+            <a:spAutoFit/>
+          </a:bodyPr>
+          <a:lstStyle/>
+          <a:p>
+            <a:pPr algn="l">
+              <a:spcAft>
+                <a:spcPts val="945"/>
+              </a:spcAft>
+            </a:pPr>
+            <a:r>
+              <a:rPr sz="2100" b="1" i="0">
+                <a:solidFill>
+                  <a:srgbClr val="1C1B19"/>
+                </a:solidFill>
+                <a:latin typeface="Source Serif 4"/>
+              </a:rPr>
+              <a:t>Join something weekly.</a:t>
+            </a:r>
+          </a:p>
+          <a:p>
+            <a:pPr algn="l">
+              <a:spcAft>
+                <a:spcPts val="945"/>
+              </a:spcAft>
+            </a:pPr>
+            <a:r>
+              <a:rPr sz="1600" b="0" i="0">
                 <a:solidFill>
                   <a:srgbClr val="5D5A54"/>
                 </a:solidFill>
-                <a:latin typeface="Inter Tight"/>
-              </a:rPr>
-              <a:t>Write a guess. Then on the same card, yes or no for you. Fold it. No names.</a:t>
+                <a:latin typeface="Source Serif 4"/>
+              </a:rPr>
+              <a:t>A team, club, show, job, or faith group.</a:t>
+            </a:r>
+          </a:p>
+        </p:txBody>
+      </p:sp>
+      <p:sp>
+        <p:nvSpPr>
+          <p:cNvPr id="8" name="TextBox 7"/>
+          <p:cNvSpPr txBox="1"/>
+          <p:nvPr/>
+        </p:nvSpPr>
+        <p:spPr>
+          <a:xfrm>
+            <a:off x="822960" y="2862072"/>
+            <a:ext cx="548640" cy="804672"/>
+          </a:xfrm>
+          <a:prstGeom prst="rect">
+            <a:avLst/>
+          </a:prstGeom>
+          <a:noFill/>
+        </p:spPr>
+        <p:txBody>
+          <a:bodyPr wrap="square" anchor="t" lIns="0" rIns="0" tIns="0" bIns="0">
+            <a:spAutoFit/>
+          </a:bodyPr>
+          <a:lstStyle/>
+          <a:p>
+            <a:pPr algn="l">
+              <a:spcAft>
+                <a:spcPts val="1170"/>
+              </a:spcAft>
+            </a:pPr>
+            <a:r>
+              <a:rPr sz="2600" b="1" i="0">
+                <a:solidFill>
+                  <a:srgbClr val="F47B20"/>
+                </a:solidFill>
+                <a:latin typeface="Source Serif 4"/>
+              </a:rPr>
+              <a:t>2</a:t>
+            </a:r>
+          </a:p>
+        </p:txBody>
+      </p:sp>
+      <p:sp>
+        <p:nvSpPr>
+          <p:cNvPr id="9" name="TextBox 8"/>
+          <p:cNvSpPr txBox="1"/>
+          <p:nvPr/>
+        </p:nvSpPr>
+        <p:spPr>
+          <a:xfrm>
+            <a:off x="1463040" y="2898648"/>
+            <a:ext cx="9875520" cy="804672"/>
+          </a:xfrm>
+          <a:prstGeom prst="rect">
+            <a:avLst/>
+          </a:prstGeom>
+          <a:noFill/>
+        </p:spPr>
+        <p:txBody>
+          <a:bodyPr wrap="square" anchor="t" lIns="0" rIns="0" tIns="0" bIns="0">
+            <a:spAutoFit/>
+          </a:bodyPr>
+          <a:lstStyle/>
+          <a:p>
+            <a:pPr algn="l">
+              <a:spcAft>
+                <a:spcPts val="945"/>
+              </a:spcAft>
+            </a:pPr>
+            <a:r>
+              <a:rPr sz="2100" b="1" i="0">
+                <a:solidFill>
+                  <a:srgbClr val="1C1B19"/>
+                </a:solidFill>
+                <a:latin typeface="Source Serif 4"/>
+              </a:rPr>
+              <a:t>Same lunch table, three days running.</a:t>
+            </a:r>
+          </a:p>
+          <a:p>
+            <a:pPr algn="l">
+              <a:spcAft>
+                <a:spcPts val="945"/>
+              </a:spcAft>
+            </a:pPr>
+            <a:r>
+              <a:rPr sz="1600" b="0" i="0">
+                <a:solidFill>
+                  <a:srgbClr val="5D5A54"/>
+                </a:solidFill>
+                <a:latin typeface="Source Serif 4"/>
+              </a:rPr>
+              <a:t>By day three it feels less like a test.</a:t>
+            </a:r>
+          </a:p>
+        </p:txBody>
+      </p:sp>
+      <p:sp>
+        <p:nvSpPr>
+          <p:cNvPr id="10" name="TextBox 9"/>
+          <p:cNvSpPr txBox="1"/>
+          <p:nvPr/>
+        </p:nvSpPr>
+        <p:spPr>
+          <a:xfrm>
+            <a:off x="822960" y="3666744"/>
+            <a:ext cx="548640" cy="804672"/>
+          </a:xfrm>
+          <a:prstGeom prst="rect">
+            <a:avLst/>
+          </a:prstGeom>
+          <a:noFill/>
+        </p:spPr>
+        <p:txBody>
+          <a:bodyPr wrap="square" anchor="t" lIns="0" rIns="0" tIns="0" bIns="0">
+            <a:spAutoFit/>
+          </a:bodyPr>
+          <a:lstStyle/>
+          <a:p>
+            <a:pPr algn="l">
+              <a:spcAft>
+                <a:spcPts val="1170"/>
+              </a:spcAft>
+            </a:pPr>
+            <a:r>
+              <a:rPr sz="2600" b="1" i="0">
+                <a:solidFill>
+                  <a:srgbClr val="F47B20"/>
+                </a:solidFill>
+                <a:latin typeface="Source Serif 4"/>
+              </a:rPr>
+              <a:t>3</a:t>
+            </a:r>
+          </a:p>
+        </p:txBody>
+      </p:sp>
+      <p:sp>
+        <p:nvSpPr>
+          <p:cNvPr id="11" name="TextBox 10"/>
+          <p:cNvSpPr txBox="1"/>
+          <p:nvPr/>
+        </p:nvSpPr>
+        <p:spPr>
+          <a:xfrm>
+            <a:off x="1463040" y="3703320"/>
+            <a:ext cx="9875520" cy="804672"/>
+          </a:xfrm>
+          <a:prstGeom prst="rect">
+            <a:avLst/>
+          </a:prstGeom>
+          <a:noFill/>
+        </p:spPr>
+        <p:txBody>
+          <a:bodyPr wrap="square" anchor="t" lIns="0" rIns="0" tIns="0" bIns="0">
+            <a:spAutoFit/>
+          </a:bodyPr>
+          <a:lstStyle/>
+          <a:p>
+            <a:pPr algn="l">
+              <a:spcAft>
+                <a:spcPts val="945"/>
+              </a:spcAft>
+            </a:pPr>
+            <a:r>
+              <a:rPr sz="2100" b="1" i="0">
+                <a:solidFill>
+                  <a:srgbClr val="1C1B19"/>
+                </a:solidFill>
+                <a:latin typeface="Source Serif 4"/>
+              </a:rPr>
+              <a:t>Turn class into a plan.</a:t>
+            </a:r>
+          </a:p>
+          <a:p>
+            <a:pPr algn="l">
+              <a:spcAft>
+                <a:spcPts val="945"/>
+              </a:spcAft>
+            </a:pPr>
+            <a:r>
+              <a:rPr sz="1600" b="0" i="0">
+                <a:solidFill>
+                  <a:srgbClr val="5D5A54"/>
+                </a:solidFill>
+                <a:latin typeface="Source Serif 4"/>
+              </a:rPr>
+              <a:t>"Library Thursday to study for chem?"</a:t>
+            </a:r>
+          </a:p>
+        </p:txBody>
+      </p:sp>
+      <p:sp>
+        <p:nvSpPr>
+          <p:cNvPr id="12" name="TextBox 11"/>
+          <p:cNvSpPr txBox="1"/>
+          <p:nvPr/>
+        </p:nvSpPr>
+        <p:spPr>
+          <a:xfrm>
+            <a:off x="822960" y="4471416"/>
+            <a:ext cx="548640" cy="804672"/>
+          </a:xfrm>
+          <a:prstGeom prst="rect">
+            <a:avLst/>
+          </a:prstGeom>
+          <a:noFill/>
+        </p:spPr>
+        <p:txBody>
+          <a:bodyPr wrap="square" anchor="t" lIns="0" rIns="0" tIns="0" bIns="0">
+            <a:spAutoFit/>
+          </a:bodyPr>
+          <a:lstStyle/>
+          <a:p>
+            <a:pPr algn="l">
+              <a:spcAft>
+                <a:spcPts val="1170"/>
+              </a:spcAft>
+            </a:pPr>
+            <a:r>
+              <a:rPr sz="2600" b="1" i="0">
+                <a:solidFill>
+                  <a:srgbClr val="F47B20"/>
+                </a:solidFill>
+                <a:latin typeface="Source Serif 4"/>
+              </a:rPr>
+              <a:t>4</a:t>
+            </a:r>
+          </a:p>
+        </p:txBody>
+      </p:sp>
+      <p:sp>
+        <p:nvSpPr>
+          <p:cNvPr id="13" name="TextBox 12"/>
+          <p:cNvSpPr txBox="1"/>
+          <p:nvPr/>
+        </p:nvSpPr>
+        <p:spPr>
+          <a:xfrm>
+            <a:off x="1463040" y="4507992"/>
+            <a:ext cx="9875520" cy="804672"/>
+          </a:xfrm>
+          <a:prstGeom prst="rect">
+            <a:avLst/>
+          </a:prstGeom>
+          <a:noFill/>
+        </p:spPr>
+        <p:txBody>
+          <a:bodyPr wrap="square" anchor="t" lIns="0" rIns="0" tIns="0" bIns="0">
+            <a:spAutoFit/>
+          </a:bodyPr>
+          <a:lstStyle/>
+          <a:p>
+            <a:pPr algn="l">
+              <a:spcAft>
+                <a:spcPts val="945"/>
+              </a:spcAft>
+            </a:pPr>
+            <a:r>
+              <a:rPr sz="2100" b="1" i="0">
+                <a:solidFill>
+                  <a:srgbClr val="1C1B19"/>
+                </a:solidFill>
+                <a:latin typeface="Source Serif 4"/>
+              </a:rPr>
+              <a:t>Ask one real follow-up.</a:t>
+            </a:r>
+          </a:p>
+          <a:p>
+            <a:pPr algn="l">
+              <a:spcAft>
+                <a:spcPts val="945"/>
+              </a:spcAft>
+            </a:pPr>
+            <a:r>
+              <a:rPr sz="1600" b="0" i="0">
+                <a:solidFill>
+                  <a:srgbClr val="5D5A54"/>
+                </a:solidFill>
+                <a:latin typeface="Source Serif 4"/>
+              </a:rPr>
+              <a:t>Past "what lunch do you have."</a:t>
+            </a:r>
+          </a:p>
+        </p:txBody>
+      </p:sp>
+      <p:sp>
+        <p:nvSpPr>
+          <p:cNvPr id="14" name="TextBox 13"/>
+          <p:cNvSpPr txBox="1"/>
+          <p:nvPr/>
+        </p:nvSpPr>
+        <p:spPr>
+          <a:xfrm>
+            <a:off x="822960" y="5276088"/>
+            <a:ext cx="548640" cy="804672"/>
+          </a:xfrm>
+          <a:prstGeom prst="rect">
+            <a:avLst/>
+          </a:prstGeom>
+          <a:noFill/>
+        </p:spPr>
+        <p:txBody>
+          <a:bodyPr wrap="square" anchor="t" lIns="0" rIns="0" tIns="0" bIns="0">
+            <a:spAutoFit/>
+          </a:bodyPr>
+          <a:lstStyle/>
+          <a:p>
+            <a:pPr algn="l">
+              <a:spcAft>
+                <a:spcPts val="1170"/>
+              </a:spcAft>
+            </a:pPr>
+            <a:r>
+              <a:rPr sz="2600" b="1" i="0">
+                <a:solidFill>
+                  <a:srgbClr val="F47B20"/>
+                </a:solidFill>
+                <a:latin typeface="Source Serif 4"/>
+              </a:rPr>
+              <a:t>5</a:t>
+            </a:r>
+          </a:p>
+        </p:txBody>
+      </p:sp>
+      <p:sp>
+        <p:nvSpPr>
+          <p:cNvPr id="15" name="TextBox 14"/>
+          <p:cNvSpPr txBox="1"/>
+          <p:nvPr/>
+        </p:nvSpPr>
+        <p:spPr>
+          <a:xfrm>
+            <a:off x="1463040" y="5312664"/>
+            <a:ext cx="9875520" cy="804672"/>
+          </a:xfrm>
+          <a:prstGeom prst="rect">
+            <a:avLst/>
+          </a:prstGeom>
+          <a:noFill/>
+        </p:spPr>
+        <p:txBody>
+          <a:bodyPr wrap="square" anchor="t" lIns="0" rIns="0" tIns="0" bIns="0">
+            <a:spAutoFit/>
+          </a:bodyPr>
+          <a:lstStyle/>
+          <a:p>
+            <a:pPr algn="l">
+              <a:spcAft>
+                <a:spcPts val="945"/>
+              </a:spcAft>
+            </a:pPr>
+            <a:r>
+              <a:rPr sz="2100" b="1" i="0">
+                <a:solidFill>
+                  <a:srgbClr val="1C1B19"/>
+                </a:solidFill>
+                <a:latin typeface="Source Serif 4"/>
+              </a:rPr>
+              <a:t>Find one adult.</a:t>
+            </a:r>
+          </a:p>
+          <a:p>
+            <a:pPr algn="l">
+              <a:spcAft>
+                <a:spcPts val="945"/>
+              </a:spcAft>
+            </a:pPr>
+            <a:r>
+              <a:rPr sz="1600" b="0" i="0">
+                <a:solidFill>
+                  <a:srgbClr val="5D5A54"/>
+                </a:solidFill>
+                <a:latin typeface="Source Serif 4"/>
+              </a:rPr>
+              <a:t>An advisor, coach, teacher, or counselor.</a:t>
             </a:r>
           </a:p>
         </p:txBody>
@@ -7486,7 +7532,7 @@
                 </a:solidFill>
                 <a:latin typeface="Inter Tight"/>
               </a:rPr>
-              <a:t>FRIENDSHIP RUNS ON HOURS</a:t>
+              <a:t>THREE MOMENTS</a:t>
             </a:r>
           </a:p>
         </p:txBody>
@@ -7538,8 +7584,8 @@
         </p:nvSpPr>
         <p:spPr>
           <a:xfrm>
-            <a:off x="822960" y="1463040"/>
-            <a:ext cx="10515600" cy="3291840"/>
+            <a:off x="822960" y="1005840"/>
+            <a:ext cx="10515600" cy="914400"/>
           </a:xfrm>
           <a:prstGeom prst="rect">
             <a:avLst/>
@@ -7547,38 +7593,84 @@
           <a:noFill/>
         </p:spPr>
         <p:txBody>
-          <a:bodyPr wrap="square" anchor="ctr" lIns="0" rIns="0" tIns="0" bIns="0">
+          <a:bodyPr wrap="square" anchor="t" lIns="0" rIns="0" tIns="0" bIns="0">
             <a:spAutoFit/>
           </a:bodyPr>
           <a:lstStyle/>
           <a:p>
             <a:pPr algn="l">
               <a:spcAft>
-                <a:spcPts val="2070"/>
-              </a:spcAft>
-            </a:pPr>
-            <a:r>
-              <a:rPr sz="4600" b="1" i="0">
+                <a:spcPts val="1530"/>
+              </a:spcAft>
+            </a:pPr>
+            <a:r>
+              <a:rPr sz="3400" b="1" i="0">
                 <a:solidFill>
                   <a:srgbClr val="1C1B19"/>
                 </a:solidFill>
                 <a:latin typeface="Source Serif 4"/>
               </a:rPr>
-              <a:t>50 hours to a casual friend. 200+ to a close one.</a:t>
-            </a:r>
-          </a:p>
-        </p:txBody>
-      </p:sp>
-      <p:sp>
-        <p:nvSpPr>
-          <p:cNvPr id="6" name="TextBox 5"/>
+              <a:t>What would you try?</a:t>
+            </a:r>
+          </a:p>
+        </p:txBody>
+      </p:sp>
+      <p:sp>
+        <p:nvSpPr>
+          <p:cNvPr id="6" name="Rectangle 5"/>
+          <p:cNvSpPr/>
+          <p:nvPr/>
+        </p:nvSpPr>
+        <p:spPr>
+          <a:xfrm>
+            <a:off x="822960" y="2103120"/>
+            <a:ext cx="3322320" cy="3840480"/>
+          </a:xfrm>
+          <a:prstGeom prst="rect">
+            <a:avLst/>
+          </a:prstGeom>
+          <a:solidFill>
+            <a:srgbClr val="FFFFFF"/>
+          </a:solidFill>
+          <a:ln w="15875">
+            <a:solidFill>
+              <a:srgbClr val="D8D2C6"/>
+            </a:solidFill>
+          </a:ln>
+          <a:effectLst/>
+        </p:spPr>
+        <p:style>
+          <a:lnRef idx="1">
+            <a:schemeClr val="accent1"/>
+          </a:lnRef>
+          <a:fillRef idx="3">
+            <a:schemeClr val="accent1"/>
+          </a:fillRef>
+          <a:effectRef idx="2">
+            <a:schemeClr val="accent1"/>
+          </a:effectRef>
+          <a:fontRef idx="minor">
+            <a:schemeClr val="lt1"/>
+          </a:fontRef>
+        </p:style>
+        <p:txBody>
+          <a:bodyPr rtlCol="0" anchor="ctr"/>
+          <a:lstStyle/>
+          <a:p>
+            <a:pPr algn="ctr"/>
+          </a:p>
+        </p:txBody>
+      </p:sp>
+      <p:sp>
+        <p:nvSpPr>
+          <p:cNvPr id="7" name="TextBox 6"/>
           <p:cNvSpPr txBox="1"/>
           <p:nvPr/>
         </p:nvSpPr>
         <p:spPr>
           <a:xfrm>
-            <a:off x="822960" y="4846320"/>
-            <a:ext cx="10515600" cy="1097280"/>
+            <a:off x="1051560" y="2286000"/>
+            <a:ext cx="2865120" cy="365760"/>
           </a:xfrm>
           <a:prstGeom prst="rect">
             <a:avLst/>
@@ -7593,17 +7685,304 @@
           <a:p>
             <a:pPr algn="l">
               <a:spcAft>
-                <a:spcPts val="990"/>
-              </a:spcAft>
-            </a:pPr>
-            <a:r>
-              <a:rPr sz="2200" b="0" i="1">
-                <a:solidFill>
-                  <a:srgbClr val="5D5A54"/>
+                <a:spcPts val="585"/>
+              </a:spcAft>
+            </a:pPr>
+            <a:r>
+              <a:rPr sz="1300" b="1" i="0">
+                <a:solidFill>
+                  <a:srgbClr val="0B2D5B"/>
+                </a:solidFill>
+                <a:latin typeface="Inter Tight"/>
+              </a:rPr>
+              <a:t>THREE WEEKS IN</a:t>
+            </a:r>
+          </a:p>
+        </p:txBody>
+      </p:sp>
+      <p:sp>
+        <p:nvSpPr>
+          <p:cNvPr id="8" name="TextBox 7"/>
+          <p:cNvSpPr txBox="1"/>
+          <p:nvPr/>
+        </p:nvSpPr>
+        <p:spPr>
+          <a:xfrm>
+            <a:off x="1051560" y="2743200"/>
+            <a:ext cx="2865120" cy="3017520"/>
+          </a:xfrm>
+          <a:prstGeom prst="rect">
+            <a:avLst/>
+          </a:prstGeom>
+          <a:noFill/>
+        </p:spPr>
+        <p:txBody>
+          <a:bodyPr wrap="square" anchor="t" lIns="0" rIns="0" tIns="0" bIns="0">
+            <a:spAutoFit/>
+          </a:bodyPr>
+          <a:lstStyle/>
+          <a:p>
+            <a:pPr algn="l">
+              <a:spcAft>
+                <a:spcPts val="810"/>
+              </a:spcAft>
+            </a:pPr>
+            <a:r>
+              <a:rPr sz="1800" b="0" i="0">
+                <a:solidFill>
+                  <a:srgbClr val="1C1B19"/>
                 </a:solidFill>
                 <a:latin typeface="Source Serif 4"/>
               </a:rPr>
-              <a:t>Hanging out and real conversation count a lot. Sitting near someone in class counts less.</a:t>
+              <a:t>Jordan transferred in as a junior. Lab partner Priya is great to talk to in class. They've never hung out outside it.</a:t>
+            </a:r>
+          </a:p>
+        </p:txBody>
+      </p:sp>
+      <p:sp>
+        <p:nvSpPr>
+          <p:cNvPr id="9" name="Rectangle 8"/>
+          <p:cNvSpPr/>
+          <p:nvPr/>
+        </p:nvSpPr>
+        <p:spPr>
+          <a:xfrm>
+            <a:off x="4419600" y="2103120"/>
+            <a:ext cx="3322320" cy="3840480"/>
+          </a:xfrm>
+          <a:prstGeom prst="rect">
+            <a:avLst/>
+          </a:prstGeom>
+          <a:solidFill>
+            <a:srgbClr val="FFFFFF"/>
+          </a:solidFill>
+          <a:ln w="15875">
+            <a:solidFill>
+              <a:srgbClr val="D8D2C6"/>
+            </a:solidFill>
+          </a:ln>
+          <a:effectLst/>
+        </p:spPr>
+        <p:style>
+          <a:lnRef idx="1">
+            <a:schemeClr val="accent1"/>
+          </a:lnRef>
+          <a:fillRef idx="3">
+            <a:schemeClr val="accent1"/>
+          </a:fillRef>
+          <a:effectRef idx="2">
+            <a:schemeClr val="accent1"/>
+          </a:effectRef>
+          <a:fontRef idx="minor">
+            <a:schemeClr val="lt1"/>
+          </a:fontRef>
+        </p:style>
+        <p:txBody>
+          <a:bodyPr rtlCol="0" anchor="ctr"/>
+          <a:lstStyle/>
+          <a:p>
+            <a:pPr algn="ctr"/>
+          </a:p>
+        </p:txBody>
+      </p:sp>
+      <p:sp>
+        <p:nvSpPr>
+          <p:cNvPr id="10" name="TextBox 9"/>
+          <p:cNvSpPr txBox="1"/>
+          <p:nvPr/>
+        </p:nvSpPr>
+        <p:spPr>
+          <a:xfrm>
+            <a:off x="4648200" y="2286000"/>
+            <a:ext cx="2865120" cy="365760"/>
+          </a:xfrm>
+          <a:prstGeom prst="rect">
+            <a:avLst/>
+          </a:prstGeom>
+          <a:noFill/>
+        </p:spPr>
+        <p:txBody>
+          <a:bodyPr wrap="square" anchor="t" lIns="0" rIns="0" tIns="0" bIns="0">
+            <a:spAutoFit/>
+          </a:bodyPr>
+          <a:lstStyle/>
+          <a:p>
+            <a:pPr algn="l">
+              <a:spcAft>
+                <a:spcPts val="585"/>
+              </a:spcAft>
+            </a:pPr>
+            <a:r>
+              <a:rPr sz="1300" b="1" i="0">
+                <a:solidFill>
+                  <a:srgbClr val="0B2D5B"/>
+                </a:solidFill>
+                <a:latin typeface="Inter Tight"/>
+              </a:rPr>
+              <a:t>FRIDAY NIGHT</a:t>
+            </a:r>
+          </a:p>
+        </p:txBody>
+      </p:sp>
+      <p:sp>
+        <p:nvSpPr>
+          <p:cNvPr id="11" name="TextBox 10"/>
+          <p:cNvSpPr txBox="1"/>
+          <p:nvPr/>
+        </p:nvSpPr>
+        <p:spPr>
+          <a:xfrm>
+            <a:off x="4648200" y="2743200"/>
+            <a:ext cx="2865120" cy="3017520"/>
+          </a:xfrm>
+          <a:prstGeom prst="rect">
+            <a:avLst/>
+          </a:prstGeom>
+          <a:noFill/>
+        </p:spPr>
+        <p:txBody>
+          <a:bodyPr wrap="square" anchor="t" lIns="0" rIns="0" tIns="0" bIns="0">
+            <a:spAutoFit/>
+          </a:bodyPr>
+          <a:lstStyle/>
+          <a:p>
+            <a:pPr algn="l">
+              <a:spcAft>
+                <a:spcPts val="810"/>
+              </a:spcAft>
+            </a:pPr>
+            <a:r>
+              <a:rPr sz="1800" b="0" i="0">
+                <a:solidFill>
+                  <a:srgbClr val="1C1B19"/>
+                </a:solidFill>
+                <a:latin typeface="Source Serif 4"/>
+              </a:rPr>
+              <a:t>Old friends invite Keisha out. The robotics club she just joined has a team dinner the same night.</a:t>
+            </a:r>
+          </a:p>
+        </p:txBody>
+      </p:sp>
+      <p:sp>
+        <p:nvSpPr>
+          <p:cNvPr id="12" name="Rectangle 11"/>
+          <p:cNvSpPr/>
+          <p:nvPr/>
+        </p:nvSpPr>
+        <p:spPr>
+          <a:xfrm>
+            <a:off x="8016239" y="2103120"/>
+            <a:ext cx="3322320" cy="3840480"/>
+          </a:xfrm>
+          <a:prstGeom prst="rect">
+            <a:avLst/>
+          </a:prstGeom>
+          <a:solidFill>
+            <a:srgbClr val="FFFFFF"/>
+          </a:solidFill>
+          <a:ln w="15875">
+            <a:solidFill>
+              <a:srgbClr val="D8D2C6"/>
+            </a:solidFill>
+          </a:ln>
+          <a:effectLst/>
+        </p:spPr>
+        <p:style>
+          <a:lnRef idx="1">
+            <a:schemeClr val="accent1"/>
+          </a:lnRef>
+          <a:fillRef idx="3">
+            <a:schemeClr val="accent1"/>
+          </a:fillRef>
+          <a:effectRef idx="2">
+            <a:schemeClr val="accent1"/>
+          </a:effectRef>
+          <a:fontRef idx="minor">
+            <a:schemeClr val="lt1"/>
+          </a:fontRef>
+        </p:style>
+        <p:txBody>
+          <a:bodyPr rtlCol="0" anchor="ctr"/>
+          <a:lstStyle/>
+          <a:p>
+            <a:pPr algn="ctr"/>
+          </a:p>
+        </p:txBody>
+      </p:sp>
+      <p:sp>
+        <p:nvSpPr>
+          <p:cNvPr id="13" name="TextBox 12"/>
+          <p:cNvSpPr txBox="1"/>
+          <p:nvPr/>
+        </p:nvSpPr>
+        <p:spPr>
+          <a:xfrm>
+            <a:off x="8244839" y="2286000"/>
+            <a:ext cx="2865120" cy="365760"/>
+          </a:xfrm>
+          <a:prstGeom prst="rect">
+            <a:avLst/>
+          </a:prstGeom>
+          <a:noFill/>
+        </p:spPr>
+        <p:txBody>
+          <a:bodyPr wrap="square" anchor="t" lIns="0" rIns="0" tIns="0" bIns="0">
+            <a:spAutoFit/>
+          </a:bodyPr>
+          <a:lstStyle/>
+          <a:p>
+            <a:pPr algn="l">
+              <a:spcAft>
+                <a:spcPts val="585"/>
+              </a:spcAft>
+            </a:pPr>
+            <a:r>
+              <a:rPr sz="1300" b="1" i="0">
+                <a:solidFill>
+                  <a:srgbClr val="0B2D5B"/>
+                </a:solidFill>
+                <a:latin typeface="Inter Tight"/>
+              </a:rPr>
+              <a:t>NOT NEW YOURSELF</a:t>
+            </a:r>
+          </a:p>
+        </p:txBody>
+      </p:sp>
+      <p:sp>
+        <p:nvSpPr>
+          <p:cNvPr id="14" name="TextBox 13"/>
+          <p:cNvSpPr txBox="1"/>
+          <p:nvPr/>
+        </p:nvSpPr>
+        <p:spPr>
+          <a:xfrm>
+            <a:off x="8244839" y="2743200"/>
+            <a:ext cx="2865120" cy="3017520"/>
+          </a:xfrm>
+          <a:prstGeom prst="rect">
+            <a:avLst/>
+          </a:prstGeom>
+          <a:noFill/>
+        </p:spPr>
+        <p:txBody>
+          <a:bodyPr wrap="square" anchor="t" lIns="0" rIns="0" tIns="0" bIns="0">
+            <a:spAutoFit/>
+          </a:bodyPr>
+          <a:lstStyle/>
+          <a:p>
+            <a:pPr algn="l">
+              <a:spcAft>
+                <a:spcPts val="810"/>
+              </a:spcAft>
+            </a:pPr>
+            <a:r>
+              <a:rPr sz="1800" b="0" i="0">
+                <a:solidFill>
+                  <a:srgbClr val="1C1B19"/>
+                </a:solidFill>
+                <a:latin typeface="Source Serif 4"/>
+              </a:rPr>
+              <a:t>Mateo moved here from Colombia this fall. He's in your advisory and usually eats lunch in the library.</a:t>
             </a:r>
           </a:p>
         </p:txBody>
@@ -7712,7 +8091,7 @@
                 </a:solidFill>
                 <a:latin typeface="Inter Tight"/>
               </a:rPr>
-              <a:t>THE LIKING GAP</a:t>
+              <a:t>BEFORE YOU GO</a:t>
             </a:r>
           </a:p>
         </p:txBody>
@@ -7758,23 +8137,103 @@
       </p:sp>
       <p:sp>
         <p:nvSpPr>
-          <p:cNvPr id="5" name="Rectangle 4"/>
+          <p:cNvPr id="5" name="TextBox 4"/>
+          <p:cNvSpPr txBox="1"/>
+          <p:nvPr/>
+        </p:nvSpPr>
+        <p:spPr>
+          <a:xfrm>
+            <a:off x="822960" y="1188720"/>
+            <a:ext cx="10515600" cy="914400"/>
+          </a:xfrm>
+          <a:prstGeom prst="rect">
+            <a:avLst/>
+          </a:prstGeom>
+          <a:noFill/>
+        </p:spPr>
+        <p:txBody>
+          <a:bodyPr wrap="square" anchor="t" lIns="0" rIns="0" tIns="0" bIns="0">
+            <a:spAutoFit/>
+          </a:bodyPr>
+          <a:lstStyle/>
+          <a:p>
+            <a:pPr algn="l">
+              <a:spcAft>
+                <a:spcPts val="1620"/>
+              </a:spcAft>
+            </a:pPr>
+            <a:r>
+              <a:rPr sz="3600" b="1" i="0">
+                <a:solidFill>
+                  <a:srgbClr val="1C1B19"/>
+                </a:solidFill>
+                <a:latin typeface="Source Serif 4"/>
+              </a:rPr>
+              <a:t>Pick one thing that repeats.</a:t>
+            </a:r>
+          </a:p>
+        </p:txBody>
+      </p:sp>
+      <p:sp>
+        <p:nvSpPr>
+          <p:cNvPr id="6" name="TextBox 5"/>
+          <p:cNvSpPr txBox="1"/>
+          <p:nvPr/>
+        </p:nvSpPr>
+        <p:spPr>
+          <a:xfrm>
+            <a:off x="822960" y="2286000"/>
+            <a:ext cx="10515600" cy="1463040"/>
+          </a:xfrm>
+          <a:prstGeom prst="rect">
+            <a:avLst/>
+          </a:prstGeom>
+          <a:noFill/>
+        </p:spPr>
+        <p:txBody>
+          <a:bodyPr wrap="square" anchor="t" lIns="0" rIns="0" tIns="0" bIns="0">
+            <a:spAutoFit/>
+          </a:bodyPr>
+          <a:lstStyle/>
+          <a:p>
+            <a:pPr algn="l">
+              <a:spcAft>
+                <a:spcPts val="1080"/>
+              </a:spcAft>
+            </a:pPr>
+            <a:r>
+              <a:rPr sz="2400" b="0" i="0">
+                <a:solidFill>
+                  <a:srgbClr val="1C1B19"/>
+                </a:solidFill>
+                <a:latin typeface="Source Serif 4"/>
+              </a:rPr>
+              <a:t>A club, a lunch table, a weekly plan. Write which one, and when you'll start.</a:t>
+            </a:r>
+          </a:p>
+        </p:txBody>
+      </p:sp>
+      <p:sp>
+        <p:nvSpPr>
+          <p:cNvPr id="7" name="Rectangle 6"/>
           <p:cNvSpPr/>
           <p:nvPr/>
         </p:nvSpPr>
         <p:spPr>
           <a:xfrm>
-            <a:off x="822960" y="1371600"/>
-            <a:ext cx="73152" cy="3566160"/>
+            <a:off x="822960" y="4023360"/>
+            <a:ext cx="10515600" cy="1371600"/>
           </a:xfrm>
           <a:prstGeom prst="rect">
             <a:avLst/>
           </a:prstGeom>
           <a:solidFill>
-            <a:srgbClr val="F47B20"/>
+            <a:srgbClr val="FFFFFF"/>
           </a:solidFill>
-          <a:ln>
-            <a:noFill/>
+          <a:ln w="15875">
+            <a:solidFill>
+              <a:srgbClr val="1C1B19"/>
+            </a:solidFill>
           </a:ln>
           <a:effectLst/>
         </p:spPr>
@@ -7802,14 +8261,14 @@
       </p:sp>
       <p:sp>
         <p:nvSpPr>
-          <p:cNvPr id="6" name="TextBox 5"/>
+          <p:cNvPr id="8" name="TextBox 7"/>
           <p:cNvSpPr txBox="1"/>
           <p:nvPr/>
         </p:nvSpPr>
         <p:spPr>
           <a:xfrm>
-            <a:off x="1188720" y="1371600"/>
-            <a:ext cx="10058400" cy="3566160"/>
+            <a:off x="1097280" y="4206240"/>
+            <a:ext cx="10058400" cy="365760"/>
           </a:xfrm>
           <a:prstGeom prst="rect">
             <a:avLst/>
@@ -7817,38 +8276,38 @@
           <a:noFill/>
         </p:spPr>
         <p:txBody>
-          <a:bodyPr wrap="square" anchor="ctr" lIns="0" rIns="0" tIns="0" bIns="0">
+          <a:bodyPr wrap="square" anchor="t" lIns="0" rIns="0" tIns="0" bIns="0">
             <a:spAutoFit/>
           </a:bodyPr>
           <a:lstStyle/>
           <a:p>
             <a:pPr algn="l">
               <a:spcAft>
-                <a:spcPts val="1800"/>
-              </a:spcAft>
-            </a:pPr>
-            <a:r>
-              <a:rPr sz="4000" b="0" i="1">
-                <a:solidFill>
-                  <a:srgbClr val="1C1B19"/>
-                </a:solidFill>
-                <a:latin typeface="Source Serif 4"/>
-              </a:rPr>
-              <a:t>After a first conversation, people like you more than you think.</a:t>
-            </a:r>
-          </a:p>
-        </p:txBody>
-      </p:sp>
-      <p:sp>
-        <p:nvSpPr>
-          <p:cNvPr id="7" name="TextBox 6"/>
+                <a:spcPts val="540"/>
+              </a:spcAft>
+            </a:pPr>
+            <a:r>
+              <a:rPr sz="1200" b="1" i="0">
+                <a:solidFill>
+                  <a:srgbClr val="0B2D5B"/>
+                </a:solidFill>
+                <a:latin typeface="Inter Tight"/>
+              </a:rPr>
+              <a:t>STUDENT PAGE</a:t>
+            </a:r>
+          </a:p>
+        </p:txBody>
+      </p:sp>
+      <p:sp>
+        <p:nvSpPr>
+          <p:cNvPr id="9" name="TextBox 8"/>
           <p:cNvSpPr txBox="1"/>
           <p:nvPr/>
         </p:nvSpPr>
         <p:spPr>
           <a:xfrm>
-            <a:off x="1188720" y="5120640"/>
-            <a:ext cx="10058400" cy="914400"/>
+            <a:off x="1097280" y="4617720"/>
+            <a:ext cx="10058400" cy="640080"/>
           </a:xfrm>
           <a:prstGeom prst="rect">
             <a:avLst/>
@@ -7863,17 +8322,17 @@
           <a:p>
             <a:pPr algn="l">
               <a:spcAft>
-                <a:spcPts val="810"/>
-              </a:spcAft>
-            </a:pPr>
-            <a:r>
-              <a:rPr sz="1800" b="0" i="0">
-                <a:solidFill>
-                  <a:srgbClr val="5D5A54"/>
+                <a:spcPts val="900"/>
+              </a:spcAft>
+            </a:pPr>
+            <a:r>
+              <a:rPr sz="2000" b="0" i="0">
+                <a:solidFill>
+                  <a:srgbClr val="1C1B19"/>
                 </a:solidFill>
                 <a:latin typeface="Inter Tight"/>
               </a:rPr>
-              <a:t>With a partner: what's an easy way to say hi again tomorrow?</a:t>
+              <a:t>https://rmwtoolkit.github.io/bcds-toolkit/new-school-who-dis-high-school.html</a:t>
             </a:r>
           </a:p>
         </p:txBody>
@@ -7887,12 +8346,12 @@
 </file>
 
 <file path=ppt/slides/slide9.xml><?xml version="1.0" encoding="utf-8"?>
-<p:sld xmlns:a="http://schemas.openxmlformats.org/drawingml/2006/main" xmlns:p="http://schemas.openxmlformats.org/presentationml/2006/main" xmlns:r="http://schemas.openxmlformats.org/officeDocument/2006/relationships">
+<p:sld xmlns:a="http://schemas.openxmlformats.org/drawingml/2006/main" xmlns:p="http://schemas.openxmlformats.org/presentationml/2006/main" xmlns:r="http://schemas.openxmlformats.org/officeDocument/2006/relationships" show="0">
   <p:cSld>
     <p:bg>
       <p:bgPr>
         <a:solidFill>
-          <a:srgbClr val="F7F4EE"/>
+          <a:srgbClr val="EEEBE4"/>
         </a:solidFill>
         <a:effectLst/>
       </p:bgPr>
@@ -7912,14 +8371,14 @@
         </p:nvSpPr>
         <p:spPr>
           <a:xfrm>
-            <a:off x="548640" y="502920"/>
-            <a:ext cx="457200" cy="54864"/>
+            <a:off x="0" y="0"/>
+            <a:ext cx="12191695" cy="384048"/>
           </a:xfrm>
           <a:prstGeom prst="rect">
             <a:avLst/>
           </a:prstGeom>
           <a:solidFill>
-            <a:srgbClr val="F47B20"/>
+            <a:srgbClr val="0B2D5B"/>
           </a:solidFill>
           <a:ln>
             <a:noFill/>
@@ -7956,8 +8415,8 @@
         </p:nvSpPr>
         <p:spPr>
           <a:xfrm>
-            <a:off x="1143000" y="393192"/>
-            <a:ext cx="8229600" cy="274320"/>
+            <a:off x="548640" y="100584"/>
+            <a:ext cx="10972800" cy="274320"/>
           </a:xfrm>
           <a:prstGeom prst="rect">
             <a:avLst/>
@@ -7972,17 +8431,17 @@
           <a:p>
             <a:pPr algn="l">
               <a:spcAft>
-                <a:spcPts val="540"/>
-              </a:spcAft>
-            </a:pPr>
-            <a:r>
-              <a:rPr sz="1200" b="1" i="0">
-                <a:solidFill>
-                  <a:srgbClr val="5D5A54"/>
+                <a:spcPts val="495"/>
+              </a:spcAft>
+            </a:pPr>
+            <a:r>
+              <a:rPr sz="1100" b="1" i="0">
+                <a:solidFill>
+                  <a:srgbClr val="FFFFFF"/>
                 </a:solidFill>
                 <a:latin typeface="Inter Tight"/>
               </a:rPr>
-              <a:t>SPEED UP THE MATH</a:t>
+              <a:t>TEACHER PAGE  ·  skipped when you present  ·  Lesson plan</a:t>
             </a:r>
           </a:p>
         </p:txBody>
@@ -7995,8 +8454,8 @@
         </p:nvSpPr>
         <p:spPr>
           <a:xfrm>
-            <a:off x="8229600" y="6400800"/>
-            <a:ext cx="3410712" cy="274320"/>
+            <a:off x="548640" y="685800"/>
+            <a:ext cx="10972800" cy="731520"/>
           </a:xfrm>
           <a:prstGeom prst="rect">
             <a:avLst/>
@@ -8009,19 +8468,19 @@
           </a:bodyPr>
           <a:lstStyle/>
           <a:p>
-            <a:pPr algn="r">
-              <a:spcAft>
-                <a:spcPts val="450"/>
-              </a:spcAft>
-            </a:pPr>
-            <a:r>
-              <a:rPr sz="1000" b="0" i="0">
-                <a:solidFill>
-                  <a:srgbClr val="5D5A54"/>
-                </a:solidFill>
-                <a:latin typeface="Inter Tight"/>
-              </a:rPr>
-              <a:t>Beaver Counseling</a:t>
+            <a:pPr algn="l">
+              <a:spcAft>
+                <a:spcPts val="1530"/>
+              </a:spcAft>
+            </a:pPr>
+            <a:r>
+              <a:rPr sz="3400" b="1" i="0">
+                <a:solidFill>
+                  <a:srgbClr val="1C1B19"/>
+                </a:solidFill>
+                <a:latin typeface="Source Serif 4"/>
+              </a:rPr>
+              <a:t>New School, Who Dis</a:t>
             </a:r>
           </a:p>
         </p:txBody>
@@ -8034,8 +8493,8 @@
         </p:nvSpPr>
         <p:spPr>
           <a:xfrm>
-            <a:off x="822960" y="1005840"/>
-            <a:ext cx="10515600" cy="1097280"/>
+            <a:off x="548640" y="1325880"/>
+            <a:ext cx="10972800" cy="365760"/>
           </a:xfrm>
           <a:prstGeom prst="rect">
             <a:avLst/>
@@ -8050,17 +8509,17 @@
           <a:p>
             <a:pPr algn="l">
               <a:spcAft>
-                <a:spcPts val="1620"/>
-              </a:spcAft>
-            </a:pPr>
-            <a:r>
-              <a:rPr sz="3600" b="1" i="0">
-                <a:solidFill>
-                  <a:srgbClr val="1C1B19"/>
-                </a:solidFill>
-                <a:latin typeface="Source Serif 4"/>
-              </a:rPr>
-              <a:t>More hours, better hours</a:t>
+                <a:spcPts val="630"/>
+              </a:spcAft>
+            </a:pPr>
+            <a:r>
+              <a:rPr sz="1400" b="0" i="0">
+                <a:solidFill>
+                  <a:srgbClr val="5D5A54"/>
+                </a:solidFill>
+                <a:latin typeface="Inter Tight"/>
+              </a:rPr>
+              <a:t>Upper School  ·  20 minutes (fits a 30-minute advisory, with time for your opening check-in; 10-minute version below)  ·  Any grade</a:t>
             </a:r>
           </a:p>
         </p:txBody>
@@ -8073,8 +8532,8 @@
         </p:nvSpPr>
         <p:spPr>
           <a:xfrm>
-            <a:off x="822960" y="2057400"/>
-            <a:ext cx="548640" cy="804672"/>
+            <a:off x="548640" y="1828800"/>
+            <a:ext cx="5120640" cy="4389120"/>
           </a:xfrm>
           <a:prstGeom prst="rect">
             <a:avLst/>
@@ -8089,17 +8548,113 @@
           <a:p>
             <a:pPr algn="l">
               <a:spcAft>
-                <a:spcPts val="1170"/>
-              </a:spcAft>
-            </a:pPr>
-            <a:r>
-              <a:rPr sz="2600" b="1" i="0">
-                <a:solidFill>
-                  <a:srgbClr val="F47B20"/>
+                <a:spcPts val="675"/>
+              </a:spcAft>
+            </a:pPr>
+            <a:r>
+              <a:rPr sz="1100" b="1" i="0">
+                <a:solidFill>
+                  <a:srgbClr val="0B2D5B"/>
+                </a:solidFill>
+                <a:latin typeface="Inter Tight"/>
+              </a:rPr>
+              <a:t>GOAL</a:t>
+            </a:r>
+          </a:p>
+          <a:p>
+            <a:pPr algn="l">
+              <a:spcAft>
+                <a:spcPts val="675"/>
+              </a:spcAft>
+            </a:pPr>
+            <a:r>
+              <a:rPr sz="1500" b="0" i="0">
+                <a:solidFill>
+                  <a:srgbClr val="1C1B19"/>
                 </a:solidFill>
                 <a:latin typeface="Source Serif 4"/>
               </a:rPr>
-              <a:t>1</a:t>
+              <a:t>Students can explain why friendships take time (they run on hours together), use the liking gap to act on the better guess after an awkward conversation, and pick one thing that repeats. Students who aren't new pick one way to add hours for someone who is.</a:t>
+            </a:r>
+          </a:p>
+          <a:p>
+            <a:pPr algn="l">
+              <a:spcAft>
+                <a:spcPts val="675"/>
+              </a:spcAft>
+            </a:pPr>
+            <a:r>
+              <a:rPr sz="1500" b="0" i="0">
+                <a:solidFill>
+                  <a:srgbClr val="1C1B19"/>
+                </a:solidFill>
+                <a:latin typeface="Source Serif 4"/>
+              </a:rPr>
+              <a:t/>
+            </a:r>
+          </a:p>
+          <a:p>
+            <a:pPr algn="l">
+              <a:spcAft>
+                <a:spcPts val="675"/>
+              </a:spcAft>
+            </a:pPr>
+            <a:r>
+              <a:rPr sz="1100" b="1" i="0">
+                <a:solidFill>
+                  <a:srgbClr val="0B2D5B"/>
+                </a:solidFill>
+                <a:latin typeface="Inter Tight"/>
+              </a:rPr>
+              <a:t>MATERIALS</a:t>
+            </a:r>
+          </a:p>
+          <a:p>
+            <a:pPr algn="l">
+              <a:spcAft>
+                <a:spcPts val="675"/>
+              </a:spcAft>
+            </a:pPr>
+            <a:r>
+              <a:rPr sz="1500" b="0" i="0">
+                <a:solidFill>
+                  <a:srgbClr val="1C1B19"/>
+                </a:solidFill>
+                <a:latin typeface="Source Serif 4"/>
+              </a:rPr>
+              <a:t>Index cards: one per student, for the anonymous guess and the private plan</a:t>
+            </a:r>
+          </a:p>
+          <a:p>
+            <a:pPr algn="l">
+              <a:spcAft>
+                <a:spcPts val="675"/>
+              </a:spcAft>
+            </a:pPr>
+            <a:r>
+              <a:rPr sz="1500" b="0" i="0">
+                <a:solidFill>
+                  <a:srgbClr val="1C1B19"/>
+                </a:solidFill>
+                <a:latin typeface="Source Serif 4"/>
+              </a:rPr>
+              <a:t>A board or sheet of paper for the tally</a:t>
+            </a:r>
+          </a:p>
+          <a:p>
+            <a:pPr algn="l">
+              <a:spcAft>
+                <a:spcPts val="675"/>
+              </a:spcAft>
+            </a:pPr>
+            <a:r>
+              <a:rPr sz="1500" b="0" i="0">
+                <a:solidFill>
+                  <a:srgbClr val="1C1B19"/>
+                </a:solidFill>
+                <a:latin typeface="Source Serif 4"/>
+              </a:rPr>
+              <a:t>The student page link (last slide) to share after advisory</a:t>
             </a:r>
           </a:p>
         </p:txBody>
@@ -8112,8 +8667,8 @@
         </p:nvSpPr>
         <p:spPr>
           <a:xfrm>
-            <a:off x="1463040" y="2093976"/>
-            <a:ext cx="9875520" cy="804672"/>
+            <a:off x="6126480" y="1828800"/>
+            <a:ext cx="5486400" cy="4389120"/>
           </a:xfrm>
           <a:prstGeom prst="rect">
             <a:avLst/>
@@ -8128,409 +8683,215 @@
           <a:p>
             <a:pPr algn="l">
               <a:spcAft>
-                <a:spcPts val="945"/>
-              </a:spcAft>
-            </a:pPr>
-            <a:r>
-              <a:rPr sz="2100" b="1" i="0">
+                <a:spcPts val="630"/>
+              </a:spcAft>
+            </a:pPr>
+            <a:r>
+              <a:rPr sz="1100" b="1" i="0">
+                <a:solidFill>
+                  <a:srgbClr val="0B2D5B"/>
+                </a:solidFill>
+                <a:latin typeface="Inter Tight"/>
+              </a:rPr>
+              <a:t>FLOW</a:t>
+            </a:r>
+          </a:p>
+          <a:p>
+            <a:pPr algn="l">
+              <a:spcAft>
+                <a:spcPts val="630"/>
+              </a:spcAft>
+            </a:pPr>
+            <a:r>
+              <a:rPr sz="1300" b="1" i="0">
+                <a:solidFill>
+                  <a:srgbClr val="F47B20"/>
+                </a:solidFill>
+                <a:latin typeface="Inter Tight"/>
+              </a:rPr>
+              <a:t>3 min   </a:t>
+            </a:r>
+            <a:r>
+              <a:rPr sz="1400" b="0" i="0">
                 <a:solidFill>
                   <a:srgbClr val="1C1B19"/>
                 </a:solidFill>
                 <a:latin typeface="Source Serif 4"/>
               </a:rPr>
-              <a:t>Join something weekly.</a:t>
-            </a:r>
-          </a:p>
-          <a:p>
-            <a:pPr algn="l">
-              <a:spcAft>
-                <a:spcPts val="945"/>
-              </a:spcAft>
-            </a:pPr>
-            <a:r>
-              <a:rPr sz="1600" b="0" i="0">
-                <a:solidFill>
-                  <a:srgbClr val="5D5A54"/>
+              <a:t>The guess (anonymous cards)</a:t>
+            </a:r>
+          </a:p>
+          <a:p>
+            <a:pPr algn="l">
+              <a:spcAft>
+                <a:spcPts val="630"/>
+              </a:spcAft>
+            </a:pPr>
+            <a:r>
+              <a:rPr sz="1300" b="1" i="0">
+                <a:solidFill>
+                  <a:srgbClr val="F47B20"/>
+                </a:solidFill>
+                <a:latin typeface="Inter Tight"/>
+              </a:rPr>
+              <a:t>4 min   </a:t>
+            </a:r>
+            <a:r>
+              <a:rPr sz="1400" b="0" i="0">
+                <a:solidFill>
+                  <a:srgbClr val="1C1B19"/>
                 </a:solidFill>
                 <a:latin typeface="Source Serif 4"/>
               </a:rPr>
-              <a:t>A team, club, show, job, or faith group.</a:t>
-            </a:r>
-          </a:p>
-        </p:txBody>
-      </p:sp>
-      <p:sp>
-        <p:nvSpPr>
-          <p:cNvPr id="8" name="TextBox 7"/>
-          <p:cNvSpPr txBox="1"/>
-          <p:nvPr/>
-        </p:nvSpPr>
-        <p:spPr>
-          <a:xfrm>
-            <a:off x="822960" y="2862072"/>
-            <a:ext cx="548640" cy="804672"/>
-          </a:xfrm>
-          <a:prstGeom prst="rect">
-            <a:avLst/>
-          </a:prstGeom>
-          <a:noFill/>
-        </p:spPr>
-        <p:txBody>
-          <a:bodyPr wrap="square" anchor="t" lIns="0" rIns="0" tIns="0" bIns="0">
-            <a:spAutoFit/>
-          </a:bodyPr>
-          <a:lstStyle/>
-          <a:p>
-            <a:pPr algn="l">
-              <a:spcAft>
-                <a:spcPts val="1170"/>
-              </a:spcAft>
-            </a:pPr>
-            <a:r>
-              <a:rPr sz="2600" b="1" i="0">
+              <a:t>Friendship runs on hours</a:t>
+            </a:r>
+          </a:p>
+          <a:p>
+            <a:pPr algn="l">
+              <a:spcAft>
+                <a:spcPts val="630"/>
+              </a:spcAft>
+            </a:pPr>
+            <a:r>
+              <a:rPr sz="1300" b="1" i="0">
                 <a:solidFill>
                   <a:srgbClr val="F47B20"/>
                 </a:solidFill>
+                <a:latin typeface="Inter Tight"/>
+              </a:rPr>
+              <a:t>3 min   </a:t>
+            </a:r>
+            <a:r>
+              <a:rPr sz="1400" b="0" i="0">
+                <a:solidFill>
+                  <a:srgbClr val="1C1B19"/>
+                </a:solidFill>
                 <a:latin typeface="Source Serif 4"/>
               </a:rPr>
-              <a:t>2</a:t>
-            </a:r>
-          </a:p>
-        </p:txBody>
-      </p:sp>
-      <p:sp>
-        <p:nvSpPr>
-          <p:cNvPr id="9" name="TextBox 8"/>
-          <p:cNvSpPr txBox="1"/>
-          <p:nvPr/>
-        </p:nvSpPr>
-        <p:spPr>
-          <a:xfrm>
-            <a:off x="1463040" y="2898648"/>
-            <a:ext cx="9875520" cy="804672"/>
-          </a:xfrm>
-          <a:prstGeom prst="rect">
-            <a:avLst/>
-          </a:prstGeom>
-          <a:noFill/>
-        </p:spPr>
-        <p:txBody>
-          <a:bodyPr wrap="square" anchor="t" lIns="0" rIns="0" tIns="0" bIns="0">
-            <a:spAutoFit/>
-          </a:bodyPr>
-          <a:lstStyle/>
-          <a:p>
-            <a:pPr algn="l">
-              <a:spcAft>
-                <a:spcPts val="945"/>
-              </a:spcAft>
-            </a:pPr>
-            <a:r>
-              <a:rPr sz="2100" b="1" i="0">
+              <a:t>The liking gap (pair-share)</a:t>
+            </a:r>
+          </a:p>
+          <a:p>
+            <a:pPr algn="l">
+              <a:spcAft>
+                <a:spcPts val="630"/>
+              </a:spcAft>
+            </a:pPr>
+            <a:r>
+              <a:rPr sz="1300" b="1" i="0">
+                <a:solidFill>
+                  <a:srgbClr val="F47B20"/>
+                </a:solidFill>
+                <a:latin typeface="Inter Tight"/>
+              </a:rPr>
+              <a:t>3 min   </a:t>
+            </a:r>
+            <a:r>
+              <a:rPr sz="1400" b="0" i="0">
                 <a:solidFill>
                   <a:srgbClr val="1C1B19"/>
                 </a:solidFill>
                 <a:latin typeface="Source Serif 4"/>
               </a:rPr>
-              <a:t>Same lunch table, three days running.</a:t>
-            </a:r>
-          </a:p>
-          <a:p>
-            <a:pPr algn="l">
-              <a:spcAft>
-                <a:spcPts val="945"/>
-              </a:spcAft>
-            </a:pPr>
-            <a:r>
-              <a:rPr sz="1600" b="0" i="0">
-                <a:solidFill>
-                  <a:srgbClr val="5D5A54"/>
+              <a:t>More hours, better hours</a:t>
+            </a:r>
+          </a:p>
+          <a:p>
+            <a:pPr algn="l">
+              <a:spcAft>
+                <a:spcPts val="630"/>
+              </a:spcAft>
+            </a:pPr>
+            <a:r>
+              <a:rPr sz="1300" b="1" i="0">
+                <a:solidFill>
+                  <a:srgbClr val="F47B20"/>
+                </a:solidFill>
+                <a:latin typeface="Inter Tight"/>
+              </a:rPr>
+              <a:t>4 min   </a:t>
+            </a:r>
+            <a:r>
+              <a:rPr sz="1400" b="0" i="0">
+                <a:solidFill>
+                  <a:srgbClr val="1C1B19"/>
                 </a:solidFill>
                 <a:latin typeface="Source Serif 4"/>
               </a:rPr>
-              <a:t>By day three it feels less like a test.</a:t>
-            </a:r>
-          </a:p>
-        </p:txBody>
-      </p:sp>
-      <p:sp>
-        <p:nvSpPr>
-          <p:cNvPr id="10" name="TextBox 9"/>
-          <p:cNvSpPr txBox="1"/>
-          <p:nvPr/>
-        </p:nvSpPr>
-        <p:spPr>
-          <a:xfrm>
-            <a:off x="822960" y="3666744"/>
-            <a:ext cx="548640" cy="804672"/>
-          </a:xfrm>
-          <a:prstGeom prst="rect">
-            <a:avLst/>
-          </a:prstGeom>
-          <a:noFill/>
-        </p:spPr>
-        <p:txBody>
-          <a:bodyPr wrap="square" anchor="t" lIns="0" rIns="0" tIns="0" bIns="0">
-            <a:spAutoFit/>
-          </a:bodyPr>
-          <a:lstStyle/>
-          <a:p>
-            <a:pPr algn="l">
-              <a:spcAft>
-                <a:spcPts val="1170"/>
-              </a:spcAft>
-            </a:pPr>
-            <a:r>
-              <a:rPr sz="2600" b="1" i="0">
+              <a:t>Three moments (scenario talk)</a:t>
+            </a:r>
+          </a:p>
+          <a:p>
+            <a:pPr algn="l">
+              <a:spcAft>
+                <a:spcPts val="630"/>
+              </a:spcAft>
+            </a:pPr>
+            <a:r>
+              <a:rPr sz="1300" b="1" i="0">
                 <a:solidFill>
                   <a:srgbClr val="F47B20"/>
                 </a:solidFill>
+                <a:latin typeface="Inter Tight"/>
+              </a:rPr>
+              <a:t>3 min   </a:t>
+            </a:r>
+            <a:r>
+              <a:rPr sz="1400" b="0" i="0">
+                <a:solidFill>
+                  <a:srgbClr val="1C1B19"/>
+                </a:solidFill>
                 <a:latin typeface="Source Serif 4"/>
               </a:rPr>
-              <a:t>3</a:t>
-            </a:r>
-          </a:p>
-        </p:txBody>
-      </p:sp>
-      <p:sp>
-        <p:nvSpPr>
-          <p:cNvPr id="11" name="TextBox 10"/>
-          <p:cNvSpPr txBox="1"/>
-          <p:nvPr/>
-        </p:nvSpPr>
-        <p:spPr>
-          <a:xfrm>
-            <a:off x="1463040" y="3703320"/>
-            <a:ext cx="9875520" cy="804672"/>
-          </a:xfrm>
-          <a:prstGeom prst="rect">
-            <a:avLst/>
-          </a:prstGeom>
-          <a:noFill/>
-        </p:spPr>
-        <p:txBody>
-          <a:bodyPr wrap="square" anchor="t" lIns="0" rIns="0" tIns="0" bIns="0">
-            <a:spAutoFit/>
-          </a:bodyPr>
-          <a:lstStyle/>
-          <a:p>
-            <a:pPr algn="l">
-              <a:spcAft>
-                <a:spcPts val="945"/>
-              </a:spcAft>
-            </a:pPr>
-            <a:r>
-              <a:rPr sz="2100" b="1" i="0">
+              <a:t>One thing that repeats (private card) and the link</a:t>
+            </a:r>
+          </a:p>
+          <a:p>
+            <a:pPr algn="l">
+              <a:spcAft>
+                <a:spcPts val="630"/>
+              </a:spcAft>
+            </a:pPr>
+            <a:r>
+              <a:rPr sz="1400" b="0" i="0">
                 <a:solidFill>
                   <a:srgbClr val="1C1B19"/>
                 </a:solidFill>
                 <a:latin typeface="Source Serif 4"/>
               </a:rPr>
-              <a:t>Turn class into a plan.</a:t>
-            </a:r>
-          </a:p>
-          <a:p>
-            <a:pPr algn="l">
-              <a:spcAft>
-                <a:spcPts val="945"/>
-              </a:spcAft>
-            </a:pPr>
-            <a:r>
-              <a:rPr sz="1600" b="0" i="0">
-                <a:solidFill>
-                  <a:srgbClr val="5D5A54"/>
+              <a:t/>
+            </a:r>
+          </a:p>
+          <a:p>
+            <a:pPr algn="l">
+              <a:spcAft>
+                <a:spcPts val="630"/>
+              </a:spcAft>
+            </a:pPr>
+            <a:r>
+              <a:rPr sz="1100" b="1" i="0">
+                <a:solidFill>
+                  <a:srgbClr val="0B2D5B"/>
+                </a:solidFill>
+                <a:latin typeface="Inter Tight"/>
+              </a:rPr>
+              <a:t>SHORT ON TIME (10-MINUTE CHECK-IN)</a:t>
+            </a:r>
+          </a:p>
+          <a:p>
+            <a:pPr algn="l">
+              <a:spcAft>
+                <a:spcPts val="630"/>
+              </a:spcAft>
+            </a:pPr>
+            <a:r>
+              <a:rPr sz="1400" b="0" i="0">
+                <a:solidFill>
+                  <a:srgbClr val="1C1B19"/>
                 </a:solidFill>
                 <a:latin typeface="Source Serif 4"/>
               </a:rPr>
-              <a:t>"Library Thursday to study for chem?"</a:t>
-            </a:r>
-          </a:p>
-        </p:txBody>
-      </p:sp>
-      <p:sp>
-        <p:nvSpPr>
-          <p:cNvPr id="12" name="TextBox 11"/>
-          <p:cNvSpPr txBox="1"/>
-          <p:nvPr/>
-        </p:nvSpPr>
-        <p:spPr>
-          <a:xfrm>
-            <a:off x="822960" y="4471416"/>
-            <a:ext cx="548640" cy="804672"/>
-          </a:xfrm>
-          <a:prstGeom prst="rect">
-            <a:avLst/>
-          </a:prstGeom>
-          <a:noFill/>
-        </p:spPr>
-        <p:txBody>
-          <a:bodyPr wrap="square" anchor="t" lIns="0" rIns="0" tIns="0" bIns="0">
-            <a:spAutoFit/>
-          </a:bodyPr>
-          <a:lstStyle/>
-          <a:p>
-            <a:pPr algn="l">
-              <a:spcAft>
-                <a:spcPts val="1170"/>
-              </a:spcAft>
-            </a:pPr>
-            <a:r>
-              <a:rPr sz="2600" b="1" i="0">
-                <a:solidFill>
-                  <a:srgbClr val="F47B20"/>
-                </a:solidFill>
-                <a:latin typeface="Source Serif 4"/>
-              </a:rPr>
-              <a:t>4</a:t>
-            </a:r>
-          </a:p>
-        </p:txBody>
-      </p:sp>
-      <p:sp>
-        <p:nvSpPr>
-          <p:cNvPr id="13" name="TextBox 12"/>
-          <p:cNvSpPr txBox="1"/>
-          <p:nvPr/>
-        </p:nvSpPr>
-        <p:spPr>
-          <a:xfrm>
-            <a:off x="1463040" y="4507992"/>
-            <a:ext cx="9875520" cy="804672"/>
-          </a:xfrm>
-          <a:prstGeom prst="rect">
-            <a:avLst/>
-          </a:prstGeom>
-          <a:noFill/>
-        </p:spPr>
-        <p:txBody>
-          <a:bodyPr wrap="square" anchor="t" lIns="0" rIns="0" tIns="0" bIns="0">
-            <a:spAutoFit/>
-          </a:bodyPr>
-          <a:lstStyle/>
-          <a:p>
-            <a:pPr algn="l">
-              <a:spcAft>
-                <a:spcPts val="945"/>
-              </a:spcAft>
-            </a:pPr>
-            <a:r>
-              <a:rPr sz="2100" b="1" i="0">
-                <a:solidFill>
-                  <a:srgbClr val="1C1B19"/>
-                </a:solidFill>
-                <a:latin typeface="Source Serif 4"/>
-              </a:rPr>
-              <a:t>Ask one real follow-up.</a:t>
-            </a:r>
-          </a:p>
-          <a:p>
-            <a:pPr algn="l">
-              <a:spcAft>
-                <a:spcPts val="945"/>
-              </a:spcAft>
-            </a:pPr>
-            <a:r>
-              <a:rPr sz="1600" b="0" i="0">
-                <a:solidFill>
-                  <a:srgbClr val="5D5A54"/>
-                </a:solidFill>
-                <a:latin typeface="Source Serif 4"/>
-              </a:rPr>
-              <a:t>Past "what lunch do you have."</a:t>
-            </a:r>
-          </a:p>
-        </p:txBody>
-      </p:sp>
-      <p:sp>
-        <p:nvSpPr>
-          <p:cNvPr id="14" name="TextBox 13"/>
-          <p:cNvSpPr txBox="1"/>
-          <p:nvPr/>
-        </p:nvSpPr>
-        <p:spPr>
-          <a:xfrm>
-            <a:off x="822960" y="5276088"/>
-            <a:ext cx="548640" cy="804672"/>
-          </a:xfrm>
-          <a:prstGeom prst="rect">
-            <a:avLst/>
-          </a:prstGeom>
-          <a:noFill/>
-        </p:spPr>
-        <p:txBody>
-          <a:bodyPr wrap="square" anchor="t" lIns="0" rIns="0" tIns="0" bIns="0">
-            <a:spAutoFit/>
-          </a:bodyPr>
-          <a:lstStyle/>
-          <a:p>
-            <a:pPr algn="l">
-              <a:spcAft>
-                <a:spcPts val="1170"/>
-              </a:spcAft>
-            </a:pPr>
-            <a:r>
-              <a:rPr sz="2600" b="1" i="0">
-                <a:solidFill>
-                  <a:srgbClr val="F47B20"/>
-                </a:solidFill>
-                <a:latin typeface="Source Serif 4"/>
-              </a:rPr>
-              <a:t>5</a:t>
-            </a:r>
-          </a:p>
-        </p:txBody>
-      </p:sp>
-      <p:sp>
-        <p:nvSpPr>
-          <p:cNvPr id="15" name="TextBox 14"/>
-          <p:cNvSpPr txBox="1"/>
-          <p:nvPr/>
-        </p:nvSpPr>
-        <p:spPr>
-          <a:xfrm>
-            <a:off x="1463040" y="5312664"/>
-            <a:ext cx="9875520" cy="804672"/>
-          </a:xfrm>
-          <a:prstGeom prst="rect">
-            <a:avLst/>
-          </a:prstGeom>
-          <a:noFill/>
-        </p:spPr>
-        <p:txBody>
-          <a:bodyPr wrap="square" anchor="t" lIns="0" rIns="0" tIns="0" bIns="0">
-            <a:spAutoFit/>
-          </a:bodyPr>
-          <a:lstStyle/>
-          <a:p>
-            <a:pPr algn="l">
-              <a:spcAft>
-                <a:spcPts val="945"/>
-              </a:spcAft>
-            </a:pPr>
-            <a:r>
-              <a:rPr sz="2100" b="1" i="0">
-                <a:solidFill>
-                  <a:srgbClr val="1C1B19"/>
-                </a:solidFill>
-                <a:latin typeface="Source Serif 4"/>
-              </a:rPr>
-              <a:t>Find one adult.</a:t>
-            </a:r>
-          </a:p>
-          <a:p>
-            <a:pPr algn="l">
-              <a:spcAft>
-                <a:spcPts val="945"/>
-              </a:spcAft>
-            </a:pPr>
-            <a:r>
-              <a:rPr sz="1600" b="0" i="0">
-                <a:solidFill>
-                  <a:srgbClr val="5D5A54"/>
-                </a:solidFill>
-                <a:latin typeface="Source Serif 4"/>
-              </a:rPr>
-              <a:t>An advisor, coach, teacher, or counselor.</a:t>
+              <a:t>The guess and the tally (3), friendship runs on hours (3), the liking gap (2), one thing that repeats and the link (2).</a:t>
             </a:r>
           </a:p>
         </p:txBody>

--- a/decks/new-school-who-dis-lesson-v2.pptx
+++ b/decks/new-school-who-dis-lesson-v2.pptx
@@ -6001,6 +6001,45 @@
                 <a:latin typeface="Inter Tight"/>
               </a:rPr>
               <a:t>Beaver Upper School · Counseling</a:t>
+            </a:r>
+          </a:p>
+        </p:txBody>
+      </p:sp>
+      <p:sp>
+        <p:nvSpPr>
+          <p:cNvPr id="8" name="TextBox 7"/>
+          <p:cNvSpPr txBox="1"/>
+          <p:nvPr/>
+        </p:nvSpPr>
+        <p:spPr>
+          <a:xfrm>
+            <a:off x="6766560" y="5897880"/>
+            <a:ext cx="4846320" cy="640080"/>
+          </a:xfrm>
+          <a:prstGeom prst="rect">
+            <a:avLst/>
+          </a:prstGeom>
+          <a:noFill/>
+        </p:spPr>
+        <p:txBody>
+          <a:bodyPr wrap="square" anchor="t" lIns="0" rIns="0" tIns="0" bIns="0">
+            <a:spAutoFit/>
+          </a:bodyPr>
+          <a:lstStyle/>
+          <a:p>
+            <a:pPr algn="r">
+              <a:spcAft>
+                <a:spcPts val="495"/>
+              </a:spcAft>
+            </a:pPr>
+            <a:r>
+              <a:rPr sz="1100" b="0" i="0">
+                <a:solidFill>
+                  <a:srgbClr val="E8E4DA"/>
+                </a:solidFill>
+                <a:latin typeface="Inter Tight"/>
+              </a:rPr>
+              <a:t>Written by Dr. Rick Wilson, with AI-assisted drafting. Every lesson is reviewed and edited by Dr. Wilson.</a:t>
             </a:r>
           </a:p>
         </p:txBody>
